--- a/docs/presentacion-backend-rabbitmq.pptx
+++ b/docs/presentacion-backend-rabbitmq.pptx
@@ -20,10 +20,9 @@
     <p:sldId id="268" r:id="rId14"/>
     <p:sldId id="269" r:id="rId15"/>
     <p:sldId id="270" r:id="rId16"/>
-    <p:sldId id="271" r:id="rId17"/>
   </p:sldIdLst>
   <p:notesMasterIdLst>
-    <p:notesMasterId r:id="rId18"/>
+    <p:notesMasterId r:id="rId17"/>
   </p:notesMasterIdLst>
   <p:sldSz cx="12192000" cy="6858000"/>
   <p:notesSz cx="6858000" cy="12192000"/>
@@ -122,21 +121,21 @@
   <p:extLst>
     <p:ext uri="{521415D9-36F7-43E2-AB2F-B90AF26B5E84}">
       <p14:sectionLst xmlns:p14="http://schemas.microsoft.com/office/powerpoint/2010/main">
-        <p14:section name="Introducción" id="{903945d4-cdd9-87f1-f4d6-e79ea27099a3}">
+        <p14:section name="Introducción" id="{483f87b3-37de-b288-6ad7-39cc01814f09}">
           <p14:sldIdLst>
             <p14:sldId id="256"/>
             <p14:sldId id="257"/>
             <p14:sldId id="258"/>
           </p14:sldIdLst>
         </p14:section>
-        <p14:section name="Conceptos de RabbitMQ" id="{11d65c03-a0ed-71f7-9c41-43ad0e38f7e5}">
+        <p14:section name="Conceptos de RabbitMQ" id="{074dea89-be21-221d-0d8d-bf30aafb45f9}">
           <p14:sldIdLst>
             <p14:sldId id="259"/>
             <p14:sldId id="260"/>
             <p14:sldId id="261"/>
           </p14:sldIdLst>
         </p14:section>
-        <p14:section name="Topología y flujo" id="{3b8555a3-b4df-c64b-3601-f7928a53a9b6}">
+        <p14:section name="Topología y flujo" id="{9d2dfec4-e117-dea6-3d41-0bc05b0459e1}">
           <p14:sldIdLst>
             <p14:sldId id="262"/>
             <p14:sldId id="263"/>
@@ -144,18 +143,17 @@
             <p14:sldId id="265"/>
           </p14:sldIdLst>
         </p14:section>
-        <p14:section name="Confiabilidad" id="{50345d57-3c80-e97e-d5d7-b556a91a4bc7}">
+        <p14:section name="Confiabilidad" id="{21136ebf-97f9-f10d-3927-b10899cb79ff}">
           <p14:sldIdLst>
             <p14:sldId id="266"/>
             <p14:sldId id="267"/>
-            <p14:sldId id="268"/>
           </p14:sldIdLst>
         </p14:section>
-        <p14:section name="Frontend y operación" id="{09340268-07b1-b9ae-0a1a-a744b5a990d4}">
+        <p14:section name="Frontend y operación" id="{40e36f14-ff4d-5b2e-fe14-373c542efc89}">
           <p14:sldIdLst>
+            <p14:sldId id="268"/>
             <p14:sldId id="269"/>
             <p14:sldId id="270"/>
-            <p14:sldId id="271"/>
           </p14:sldIdLst>
         </p14:section>
       </p14:sectionLst>
@@ -650,7 +648,7 @@
           <a:p>
             <a:r>
               <a:rPr lang="en-US" dirty="0"/>
-              <a:t>Un detalle importante: ¿cuándo mandar el mensaje? Si lo mando dentro de la transacción y después la base hace rollback, por ejemplo porque otro usuario tomó el cupo al mismo tiempo, los consumidores procesarían una reserva fantasma. Por eso BookingService solo publica un evento de Spring, y @TransactionalEventListener lo ejecuta después del commit. Si falla el envío a RabbitMQ se loguea y no se le cae la respuesta al usuario. El trade-off honesto: si RabbitMQ está caído en ese instante, ese mensaje se pierde. El patrón outbox lo resolvería guardando el evento en una tabla dentro de la misma transacción; para este MVP no lo implementamos.</a:t>
+              <a:t>¿Cuándo se manda el mensaje? Si se mandara antes de guardar y la reserva fallara, por ejemplo porque dos personas pidieron el mismo horario al mismo tiempo, los otros servicios recibirían una reserva que no existe. Por eso ms-reservas espera a que la reserva quede guardada en la base de datos y recién ahí envía el mensaje. Si RabbitMQ falla, la reserva no se pierde: el usuario igual recibe su confirmación y el error queda en el log. Lo que se podría mejorar: si RabbitMQ está caído justo en ese instante, ese aviso no se vuelve a enviar.</a:t>
             </a:r>
             <a:endParaRPr lang="en-US" dirty="0"/>
           </a:p>
@@ -738,7 +736,7 @@
           <a:p>
             <a:r>
               <a:rPr lang="en-US" dirty="0"/>
-              <a:t>Del lado del productor activamos dos mecanismos. Publisher confirms: el broker responde ack o nack por cada mensaje publicado, en modo correlated, y si hay nack lo logueamos como error. Returns con mandatory: por defecto, si un mensaje no calza con ninguna cola, RabbitMQ lo bota sin avisar; con mandatory en true lo devuelve y lo logueamos como warning. Esto nos pasó en desarrollo: si ms-reservas arranca antes que los consumidores, todavía no existen las colas y los mensajes se perdían. Por eso hay un orden de arranque.</a:t>
+              <a:t>RabbitMQ asegura que el mensaje llega, pero en casos raros puede llegar dos veces, por ejemplo si un servicio se cae justo después de procesarlo. Por eso los dos servicios que reciben están preparados. ms-gimnasios guarda la reserva con el mismo número que tiene en ms-reservas, así que si llega repetida simplemente sobrescribe el mismo registro. ms-notificaciones revisa si ya creó ese aviso antes de crearlo, y la base de datos tampoco permite duplicados.</a:t>
             </a:r>
             <a:endParaRPr lang="en-US" dirty="0"/>
           </a:p>
@@ -826,7 +824,7 @@
           <a:p>
             <a:r>
               <a:rPr lang="en-US" dirty="0"/>
-              <a:t>RabbitMQ garantiza al menos una entrega, no exactamente una. Si un consumidor procesa un mensaje y se cae antes de mandar el ack, el mensaje vuelve a la cola y se procesa de nuevo. Por eso los dos consumidores son idempotentes. ms-gimnasios usa el id de la reserva original como clave primaria, así que guardar dos veces es un upsert. ms-notificaciones revisa si ya existe una notificación para esa reserva y tipo, y además la tabla tiene una restricción única. Y cuando el mensaje es inválido, lanzan una excepción a propósito para que termine en la DLQ.</a:t>
+              <a:t>¿Qué pasa si un servicio no puede procesar un mensaje? Primero se reintenta, esperando 1, 2 y 4 segundos entre intentos; muchas veces el problema era pasajero y se arregla solo. Si después de 4 intentos sigue fallando, se deja de intentar para no trabar la cola, se registra el error y el mensaje pasa a la cola de errores. Ahí queda guardado: se puede revisar o reenviar desde el panel de RabbitMQ. Por ejemplo, una reserva de un gimnasio que no existe termina en gimnasios.bookings.dlq.</a:t>
             </a:r>
             <a:endParaRPr lang="en-US" dirty="0"/>
           </a:p>
@@ -914,7 +912,7 @@
           <a:p>
             <a:r>
               <a:rPr lang="en-US" dirty="0"/>
-              <a:t>Así se manejan los errores en los consumidores. Si el listener lanza una excepción, Spring reintenta con backoff exponencial: espera 1, 2 y 4 segundos, cuatro intentos en total. Si sigue fallando, entra DeadLetterRecoverer, una clase nuestra que extiende RejectAndDontRequeueRecoverer: loguea el mensaje con la causa raíz y lo rechaza sin reencolar. Como la cola tiene configurado el dead letter exchange, RabbitMQ lo mueve solo a la DLQ. Nadie consume las DLQ: quedan para inspección manual desde el panel, donde se pueden ver y reenviar.</a:t>
+              <a:t>Aunque la presentación es del backend, el frontend es donde se ve el resultado. La campana de notificaciones consulta GET /api/notificaciones cada 30 segundos y no consulta si la pestaña está oculta. Como el mensaje viaja por RabbitMQ después de la respuesta HTTP, justo al reservar no está listo todavía: por eso, al reservar o cancelar, el panel dispara un evento del navegador y la campana recarga 1,5 segundos después. Esto es consistencia eventual en la práctica. Elegimos polling en vez de WebSocket o SSE por simplicidad: el gateway y la seguridad ya funcionan con HTTP normal.</a:t>
             </a:r>
             <a:endParaRPr lang="en-US" dirty="0"/>
           </a:p>
@@ -1002,7 +1000,7 @@
           <a:p>
             <a:r>
               <a:rPr lang="en-US" dirty="0"/>
-              <a:t>Aunque la presentación es del backend, el frontend es donde se ve el resultado. La campana de notificaciones consulta GET /api/notificaciones cada 30 segundos y no consulta si la pestaña está oculta. Como el mensaje viaja por RabbitMQ después de la respuesta HTTP, justo al reservar no está listo todavía: por eso, al reservar o cancelar, el panel dispara un evento del navegador y la campana recarga 1,5 segundos después. Esto es consistencia eventual en la práctica. Elegimos polling en vez de WebSocket o SSE por simplicidad: el gateway y la seguridad ya funcionan con HTTP normal.</a:t>
+              <a:t>Todo se levanta con Docker Compose. El orden importa por RabbitMQ: ms-gimnasios y ms-notificaciones crean sus colas al partir, así que ms-reservas espera a que estén listos; si no, sus primeros mensajes no tendrían dónde llegar. Los datos de MySQL y RabbitMQ se guardan en disco, así que los mensajes pendientes sobreviven a un reinicio. Para la demo uso el panel de RabbitMQ en el puerto 15672, donde se ven las colas y los mensajes.</a:t>
             </a:r>
             <a:endParaRPr lang="en-US" dirty="0"/>
           </a:p>
@@ -1090,7 +1088,7 @@
           <a:p>
             <a:r>
               <a:rPr lang="en-US" dirty="0"/>
-              <a:t>Con Docker Compose se levantan siete contenedores. El orden importa por RabbitMQ: ms-gimnasios y ms-notificaciones declaran sus colas al arrancar, así que ms-reservas espera a que estén healthy antes de partir. Otro detalle: una cola no se puede redeclarar con argumentos distintos, RabbitMQ responde PRECONDITION_FAILED, así que si cambiamos el DLX hay que borrar la cola. Los datos de RabbitMQ están en un volumen, entonces los mensajes pendientes sobreviven a un reinicio. Para la demo uso el panel de administración en el puerto 15672.</a:t>
+              <a:t>Para cerrar, seis ideas. Los servicios son independientes: ms-reservas avisa y no necesita saber quién escucha. Cada servicio tiene su propia cola y recibe su copia. El mensaje solo sale si la reserva se guardó. Los mensajes repetidos no duplican nada. Los errores se reintentan y, si siguen, quedan guardados para revisarlos. Y el usuario ve el resultado en la campana del frontend. ¿Preguntas?</a:t>
             </a:r>
             <a:endParaRPr lang="en-US" dirty="0"/>
           </a:p>
@@ -1114,94 +1112,6 @@
             <a:fld id="{F7021451-1387-4CA6-816F-3879F97B5CBC}" type="slidenum">
               <a:rPr lang="en-US"/>
               <a:t>15</a:t>
-            </a:fld>
-            <a:endParaRPr lang="en-US"/>
-          </a:p>
-        </p:txBody>
-      </p:sp>
-    </p:spTree>
-    <p:extLst>
-      <p:ext uri="{BB962C8B-B14F-4D97-AF65-F5344CB8AC3E}">
-        <p14:creationId xmlns:p14="http://schemas.microsoft.com/office/powerpoint/2010/main" val="1024086991"/>
-      </p:ext>
-    </p:extLst>
-  </p:cSld>
-  <p:clrMapOvr>
-    <a:masterClrMapping/>
-  </p:clrMapOvr>
-</p:notes>
-</file>
-
-<file path=ppt/notesSlides/notesSlide16.xml><?xml version="1.0" encoding="utf-8"?>
-<p:notes xmlns:a="http://schemas.openxmlformats.org/drawingml/2006/main" xmlns:r="http://schemas.openxmlformats.org/officeDocument/2006/relationships" xmlns:p="http://schemas.openxmlformats.org/presentationml/2006/main">
-  <p:cSld>
-    <p:spTree>
-      <p:nvGrpSpPr>
-        <p:cNvPr id="1" name=""/>
-        <p:cNvGrpSpPr/>
-        <p:nvPr/>
-      </p:nvGrpSpPr>
-      <p:grpSpPr>
-        <a:xfrm>
-          <a:off x="0" y="0"/>
-          <a:ext cx="0" cy="0"/>
-          <a:chOff x="0" y="0"/>
-          <a:chExt cx="0" cy="0"/>
-        </a:xfrm>
-      </p:grpSpPr>
-      <p:sp>
-        <p:nvSpPr>
-          <p:cNvPr id="2" name="Slide Image Placeholder 1"/>
-          <p:cNvSpPr>
-            <a:spLocks noGrp="1" noRot="1" noChangeAspect="1"/>
-          </p:cNvSpPr>
-          <p:nvPr>
-            <p:ph type="sldImg"/>
-          </p:nvPr>
-        </p:nvSpPr>
-        <p:spPr/>
-      </p:sp>
-      <p:sp>
-        <p:nvSpPr>
-          <p:cNvPr id="3" name="Notes Placeholder 2"/>
-          <p:cNvSpPr>
-            <a:spLocks noGrp="1"/>
-          </p:cNvSpPr>
-          <p:nvPr>
-            <p:ph type="body" idx="1"/>
-          </p:nvPr>
-        </p:nvSpPr>
-        <p:spPr/>
-        <p:txBody>
-          <a:bodyPr/>
-          <a:lstStyle/>
-          <a:p>
-            <a:r>
-              <a:rPr lang="en-US" dirty="0"/>
-              <a:t>Para cerrar, seis ideas. Uno, el productor no conoce a los consumidores. Dos, cada consumidor tiene su cola y recibe su copia. Tres, el mensaje sale solo si la reserva se guardó, y confirms y returns nos avisan si no llegó. Cuatro, los consumidores aguantan duplicados. Cinco, los errores se reintentan y si persisten quedan en una DLQ en vez de perderse. Seis, el frontend refleja todo esto con consistencia eventual. Como mejora futura: patrón outbox para no perder eventos si RabbitMQ está caído. ¿Preguntas?</a:t>
-            </a:r>
-            <a:endParaRPr lang="en-US" dirty="0"/>
-          </a:p>
-        </p:txBody>
-      </p:sp>
-      <p:sp>
-        <p:nvSpPr>
-          <p:cNvPr id="4" name="Slide Number Placeholder 3"/>
-          <p:cNvSpPr>
-            <a:spLocks noGrp="1"/>
-          </p:cNvSpPr>
-          <p:nvPr>
-            <p:ph type="sldNum" sz="quarter" idx="10"/>
-          </p:nvPr>
-        </p:nvSpPr>
-        <p:spPr/>
-        <p:txBody>
-          <a:bodyPr/>
-          <a:lstStyle/>
-          <a:p>
-            <a:fld id="{F7021451-1387-4CA6-816F-3879F97B5CBC}" type="slidenum">
-              <a:rPr lang="en-US"/>
-              <a:t>16</a:t>
             </a:fld>
             <a:endParaRPr lang="en-US"/>
           </a:p>
@@ -1442,7 +1352,7 @@
           <a:p>
             <a:r>
               <a:rPr lang="en-US" dirty="0"/>
-              <a:t>Seis conceptos. Uno: el productor nunca escribe directo en una cola, publica en un exchange. Dos: el exchange decide a qué colas va cada mensaje. Tres: la routing key viaja con el mensaje y el binding es la regla que une una cola con el exchange. Cuatro: la cola guarda los mensajes; las nuestras son durables. Cinco: el ack es la confirmación del consumidor; mientras no llegue, RabbitMQ no borra el mensaje. Seis: cuando un mensaje se rechaza sin reencolar, la cola lo manda a su dead letter exchange y termina en una DLQ.</a:t>
+              <a:t>Seis conceptos. El productor es quien envía el mensaje y el consumidor quien lo recibe; no necesitan conocerse. El exchange es como un cartero: recibe todos los mensajes y decide a qué colas van. Para decidir usa la routing key, una etiqueta que lleva el mensaje, y el binding, la regla de cada cola. La cola es una fila de espera: si el servicio está apagado, los mensajes lo esperan ahí. El mensaje mismo es un JSON con los datos de la reserva. Y la cola de errores guarda los mensajes que no se pudieron procesar.</a:t>
             </a:r>
             <a:endParaRPr lang="en-US" dirty="0"/>
           </a:p>
@@ -1706,7 +1616,7 @@
           <a:p>
             <a:r>
               <a:rPr lang="en-US" dirty="0"/>
-              <a:t>Esta es la topología completa. ms-reservas publica en el exchange topic reservafit.events con la routing key booking.created o booking.cancelled. Hay dos colas enlazadas con booking.*: gimnasios.bookings, que la declara y la lee ms-gimnasios, y notificaciones.bookings, de ms-notificaciones. Abajo, la parte de errores: cada cola se crea con dos argumentos que dicen a dónde mandar un mensaje rechazado. Va al exchange direct reservafit.dlx con la routing key igual al nombre de su DLQ, y así cada servicio tiene su propia cola de mensajes muertos. Todos los nombres están en una clase RabbitNames por servicio, nunca hardcodeados.</a:t>
+              <a:t>Esta es la topología completa. ms-reservas envía cada mensaje al exchange reservafit.events con la etiqueta booking.created o booking.cancelled. Hay dos colas con la regla booking.*: gimnasios.bookings, de ms-gimnasios, y notificaciones.bookings, de ms-notificaciones; cada una recibe su copia. Abajo está el camino de los errores: si un mensaje no se puede procesar, la cola lo manda a un exchange de errores, que lo deja en la cola de errores de ese servicio.</a:t>
             </a:r>
             <a:endParaRPr lang="en-US" dirty="0"/>
           </a:p>
@@ -1794,7 +1704,7 @@
           <a:p>
             <a:r>
               <a:rPr lang="en-US" dirty="0"/>
-              <a:t>Este es el mensaje que viaja. Lo serializa JacksonJsonMessageConverter. Tres decisiones: primero, no hay una librería compartida entre servicios; cada uno tiene su copia de BookingEvent y el contrato real son los nombres de los campos JSON. Segundo, los consumidores configuran el converter para que siempre conviertan al tipo del parámetro del listener, ignorando la cabecera de tipo que pone el productor, porque esa clase no existe en su classpath. Tercero, en esta rama se agregaron gymName, startTime y endTime: así ms-notificaciones arma el texto 'Reservaste en Fuerza Barrio Gym…' sin hacer una llamada HTTP extra.</a:t>
+              <a:t>Este es el mensaje que viaja por RabbitMQ: un JSON con los datos de la reserva. Cada servicio tiene su propia copia de esta clase, así que no comparten código; lo único que tiene que coincidir son los nombres de los campos. En esta rama agregamos el nombre del gimnasio y el horario, para que ms-notificaciones pueda escribir 'Reservaste en Fuerza Barrio Gym…' sin tener que preguntarle nada a otro servicio.</a:t>
             </a:r>
             <a:endParaRPr lang="en-US" dirty="0"/>
           </a:p>
@@ -1882,7 +1792,7 @@
           <a:p>
             <a:r>
               <a:rPr lang="en-US" dirty="0"/>
-              <a:t>Recorramos una reserva de punta a punta. Uno: en el frontend el usuario pulsa Reservar y se manda POST /api/reservas al gateway con el token. Dos: ms-reservas valida que la fecha esté dentro de 30 días, que el horario no haya empezado y que no esté tomado, y guarda. Tres: en vez de mandar a RabbitMQ ahí mismo, publica un evento interno de Spring. Cuatro: se hace commit y se responde 201. Cinco: recién ahí el publisher manda el mensaje a RabbitMQ. Seis: el exchange lo copia a las dos colas. Siete: cada consumidor hace lo suyo en paralelo. Ocho: la campana del frontend lo muestra. La cancelación sigue el mismo camino con booking.cancelled.</a:t>
+              <a:t>Recorramos una reserva de punta a punta. Uno: en el frontend el usuario pulsa Reservar y se manda POST /api/reservas al gateway con el token. Dos: ms-reservas revisa que la fecha sea válida y que el horario esté libre, y guarda. Tres: prepara el mensaje, pero todavía no lo envía. Cuatro: la reserva queda guardada y el usuario ve su confirmación. Cinco: recién ahí se envía el mensaje a RabbitMQ. Seis: el exchange lo copia a las dos colas. Siete: cada consumidor hace lo suyo en paralelo. Ocho: la campana del frontend lo muestra. La cancelación sigue el mismo camino con booking.cancelled.</a:t>
             </a:r>
             <a:endParaRPr lang="en-US" dirty="0"/>
           </a:p>
@@ -2887,7 +2797,7 @@
                   <a:schemeClr val="tx1"/>
                 </a:solidFill>
               </a:rPr>
-              <a:t>Publicar solo después del commit</a:t>
+              <a:t>El mensaje sale solo si la reserva se guardó</a:t>
             </a:r>
             <a:endParaRPr lang="en-US" sz="3200" dirty="0"/>
           </a:p>
@@ -2895,352 +2805,240 @@
       </p:sp>
       <p:sp>
         <p:nvSpPr>
-          <p:cNvPr id="3" name="box-229"/>
-          <p:cNvSpPr/>
-          <p:nvPr/>
-        </p:nvSpPr>
-        <p:spPr>
-          <a:xfrm>
-            <a:off x="548640" y="1280160"/>
-            <a:ext cx="5943600" cy="4846320"/>
+          <p:cNvPr id="3" name="box-228"/>
+          <p:cNvSpPr/>
+          <p:nvPr/>
+        </p:nvSpPr>
+        <p:spPr>
+          <a:xfrm>
+            <a:off x="548640" y="1417320"/>
+            <a:ext cx="3474720" cy="1097280"/>
           </a:xfrm>
           <a:prstGeom prst="roundRect">
             <a:avLst>
-              <a:gd name="adj" fmla="val 1887"/>
+              <a:gd name="adj" fmla="val 10000"/>
             </a:avLst>
           </a:prstGeom>
           <a:solidFill>
-            <a:schemeClr val="tx2"/>
+            <a:schemeClr val="accent6"/>
           </a:solidFill>
           <a:ln/>
         </p:spPr>
       </p:sp>
       <p:sp>
         <p:nvSpPr>
-          <p:cNvPr id="4" name="code-230"/>
-          <p:cNvSpPr txBox="1"/>
-          <p:nvPr/>
-        </p:nvSpPr>
-        <p:spPr>
-          <a:xfrm>
-            <a:off x="777240" y="1417320"/>
-            <a:ext cx="5486400" cy="4572000"/>
-          </a:xfrm>
-          <a:prstGeom prst="rect">
-            <a:avLst/>
-          </a:prstGeom>
-          <a:noFill/>
-          <a:ln/>
-        </p:spPr>
-        <p:txBody>
-          <a:bodyPr wrap="square" lIns="0" tIns="0" rIns="0" bIns="0" rtlCol="0" anchor="t"/>
-          <a:lstStyle/>
-          <a:p>
-            <a:pPr indent="0" marL="0">
-              <a:buNone/>
-            </a:pPr>
-            <a:r>
-              <a:rPr lang="en-US" sz="1400" dirty="0">
-                <a:solidFill>
-                  <a:schemeClr val="accent6"/>
-                </a:solidFill>
-                <a:latin typeface="Courier New" pitchFamily="34" charset="0"/>
-                <a:ea typeface="Courier New" pitchFamily="34" charset="-122"/>
-                <a:cs typeface="Courier New" pitchFamily="34" charset="-120"/>
-              </a:rPr>
-              <a:t>// BookingService.create (dentro de @Transactional)</a:t>
-            </a:r>
-            <a:pPr indent="0" marL="0">
-              <a:buNone/>
-            </a:pPr>
-            <a:endParaRPr lang="en-US" sz="1400" dirty="0"/>
-          </a:p>
-          <a:p>
-            <a:pPr indent="0" marL="0">
-              <a:buNone/>
-            </a:pPr>
-            <a:r>
-              <a:rPr lang="en-US" sz="1400" dirty="0">
-                <a:solidFill>
-                  <a:schemeClr val="bg2"/>
-                </a:solidFill>
-                <a:latin typeface="Courier New" pitchFamily="34" charset="0"/>
-                <a:ea typeface="Courier New" pitchFamily="34" charset="-122"/>
-                <a:cs typeface="Courier New" pitchFamily="34" charset="-120"/>
-              </a:rPr>
-              <a:t>bookingRepository.saveAndFlush(booking);</a:t>
-            </a:r>
-            <a:endParaRPr lang="en-US" sz="1400" dirty="0"/>
-          </a:p>
-          <a:p>
-            <a:pPr indent="0" marL="0">
-              <a:buNone/>
-            </a:pPr>
-            <a:r>
-              <a:rPr lang="en-US" sz="1400" dirty="0">
-                <a:solidFill>
-                  <a:schemeClr val="accent1"/>
-                </a:solidFill>
-                <a:latin typeface="Courier New" pitchFamily="34" charset="0"/>
-                <a:ea typeface="Courier New" pitchFamily="34" charset="-122"/>
-                <a:cs typeface="Courier New" pitchFamily="34" charset="-120"/>
-              </a:rPr>
-              <a:t>eventPublisher</a:t>
-            </a:r>
-            <a:pPr indent="0" marL="0">
-              <a:buNone/>
-            </a:pPr>
-            <a:r>
-              <a:rPr lang="en-US" sz="1400" dirty="0">
-                <a:solidFill>
-                  <a:schemeClr val="bg2"/>
-                </a:solidFill>
-                <a:latin typeface="Courier New" pitchFamily="34" charset="0"/>
-                <a:ea typeface="Courier New" pitchFamily="34" charset="-122"/>
-                <a:cs typeface="Courier New" pitchFamily="34" charset="-120"/>
-              </a:rPr>
-              <a:t>.publishEvent(BookingEvent.from(...));</a:t>
-            </a:r>
-            <a:endParaRPr lang="en-US" sz="1400" dirty="0"/>
-          </a:p>
-          <a:p>
-            <a:pPr indent="0" marL="0">
-              <a:buNone/>
-            </a:pPr>
-            <a:endParaRPr lang="en-US" sz="1400" dirty="0"/>
-          </a:p>
-          <a:p>
-            <a:pPr indent="0" marL="0">
-              <a:buNone/>
-            </a:pPr>
-            <a:r>
-              <a:rPr lang="en-US" sz="1400" dirty="0">
-                <a:solidFill>
-                  <a:schemeClr val="accent6"/>
-                </a:solidFill>
-                <a:latin typeface="Courier New" pitchFamily="34" charset="0"/>
-                <a:ea typeface="Courier New" pitchFamily="34" charset="-122"/>
-                <a:cs typeface="Courier New" pitchFamily="34" charset="-120"/>
-              </a:rPr>
-              <a:t>// BookingEventPublisher</a:t>
-            </a:r>
-            <a:pPr indent="0" marL="0">
-              <a:buNone/>
-            </a:pPr>
-            <a:endParaRPr lang="en-US" sz="1400" dirty="0"/>
-          </a:p>
-          <a:p>
-            <a:pPr indent="0" marL="0">
-              <a:buNone/>
-            </a:pPr>
-            <a:r>
-              <a:rPr lang="en-US" sz="1400" dirty="0">
-                <a:solidFill>
-                  <a:schemeClr val="accent1"/>
-                </a:solidFill>
-                <a:latin typeface="Courier New" pitchFamily="34" charset="0"/>
-                <a:ea typeface="Courier New" pitchFamily="34" charset="-122"/>
-                <a:cs typeface="Courier New" pitchFamily="34" charset="-120"/>
-              </a:rPr>
-              <a:t>@TransactionalEventListener</a:t>
-            </a:r>
-            <a:pPr indent="0" marL="0">
-              <a:buNone/>
-            </a:pPr>
-            <a:endParaRPr lang="en-US" sz="1400" dirty="0"/>
-          </a:p>
-          <a:p>
-            <a:pPr indent="0" marL="0">
-              <a:buNone/>
-            </a:pPr>
-            <a:r>
-              <a:rPr lang="en-US" sz="1400" dirty="0">
-                <a:solidFill>
-                  <a:schemeClr val="bg2"/>
-                </a:solidFill>
-                <a:latin typeface="Courier New" pitchFamily="34" charset="0"/>
-                <a:ea typeface="Courier New" pitchFamily="34" charset="-122"/>
-                <a:cs typeface="Courier New" pitchFamily="34" charset="-120"/>
-              </a:rPr>
-              <a:t>public void publish(BookingEvent event) {</a:t>
-            </a:r>
-            <a:endParaRPr lang="en-US" sz="1400" dirty="0"/>
-          </a:p>
-          <a:p>
-            <a:pPr indent="0" marL="0">
-              <a:buNone/>
-            </a:pPr>
-            <a:r>
-              <a:rPr lang="en-US" sz="1400" dirty="0">
-                <a:solidFill>
-                  <a:schemeClr val="bg2"/>
-                </a:solidFill>
-                <a:latin typeface="Courier New" pitchFamily="34" charset="0"/>
-                <a:ea typeface="Courier New" pitchFamily="34" charset="-122"/>
-                <a:cs typeface="Courier New" pitchFamily="34" charset="-120"/>
-              </a:rPr>
-              <a:t>  String key = CANCELADA ? "booking.cancelled"</a:t>
-            </a:r>
-            <a:endParaRPr lang="en-US" sz="1400" dirty="0"/>
-          </a:p>
-          <a:p>
-            <a:pPr indent="0" marL="0">
-              <a:buNone/>
-            </a:pPr>
-            <a:r>
-              <a:rPr lang="en-US" sz="1400" dirty="0">
-                <a:solidFill>
-                  <a:schemeClr val="bg2"/>
-                </a:solidFill>
-                <a:latin typeface="Courier New" pitchFamily="34" charset="0"/>
-                <a:ea typeface="Courier New" pitchFamily="34" charset="-122"/>
-                <a:cs typeface="Courier New" pitchFamily="34" charset="-120"/>
-              </a:rPr>
-              <a:t>                         : "booking.created";</a:t>
-            </a:r>
-            <a:endParaRPr lang="en-US" sz="1400" dirty="0"/>
-          </a:p>
-          <a:p>
-            <a:pPr indent="0" marL="0">
-              <a:buNone/>
-            </a:pPr>
-            <a:r>
-              <a:rPr lang="en-US" sz="1400" dirty="0">
-                <a:solidFill>
-                  <a:schemeClr val="bg2"/>
-                </a:solidFill>
-                <a:latin typeface="Courier New" pitchFamily="34" charset="0"/>
-                <a:ea typeface="Courier New" pitchFamily="34" charset="-122"/>
-                <a:cs typeface="Courier New" pitchFamily="34" charset="-120"/>
-              </a:rPr>
-              <a:t>  try {</a:t>
-            </a:r>
-            <a:endParaRPr lang="en-US" sz="1400" dirty="0"/>
-          </a:p>
-          <a:p>
-            <a:pPr indent="0" marL="0">
-              <a:buNone/>
-            </a:pPr>
-            <a:r>
-              <a:rPr lang="en-US" sz="1400" dirty="0">
-                <a:solidFill>
-                  <a:schemeClr val="bg2"/>
-                </a:solidFill>
-                <a:latin typeface="Courier New" pitchFamily="34" charset="0"/>
-                <a:ea typeface="Courier New" pitchFamily="34" charset="-122"/>
-                <a:cs typeface="Courier New" pitchFamily="34" charset="-120"/>
-              </a:rPr>
-              <a:t>    rabbitTemplate.convertAndSend(</a:t>
-            </a:r>
-            <a:endParaRPr lang="en-US" sz="1400" dirty="0"/>
-          </a:p>
-          <a:p>
-            <a:pPr indent="0" marL="0">
-              <a:buNone/>
-            </a:pPr>
-            <a:r>
-              <a:rPr lang="en-US" sz="1400" dirty="0">
-                <a:solidFill>
-                  <a:schemeClr val="bg2"/>
-                </a:solidFill>
-                <a:latin typeface="Courier New" pitchFamily="34" charset="0"/>
-                <a:ea typeface="Courier New" pitchFamily="34" charset="-122"/>
-                <a:cs typeface="Courier New" pitchFamily="34" charset="-120"/>
-              </a:rPr>
-              <a:t>        "reservafit.events", key, event);</a:t>
-            </a:r>
-            <a:endParaRPr lang="en-US" sz="1400" dirty="0"/>
-          </a:p>
-          <a:p>
-            <a:pPr indent="0" marL="0">
-              <a:buNone/>
-            </a:pPr>
-            <a:r>
-              <a:rPr lang="en-US" sz="1400" dirty="0">
-                <a:solidFill>
-                  <a:schemeClr val="accent1"/>
-                </a:solidFill>
-                <a:latin typeface="Courier New" pitchFamily="34" charset="0"/>
-                <a:ea typeface="Courier New" pitchFamily="34" charset="-122"/>
-                <a:cs typeface="Courier New" pitchFamily="34" charset="-120"/>
-              </a:rPr>
-              <a:t>  } catch (AmqpException e) {</a:t>
-            </a:r>
-            <a:pPr indent="0" marL="0">
-              <a:buNone/>
-            </a:pPr>
-            <a:endParaRPr lang="en-US" sz="1400" dirty="0"/>
-          </a:p>
-          <a:p>
-            <a:pPr indent="0" marL="0">
-              <a:buNone/>
-            </a:pPr>
-            <a:r>
-              <a:rPr lang="en-US" sz="1400" dirty="0">
-                <a:solidFill>
-                  <a:schemeClr val="accent6"/>
-                </a:solidFill>
-                <a:latin typeface="Courier New" pitchFamily="34" charset="0"/>
-                <a:ea typeface="Courier New" pitchFamily="34" charset="-122"/>
-                <a:cs typeface="Courier New" pitchFamily="34" charset="-120"/>
-              </a:rPr>
-              <a:t>    // log.error: la reserva ya está guardada</a:t>
-            </a:r>
-            <a:pPr indent="0" marL="0">
-              <a:buNone/>
-            </a:pPr>
-            <a:endParaRPr lang="en-US" sz="1400" dirty="0"/>
-          </a:p>
-          <a:p>
-            <a:pPr indent="0" marL="0">
-              <a:buNone/>
-            </a:pPr>
-            <a:r>
-              <a:rPr lang="en-US" sz="1400" dirty="0">
-                <a:solidFill>
-                  <a:schemeClr val="bg2"/>
-                </a:solidFill>
-                <a:latin typeface="Courier New" pitchFamily="34" charset="0"/>
-                <a:ea typeface="Courier New" pitchFamily="34" charset="-122"/>
-                <a:cs typeface="Courier New" pitchFamily="34" charset="-120"/>
-              </a:rPr>
-              <a:t>  }</a:t>
-            </a:r>
-            <a:endParaRPr lang="en-US" sz="1400" dirty="0"/>
-          </a:p>
-          <a:p>
-            <a:pPr indent="0" marL="0">
-              <a:buNone/>
-            </a:pPr>
-            <a:r>
-              <a:rPr lang="en-US" sz="1400" dirty="0">
-                <a:solidFill>
-                  <a:schemeClr val="bg2"/>
-                </a:solidFill>
-                <a:latin typeface="Courier New" pitchFamily="34" charset="0"/>
-                <a:ea typeface="Courier New" pitchFamily="34" charset="-122"/>
-                <a:cs typeface="Courier New" pitchFamily="34" charset="-120"/>
-              </a:rPr>
-              <a:t>}</a:t>
-            </a:r>
-            <a:endParaRPr lang="en-US" sz="1400" dirty="0"/>
-          </a:p>
-        </p:txBody>
-      </p:sp>
-      <p:sp>
-        <p:nvSpPr>
-          <p:cNvPr id="5" name="box-231"/>
-          <p:cNvSpPr/>
-          <p:nvPr/>
-        </p:nvSpPr>
-        <p:spPr>
-          <a:xfrm>
-            <a:off x="6858000" y="1280160"/>
-            <a:ext cx="4754880" cy="1463040"/>
+          <p:cNvPr id="4" name="label-229"/>
+          <p:cNvSpPr txBox="1"/>
+          <p:nvPr/>
+        </p:nvSpPr>
+        <p:spPr>
+          <a:xfrm>
+            <a:off x="548640" y="1417320"/>
+            <a:ext cx="3474720" cy="1097280"/>
+          </a:xfrm>
+          <a:prstGeom prst="rect">
+            <a:avLst/>
+          </a:prstGeom>
+          <a:noFill/>
+          <a:ln/>
+        </p:spPr>
+        <p:txBody>
+          <a:bodyPr wrap="square" lIns="762" tIns="762" rIns="762" bIns="762" rtlCol="0" anchor="ctr"/>
+          <a:lstStyle/>
+          <a:p>
+            <a:pPr algn="ctr" indent="0" marL="0">
+              <a:buNone/>
+            </a:pPr>
+            <a:r>
+              <a:rPr lang="en-US" sz="1700" b="1" dirty="0">
+                <a:solidFill>
+                  <a:schemeClr val="bg1"/>
+                </a:solidFill>
+              </a:rPr>
+              <a:t>1. Guardar la reserva</a:t>
+            </a:r>
+            <a:endParaRPr lang="en-US" sz="1700" dirty="0"/>
+          </a:p>
+        </p:txBody>
+      </p:sp>
+      <p:sp>
+        <p:nvSpPr>
+          <p:cNvPr id="5" name="arrow-230"/>
+          <p:cNvSpPr/>
+          <p:nvPr/>
+        </p:nvSpPr>
+        <p:spPr>
+          <a:xfrm>
+            <a:off x="4023360" y="1965960"/>
+            <a:ext cx="320040" cy="914"/>
+          </a:xfrm>
+          <a:prstGeom prst="line">
+            <a:avLst/>
+          </a:prstGeom>
+          <a:noFill/>
+          <a:ln w="25400">
+            <a:solidFill>
+              <a:schemeClr val="accent6"/>
+            </a:solidFill>
+            <a:prstDash val="solid"/>
+            <a:tailEnd type="triangle"/>
+          </a:ln>
+        </p:spPr>
+      </p:sp>
+      <p:sp>
+        <p:nvSpPr>
+          <p:cNvPr id="6" name="box-231"/>
+          <p:cNvSpPr/>
+          <p:nvPr/>
+        </p:nvSpPr>
+        <p:spPr>
+          <a:xfrm>
+            <a:off x="4343400" y="1417320"/>
+            <a:ext cx="3474720" cy="1097280"/>
           </a:xfrm>
           <a:prstGeom prst="roundRect">
             <a:avLst>
-              <a:gd name="adj" fmla="val 7500"/>
+              <a:gd name="adj" fmla="val 10000"/>
+            </a:avLst>
+          </a:prstGeom>
+          <a:solidFill>
+            <a:schemeClr val="accent2"/>
+          </a:solidFill>
+          <a:ln/>
+        </p:spPr>
+      </p:sp>
+      <p:sp>
+        <p:nvSpPr>
+          <p:cNvPr id="7" name="label-232"/>
+          <p:cNvSpPr txBox="1"/>
+          <p:nvPr/>
+        </p:nvSpPr>
+        <p:spPr>
+          <a:xfrm>
+            <a:off x="4343400" y="1417320"/>
+            <a:ext cx="3474720" cy="1097280"/>
+          </a:xfrm>
+          <a:prstGeom prst="rect">
+            <a:avLst/>
+          </a:prstGeom>
+          <a:noFill/>
+          <a:ln/>
+        </p:spPr>
+        <p:txBody>
+          <a:bodyPr wrap="square" lIns="762" tIns="762" rIns="762" bIns="762" rtlCol="0" anchor="ctr"/>
+          <a:lstStyle/>
+          <a:p>
+            <a:pPr algn="ctr" indent="0" marL="0">
+              <a:buNone/>
+            </a:pPr>
+            <a:r>
+              <a:rPr lang="en-US" sz="1700" b="1" dirty="0">
+                <a:solidFill>
+                  <a:schemeClr val="bg1"/>
+                </a:solidFill>
+              </a:rPr>
+              <a:t>2. Queda confirmada en la base de datos</a:t>
+            </a:r>
+            <a:endParaRPr lang="en-US" sz="1700" dirty="0"/>
+          </a:p>
+        </p:txBody>
+      </p:sp>
+      <p:sp>
+        <p:nvSpPr>
+          <p:cNvPr id="8" name="arrow-233"/>
+          <p:cNvSpPr/>
+          <p:nvPr/>
+        </p:nvSpPr>
+        <p:spPr>
+          <a:xfrm>
+            <a:off x="7818120" y="1965960"/>
+            <a:ext cx="320040" cy="914"/>
+          </a:xfrm>
+          <a:prstGeom prst="line">
+            <a:avLst/>
+          </a:prstGeom>
+          <a:noFill/>
+          <a:ln w="25400">
+            <a:solidFill>
+              <a:schemeClr val="accent6"/>
+            </a:solidFill>
+            <a:prstDash val="solid"/>
+            <a:tailEnd type="triangle"/>
+          </a:ln>
+        </p:spPr>
+      </p:sp>
+      <p:sp>
+        <p:nvSpPr>
+          <p:cNvPr id="9" name="box-234"/>
+          <p:cNvSpPr/>
+          <p:nvPr/>
+        </p:nvSpPr>
+        <p:spPr>
+          <a:xfrm>
+            <a:off x="8138160" y="1417320"/>
+            <a:ext cx="3474720" cy="1097280"/>
+          </a:xfrm>
+          <a:prstGeom prst="roundRect">
+            <a:avLst>
+              <a:gd name="adj" fmla="val 10000"/>
+            </a:avLst>
+          </a:prstGeom>
+          <a:solidFill>
+            <a:schemeClr val="accent1"/>
+          </a:solidFill>
+          <a:ln/>
+        </p:spPr>
+      </p:sp>
+      <p:sp>
+        <p:nvSpPr>
+          <p:cNvPr id="10" name="label-235"/>
+          <p:cNvSpPr txBox="1"/>
+          <p:nvPr/>
+        </p:nvSpPr>
+        <p:spPr>
+          <a:xfrm>
+            <a:off x="8138160" y="1417320"/>
+            <a:ext cx="3474720" cy="1097280"/>
+          </a:xfrm>
+          <a:prstGeom prst="rect">
+            <a:avLst/>
+          </a:prstGeom>
+          <a:noFill/>
+          <a:ln/>
+        </p:spPr>
+        <p:txBody>
+          <a:bodyPr wrap="square" lIns="762" tIns="762" rIns="762" bIns="762" rtlCol="0" anchor="ctr"/>
+          <a:lstStyle/>
+          <a:p>
+            <a:pPr algn="ctr" indent="0" marL="0">
+              <a:buNone/>
+            </a:pPr>
+            <a:r>
+              <a:rPr lang="en-US" sz="1700" b="1" dirty="0">
+                <a:solidFill>
+                  <a:schemeClr val="bg1"/>
+                </a:solidFill>
+              </a:rPr>
+              <a:t>3. Recién ahí se envía el mensaje</a:t>
+            </a:r>
+            <a:endParaRPr lang="en-US" sz="1700" dirty="0"/>
+          </a:p>
+        </p:txBody>
+      </p:sp>
+      <p:sp>
+        <p:nvSpPr>
+          <p:cNvPr id="11" name="box-236"/>
+          <p:cNvSpPr/>
+          <p:nvPr/>
+        </p:nvSpPr>
+        <p:spPr>
+          <a:xfrm>
+            <a:off x="548640" y="2926080"/>
+            <a:ext cx="3474720" cy="2514600"/>
+          </a:xfrm>
+          <a:prstGeom prst="roundRect">
+            <a:avLst>
+              <a:gd name="adj" fmla="val 4364"/>
             </a:avLst>
           </a:prstGeom>
           <a:solidFill>
@@ -3251,14 +3049,14 @@
       </p:sp>
       <p:sp>
         <p:nvSpPr>
-          <p:cNvPr id="6" name="dot-232"/>
-          <p:cNvSpPr/>
-          <p:nvPr/>
-        </p:nvSpPr>
-        <p:spPr>
-          <a:xfrm>
-            <a:off x="7086600" y="1527048"/>
-            <a:ext cx="256032" cy="256032"/>
+          <p:cNvPr id="12" name="dot-237"/>
+          <p:cNvSpPr/>
+          <p:nvPr/>
+        </p:nvSpPr>
+        <p:spPr>
+          <a:xfrm>
+            <a:off x="822960" y="3200400"/>
+            <a:ext cx="292608" cy="292608"/>
           </a:xfrm>
           <a:prstGeom prst="ellipse">
             <a:avLst/>
@@ -3271,14 +3069,14 @@
       </p:sp>
       <p:sp>
         <p:nvSpPr>
-          <p:cNvPr id="7" name="text-233"/>
-          <p:cNvSpPr txBox="1"/>
-          <p:nvPr/>
-        </p:nvSpPr>
-        <p:spPr>
-          <a:xfrm>
-            <a:off x="7498080" y="1417320"/>
-            <a:ext cx="3977640" cy="502920"/>
+          <p:cNvPr id="13" name="text-238"/>
+          <p:cNvSpPr txBox="1"/>
+          <p:nvPr/>
+        </p:nvSpPr>
+        <p:spPr>
+          <a:xfrm>
+            <a:off x="1280160" y="3108960"/>
+            <a:ext cx="2606040" cy="502920"/>
           </a:xfrm>
           <a:prstGeom prst="rect">
             <a:avLst/>
@@ -3294,12 +3092,48 @@
               <a:buNone/>
             </a:pPr>
             <a:r>
-              <a:rPr lang="en-US" sz="1500" b="1" dirty="0">
+              <a:rPr lang="en-US" sz="1700" b="1" dirty="0">
                 <a:solidFill>
                   <a:schemeClr val="tx1"/>
                 </a:solidFill>
               </a:rPr>
-              <a:t>Si la reserva hace rollback, no sale mensaje</a:t>
+              <a:t>¿Y si la reserva falla?</a:t>
+            </a:r>
+            <a:endParaRPr lang="en-US" sz="1700" dirty="0"/>
+          </a:p>
+        </p:txBody>
+      </p:sp>
+      <p:sp>
+        <p:nvSpPr>
+          <p:cNvPr id="14" name="text-239"/>
+          <p:cNvSpPr txBox="1"/>
+          <p:nvPr/>
+        </p:nvSpPr>
+        <p:spPr>
+          <a:xfrm>
+            <a:off x="822960" y="3749040"/>
+            <a:ext cx="2971800" cy="1920240"/>
+          </a:xfrm>
+          <a:prstGeom prst="rect">
+            <a:avLst/>
+          </a:prstGeom>
+          <a:noFill/>
+          <a:ln/>
+        </p:spPr>
+        <p:txBody>
+          <a:bodyPr wrap="square" lIns="0" tIns="0" rIns="0" bIns="0" rtlCol="0" anchor="t"/>
+          <a:lstStyle/>
+          <a:p>
+            <a:pPr algn="l" indent="0" marL="0">
+              <a:buNone/>
+            </a:pPr>
+            <a:r>
+              <a:rPr lang="en-US" sz="1500" dirty="0">
+                <a:solidFill>
+                  <a:schemeClr val="tx1"/>
+                </a:solidFill>
+              </a:rPr>
+              <a:t>Por ejemplo, dos personas toman el mismo horario al mismo tiempo. No se envía nada: nadie se entera de una reserva que no existe.</a:t>
             </a:r>
             <a:endParaRPr lang="en-US" sz="1500" dirty="0"/>
           </a:p>
@@ -3307,54 +3141,18 @@
       </p:sp>
       <p:sp>
         <p:nvSpPr>
-          <p:cNvPr id="8" name="text-234"/>
-          <p:cNvSpPr txBox="1"/>
-          <p:nvPr/>
-        </p:nvSpPr>
-        <p:spPr>
-          <a:xfrm>
-            <a:off x="7498080" y="1874520"/>
-            <a:ext cx="3977640" cy="822960"/>
-          </a:xfrm>
-          <a:prstGeom prst="rect">
-            <a:avLst/>
-          </a:prstGeom>
-          <a:noFill/>
-          <a:ln/>
-        </p:spPr>
-        <p:txBody>
-          <a:bodyPr wrap="square" lIns="0" tIns="0" rIns="0" bIns="0" rtlCol="0" anchor="t"/>
-          <a:lstStyle/>
-          <a:p>
-            <a:pPr algn="l" indent="0" marL="0">
-              <a:buNone/>
-            </a:pPr>
-            <a:r>
-              <a:rPr lang="en-US" sz="1400" dirty="0">
-                <a:solidFill>
-                  <a:schemeClr val="tx1"/>
-                </a:solidFill>
-              </a:rPr>
-              <a:t>Ej.: dos usuarios toman el mismo cupo y salta uq_reserva_slot. Nadie recibe un evento de una reserva que no existe.</a:t>
-            </a:r>
-            <a:endParaRPr lang="en-US" sz="1400" dirty="0"/>
-          </a:p>
-        </p:txBody>
-      </p:sp>
-      <p:sp>
-        <p:nvSpPr>
-          <p:cNvPr id="9" name="box-235"/>
-          <p:cNvSpPr/>
-          <p:nvPr/>
-        </p:nvSpPr>
-        <p:spPr>
-          <a:xfrm>
-            <a:off x="6858000" y="2926080"/>
-            <a:ext cx="4754880" cy="1463040"/>
+          <p:cNvPr id="15" name="box-240"/>
+          <p:cNvSpPr/>
+          <p:nvPr/>
+        </p:nvSpPr>
+        <p:spPr>
+          <a:xfrm>
+            <a:off x="4343400" y="2926080"/>
+            <a:ext cx="3474720" cy="2514600"/>
           </a:xfrm>
           <a:prstGeom prst="roundRect">
             <a:avLst>
-              <a:gd name="adj" fmla="val 7500"/>
+              <a:gd name="adj" fmla="val 4364"/>
             </a:avLst>
           </a:prstGeom>
           <a:solidFill>
@@ -3365,14 +3163,14 @@
       </p:sp>
       <p:sp>
         <p:nvSpPr>
-          <p:cNvPr id="10" name="dot-236"/>
-          <p:cNvSpPr/>
-          <p:nvPr/>
-        </p:nvSpPr>
-        <p:spPr>
-          <a:xfrm>
-            <a:off x="7086600" y="3172968"/>
-            <a:ext cx="256032" cy="256032"/>
+          <p:cNvPr id="16" name="dot-241"/>
+          <p:cNvSpPr/>
+          <p:nvPr/>
+        </p:nvSpPr>
+        <p:spPr>
+          <a:xfrm>
+            <a:off x="4617720" y="3200400"/>
+            <a:ext cx="292608" cy="292608"/>
           </a:xfrm>
           <a:prstGeom prst="ellipse">
             <a:avLst/>
@@ -3385,14 +3183,14 @@
       </p:sp>
       <p:sp>
         <p:nvSpPr>
-          <p:cNvPr id="11" name="text-237"/>
-          <p:cNvSpPr txBox="1"/>
-          <p:nvPr/>
-        </p:nvSpPr>
-        <p:spPr>
-          <a:xfrm>
-            <a:off x="7498080" y="3063240"/>
-            <a:ext cx="3977640" cy="502920"/>
+          <p:cNvPr id="17" name="text-242"/>
+          <p:cNvSpPr txBox="1"/>
+          <p:nvPr/>
+        </p:nvSpPr>
+        <p:spPr>
+          <a:xfrm>
+            <a:off x="5074920" y="3108960"/>
+            <a:ext cx="2606040" cy="502920"/>
           </a:xfrm>
           <a:prstGeom prst="rect">
             <a:avLst/>
@@ -3408,12 +3206,48 @@
               <a:buNone/>
             </a:pPr>
             <a:r>
-              <a:rPr lang="en-US" sz="1500" b="1" dirty="0">
+              <a:rPr lang="en-US" sz="1700" b="1" dirty="0">
                 <a:solidFill>
                   <a:schemeClr val="tx1"/>
                 </a:solidFill>
               </a:rPr>
-              <a:t>Si RabbitMQ falla, la reserva no se pierde</a:t>
+              <a:t>¿Y si RabbitMQ falla?</a:t>
+            </a:r>
+            <a:endParaRPr lang="en-US" sz="1700" dirty="0"/>
+          </a:p>
+        </p:txBody>
+      </p:sp>
+      <p:sp>
+        <p:nvSpPr>
+          <p:cNvPr id="18" name="text-243"/>
+          <p:cNvSpPr txBox="1"/>
+          <p:nvPr/>
+        </p:nvSpPr>
+        <p:spPr>
+          <a:xfrm>
+            <a:off x="4617720" y="3749040"/>
+            <a:ext cx="2971800" cy="1920240"/>
+          </a:xfrm>
+          <a:prstGeom prst="rect">
+            <a:avLst/>
+          </a:prstGeom>
+          <a:noFill/>
+          <a:ln/>
+        </p:spPr>
+        <p:txBody>
+          <a:bodyPr wrap="square" lIns="0" tIns="0" rIns="0" bIns="0" rtlCol="0" anchor="t"/>
+          <a:lstStyle/>
+          <a:p>
+            <a:pPr algn="l" indent="0" marL="0">
+              <a:buNone/>
+            </a:pPr>
+            <a:r>
+              <a:rPr lang="en-US" sz="1500" dirty="0">
+                <a:solidFill>
+                  <a:schemeClr val="tx1"/>
+                </a:solidFill>
+              </a:rPr>
+              <a:t>La reserva igual queda hecha y el usuario ve su confirmación. El error queda registrado en el log.</a:t>
             </a:r>
             <a:endParaRPr lang="en-US" sz="1500" dirty="0"/>
           </a:p>
@@ -3421,54 +3255,18 @@
       </p:sp>
       <p:sp>
         <p:nvSpPr>
-          <p:cNvPr id="12" name="text-238"/>
-          <p:cNvSpPr txBox="1"/>
-          <p:nvPr/>
-        </p:nvSpPr>
-        <p:spPr>
-          <a:xfrm>
-            <a:off x="7498080" y="3520440"/>
-            <a:ext cx="3977640" cy="822960"/>
-          </a:xfrm>
-          <a:prstGeom prst="rect">
-            <a:avLst/>
-          </a:prstGeom>
-          <a:noFill/>
-          <a:ln/>
-        </p:spPr>
-        <p:txBody>
-          <a:bodyPr wrap="square" lIns="0" tIns="0" rIns="0" bIns="0" rtlCol="0" anchor="t"/>
-          <a:lstStyle/>
-          <a:p>
-            <a:pPr algn="l" indent="0" marL="0">
-              <a:buNone/>
-            </a:pPr>
-            <a:r>
-              <a:rPr lang="en-US" sz="1400" dirty="0">
-                <a:solidFill>
-                  <a:schemeClr val="tx1"/>
-                </a:solidFill>
-              </a:rPr>
-              <a:t>AmqpException se registra en el log y el usuario igual recibe su 201.</a:t>
-            </a:r>
-            <a:endParaRPr lang="en-US" sz="1400" dirty="0"/>
-          </a:p>
-        </p:txBody>
-      </p:sp>
-      <p:sp>
-        <p:nvSpPr>
-          <p:cNvPr id="13" name="box-239"/>
-          <p:cNvSpPr/>
-          <p:nvPr/>
-        </p:nvSpPr>
-        <p:spPr>
-          <a:xfrm>
-            <a:off x="6858000" y="4572000"/>
-            <a:ext cx="4754880" cy="1463040"/>
+          <p:cNvPr id="19" name="box-244"/>
+          <p:cNvSpPr/>
+          <p:nvPr/>
+        </p:nvSpPr>
+        <p:spPr>
+          <a:xfrm>
+            <a:off x="8138160" y="2926080"/>
+            <a:ext cx="3474720" cy="2514600"/>
           </a:xfrm>
           <a:prstGeom prst="roundRect">
             <a:avLst>
-              <a:gd name="adj" fmla="val 7500"/>
+              <a:gd name="adj" fmla="val 4364"/>
             </a:avLst>
           </a:prstGeom>
           <a:solidFill>
@@ -3479,14 +3277,14 @@
       </p:sp>
       <p:sp>
         <p:nvSpPr>
-          <p:cNvPr id="14" name="dot-240"/>
-          <p:cNvSpPr/>
-          <p:nvPr/>
-        </p:nvSpPr>
-        <p:spPr>
-          <a:xfrm>
-            <a:off x="7086600" y="4818888"/>
-            <a:ext cx="256032" cy="256032"/>
+          <p:cNvPr id="20" name="dot-245"/>
+          <p:cNvSpPr/>
+          <p:nvPr/>
+        </p:nvSpPr>
+        <p:spPr>
+          <a:xfrm>
+            <a:off x="8412480" y="3200400"/>
+            <a:ext cx="292608" cy="292608"/>
           </a:xfrm>
           <a:prstGeom prst="ellipse">
             <a:avLst/>
@@ -3499,14 +3297,14 @@
       </p:sp>
       <p:sp>
         <p:nvSpPr>
-          <p:cNvPr id="15" name="text-241"/>
-          <p:cNvSpPr txBox="1"/>
-          <p:nvPr/>
-        </p:nvSpPr>
-        <p:spPr>
-          <a:xfrm>
-            <a:off x="7498080" y="4709160"/>
-            <a:ext cx="3977640" cy="502920"/>
+          <p:cNvPr id="21" name="text-246"/>
+          <p:cNvSpPr txBox="1"/>
+          <p:nvPr/>
+        </p:nvSpPr>
+        <p:spPr>
+          <a:xfrm>
+            <a:off x="8869680" y="3108960"/>
+            <a:ext cx="2606040" cy="502920"/>
           </a:xfrm>
           <a:prstGeom prst="rect">
             <a:avLst/>
@@ -3522,50 +3320,50 @@
               <a:buNone/>
             </a:pPr>
             <a:r>
-              <a:rPr lang="en-US" sz="1500" b="1" dirty="0">
+              <a:rPr lang="en-US" sz="1700" b="1" dirty="0">
                 <a:solidFill>
                   <a:schemeClr val="tx1"/>
                 </a:solidFill>
               </a:rPr>
-              <a:t>El costo: puede faltar un mensaje</a:t>
+              <a:t>Lo que falta mejorar</a:t>
+            </a:r>
+            <a:endParaRPr lang="en-US" sz="1700" dirty="0"/>
+          </a:p>
+        </p:txBody>
+      </p:sp>
+      <p:sp>
+        <p:nvSpPr>
+          <p:cNvPr id="22" name="text-247"/>
+          <p:cNvSpPr txBox="1"/>
+          <p:nvPr/>
+        </p:nvSpPr>
+        <p:spPr>
+          <a:xfrm>
+            <a:off x="8412480" y="3749040"/>
+            <a:ext cx="2971800" cy="1920240"/>
+          </a:xfrm>
+          <a:prstGeom prst="rect">
+            <a:avLst/>
+          </a:prstGeom>
+          <a:noFill/>
+          <a:ln/>
+        </p:spPr>
+        <p:txBody>
+          <a:bodyPr wrap="square" lIns="0" tIns="0" rIns="0" bIns="0" rtlCol="0" anchor="t"/>
+          <a:lstStyle/>
+          <a:p>
+            <a:pPr algn="l" indent="0" marL="0">
+              <a:buNone/>
+            </a:pPr>
+            <a:r>
+              <a:rPr lang="en-US" sz="1500" dirty="0">
+                <a:solidFill>
+                  <a:schemeClr val="tx1"/>
+                </a:solidFill>
+              </a:rPr>
+              <a:t>Si RabbitMQ está caído justo en ese momento, ese aviso se pierde. Se podría resolver guardando los mensajes pendientes en la base de datos.</a:t>
             </a:r>
             <a:endParaRPr lang="en-US" sz="1500" dirty="0"/>
-          </a:p>
-        </p:txBody>
-      </p:sp>
-      <p:sp>
-        <p:nvSpPr>
-          <p:cNvPr id="16" name="text-242"/>
-          <p:cNvSpPr txBox="1"/>
-          <p:nvPr/>
-        </p:nvSpPr>
-        <p:spPr>
-          <a:xfrm>
-            <a:off x="7498080" y="5166360"/>
-            <a:ext cx="3977640" cy="822960"/>
-          </a:xfrm>
-          <a:prstGeom prst="rect">
-            <a:avLst/>
-          </a:prstGeom>
-          <a:noFill/>
-          <a:ln/>
-        </p:spPr>
-        <p:txBody>
-          <a:bodyPr wrap="square" lIns="0" tIns="0" rIns="0" bIns="0" rtlCol="0" anchor="t"/>
-          <a:lstStyle/>
-          <a:p>
-            <a:pPr algn="l" indent="0" marL="0">
-              <a:buNone/>
-            </a:pPr>
-            <a:r>
-              <a:rPr lang="en-US" sz="1400" dirty="0">
-                <a:solidFill>
-                  <a:schemeClr val="tx1"/>
-                </a:solidFill>
-              </a:rPr>
-              <a:t>Si RabbitMQ está caído justo en ese momento, ese evento no se reenvía. La solución completa sería un outbox transaccional.</a:t>
-            </a:r>
-            <a:endParaRPr lang="en-US" sz="1400" dirty="0"/>
           </a:p>
         </p:txBody>
       </p:sp>
@@ -3671,7 +3469,7 @@
                   <a:schemeClr val="tx1"/>
                 </a:solidFill>
               </a:rPr>
-              <a:t>Lado productor: confirms y returns</a:t>
+              <a:t>Mensajes repetidos: no se duplica nada</a:t>
             </a:r>
             <a:endParaRPr lang="en-US" sz="3200" dirty="0"/>
           </a:p>
@@ -3679,245 +3477,54 @@
       </p:sp>
       <p:sp>
         <p:nvSpPr>
-          <p:cNvPr id="3" name="box-243"/>
-          <p:cNvSpPr/>
-          <p:nvPr/>
-        </p:nvSpPr>
-        <p:spPr>
-          <a:xfrm>
-            <a:off x="548640" y="1280160"/>
-            <a:ext cx="4937760" cy="2103120"/>
+          <p:cNvPr id="3" name="text-248"/>
+          <p:cNvSpPr txBox="1"/>
+          <p:nvPr/>
+        </p:nvSpPr>
+        <p:spPr>
+          <a:xfrm>
+            <a:off x="548640" y="1234440"/>
+            <a:ext cx="11064240" cy="822960"/>
+          </a:xfrm>
+          <a:prstGeom prst="rect">
+            <a:avLst/>
+          </a:prstGeom>
+          <a:noFill/>
+          <a:ln/>
+        </p:spPr>
+        <p:txBody>
+          <a:bodyPr wrap="square" lIns="0" tIns="0" rIns="0" bIns="0" rtlCol="0" anchor="t"/>
+          <a:lstStyle/>
+          <a:p>
+            <a:pPr algn="l" indent="0" marL="0">
+              <a:buNone/>
+            </a:pPr>
+            <a:r>
+              <a:rPr lang="en-US" sz="1700" dirty="0">
+                <a:solidFill>
+                  <a:schemeClr val="tx1"/>
+                </a:solidFill>
+              </a:rPr>
+              <a:t>A veces RabbitMQ puede entregar el mismo mensaje dos veces. Los servicios están preparados para que eso no cause problemas.</a:t>
+            </a:r>
+            <a:endParaRPr lang="en-US" sz="1700" dirty="0"/>
+          </a:p>
+        </p:txBody>
+      </p:sp>
+      <p:sp>
+        <p:nvSpPr>
+          <p:cNvPr id="4" name="box-249"/>
+          <p:cNvSpPr/>
+          <p:nvPr/>
+        </p:nvSpPr>
+        <p:spPr>
+          <a:xfrm>
+            <a:off x="548640" y="2240280"/>
+            <a:ext cx="5440680" cy="2743200"/>
           </a:xfrm>
           <a:prstGeom prst="roundRect">
             <a:avLst>
-              <a:gd name="adj" fmla="val 4348"/>
-            </a:avLst>
-          </a:prstGeom>
-          <a:solidFill>
-            <a:schemeClr val="tx2"/>
-          </a:solidFill>
-          <a:ln/>
-        </p:spPr>
-      </p:sp>
-      <p:sp>
-        <p:nvSpPr>
-          <p:cNvPr id="4" name="code-244"/>
-          <p:cNvSpPr txBox="1"/>
-          <p:nvPr/>
-        </p:nvSpPr>
-        <p:spPr>
-          <a:xfrm>
-            <a:off x="777240" y="1417320"/>
-            <a:ext cx="4480560" cy="1828800"/>
-          </a:xfrm>
-          <a:prstGeom prst="rect">
-            <a:avLst/>
-          </a:prstGeom>
-          <a:noFill/>
-          <a:ln/>
-        </p:spPr>
-        <p:txBody>
-          <a:bodyPr wrap="square" lIns="0" tIns="0" rIns="0" bIns="0" rtlCol="0" anchor="t"/>
-          <a:lstStyle/>
-          <a:p>
-            <a:pPr indent="0" marL="0">
-              <a:buNone/>
-            </a:pPr>
-            <a:r>
-              <a:rPr lang="en-US" sz="1500" dirty="0">
-                <a:solidFill>
-                  <a:schemeClr val="accent6"/>
-                </a:solidFill>
-                <a:latin typeface="Courier New" pitchFamily="34" charset="0"/>
-                <a:ea typeface="Courier New" pitchFamily="34" charset="-122"/>
-                <a:cs typeface="Courier New" pitchFamily="34" charset="-120"/>
-              </a:rPr>
-              <a:t># ms-reservas/application.yaml</a:t>
-            </a:r>
-            <a:pPr indent="0" marL="0">
-              <a:buNone/>
-            </a:pPr>
-            <a:endParaRPr lang="en-US" sz="1500" dirty="0"/>
-          </a:p>
-          <a:p>
-            <a:pPr indent="0" marL="0">
-              <a:buNone/>
-            </a:pPr>
-            <a:r>
-              <a:rPr lang="en-US" sz="1500" dirty="0">
-                <a:solidFill>
-                  <a:schemeClr val="bg2"/>
-                </a:solidFill>
-                <a:latin typeface="Courier New" pitchFamily="34" charset="0"/>
-                <a:ea typeface="Courier New" pitchFamily="34" charset="-122"/>
-                <a:cs typeface="Courier New" pitchFamily="34" charset="-120"/>
-              </a:rPr>
-              <a:t>spring.rabbitmq:</a:t>
-            </a:r>
-            <a:endParaRPr lang="en-US" sz="1500" dirty="0"/>
-          </a:p>
-          <a:p>
-            <a:pPr indent="0" marL="0">
-              <a:buNone/>
-            </a:pPr>
-            <a:r>
-              <a:rPr lang="en-US" sz="1500" dirty="0">
-                <a:solidFill>
-                  <a:schemeClr val="accent1"/>
-                </a:solidFill>
-                <a:latin typeface="Courier New" pitchFamily="34" charset="0"/>
-                <a:ea typeface="Courier New" pitchFamily="34" charset="-122"/>
-                <a:cs typeface="Courier New" pitchFamily="34" charset="-120"/>
-              </a:rPr>
-              <a:t>  publisher-confirm-type: </a:t>
-            </a:r>
-            <a:pPr indent="0" marL="0">
-              <a:buNone/>
-            </a:pPr>
-            <a:r>
-              <a:rPr lang="en-US" sz="1500" dirty="0">
-                <a:solidFill>
-                  <a:schemeClr val="bg2"/>
-                </a:solidFill>
-                <a:latin typeface="Courier New" pitchFamily="34" charset="0"/>
-                <a:ea typeface="Courier New" pitchFamily="34" charset="-122"/>
-                <a:cs typeface="Courier New" pitchFamily="34" charset="-120"/>
-              </a:rPr>
-              <a:t>correlated</a:t>
-            </a:r>
-            <a:endParaRPr lang="en-US" sz="1500" dirty="0"/>
-          </a:p>
-          <a:p>
-            <a:pPr indent="0" marL="0">
-              <a:buNone/>
-            </a:pPr>
-            <a:r>
-              <a:rPr lang="en-US" sz="1500" dirty="0">
-                <a:solidFill>
-                  <a:schemeClr val="accent1"/>
-                </a:solidFill>
-                <a:latin typeface="Courier New" pitchFamily="34" charset="0"/>
-                <a:ea typeface="Courier New" pitchFamily="34" charset="-122"/>
-                <a:cs typeface="Courier New" pitchFamily="34" charset="-120"/>
-              </a:rPr>
-              <a:t>  publisher-returns: </a:t>
-            </a:r>
-            <a:pPr indent="0" marL="0">
-              <a:buNone/>
-            </a:pPr>
-            <a:r>
-              <a:rPr lang="en-US" sz="1500" dirty="0">
-                <a:solidFill>
-                  <a:schemeClr val="bg2"/>
-                </a:solidFill>
-                <a:latin typeface="Courier New" pitchFamily="34" charset="0"/>
-                <a:ea typeface="Courier New" pitchFamily="34" charset="-122"/>
-                <a:cs typeface="Courier New" pitchFamily="34" charset="-120"/>
-              </a:rPr>
-              <a:t>true</a:t>
-            </a:r>
-            <a:endParaRPr lang="en-US" sz="1500" dirty="0"/>
-          </a:p>
-          <a:p>
-            <a:pPr indent="0" marL="0">
-              <a:buNone/>
-            </a:pPr>
-            <a:r>
-              <a:rPr lang="en-US" sz="1500" dirty="0">
-                <a:solidFill>
-                  <a:schemeClr val="bg2"/>
-                </a:solidFill>
-                <a:latin typeface="Courier New" pitchFamily="34" charset="0"/>
-                <a:ea typeface="Courier New" pitchFamily="34" charset="-122"/>
-                <a:cs typeface="Courier New" pitchFamily="34" charset="-120"/>
-              </a:rPr>
-              <a:t>  template:</a:t>
-            </a:r>
-            <a:endParaRPr lang="en-US" sz="1500" dirty="0"/>
-          </a:p>
-          <a:p>
-            <a:pPr indent="0" marL="0">
-              <a:buNone/>
-            </a:pPr>
-            <a:r>
-              <a:rPr lang="en-US" sz="1500" dirty="0">
-                <a:solidFill>
-                  <a:schemeClr val="accent1"/>
-                </a:solidFill>
-                <a:latin typeface="Courier New" pitchFamily="34" charset="0"/>
-                <a:ea typeface="Courier New" pitchFamily="34" charset="-122"/>
-                <a:cs typeface="Courier New" pitchFamily="34" charset="-120"/>
-              </a:rPr>
-              <a:t>    mandatory: </a:t>
-            </a:r>
-            <a:pPr indent="0" marL="0">
-              <a:buNone/>
-            </a:pPr>
-            <a:r>
-              <a:rPr lang="en-US" sz="1500" dirty="0">
-                <a:solidFill>
-                  <a:schemeClr val="bg2"/>
-                </a:solidFill>
-                <a:latin typeface="Courier New" pitchFamily="34" charset="0"/>
-                <a:ea typeface="Courier New" pitchFamily="34" charset="-122"/>
-                <a:cs typeface="Courier New" pitchFamily="34" charset="-120"/>
-              </a:rPr>
-              <a:t>true</a:t>
-            </a:r>
-            <a:endParaRPr lang="en-US" sz="1500" dirty="0"/>
-          </a:p>
-        </p:txBody>
-      </p:sp>
-      <p:sp>
-        <p:nvSpPr>
-          <p:cNvPr id="5" name="text-245"/>
-          <p:cNvSpPr txBox="1"/>
-          <p:nvPr/>
-        </p:nvSpPr>
-        <p:spPr>
-          <a:xfrm>
-            <a:off x="548640" y="3611880"/>
-            <a:ext cx="4937760" cy="731520"/>
-          </a:xfrm>
-          <a:prstGeom prst="rect">
-            <a:avLst/>
-          </a:prstGeom>
-          <a:noFill/>
-          <a:ln/>
-        </p:spPr>
-        <p:txBody>
-          <a:bodyPr wrap="square" lIns="0" tIns="0" rIns="0" bIns="0" rtlCol="0" anchor="t"/>
-          <a:lstStyle/>
-          <a:p>
-            <a:pPr algn="l" indent="0" marL="0">
-              <a:buNone/>
-            </a:pPr>
-            <a:r>
-              <a:rPr lang="en-US" sz="1400" dirty="0">
-                <a:solidFill>
-                  <a:schemeClr val="tx1"/>
-                </a:solidFill>
-              </a:rPr>
-              <a:t>RabbitConfig registra dos callbacks en el RabbitTemplate (RabbitTemplateCustomizer)</a:t>
-            </a:r>
-            <a:endParaRPr lang="en-US" sz="1400" dirty="0"/>
-          </a:p>
-        </p:txBody>
-      </p:sp>
-      <p:sp>
-        <p:nvSpPr>
-          <p:cNvPr id="6" name="box-246"/>
-          <p:cNvSpPr/>
-          <p:nvPr/>
-        </p:nvSpPr>
-        <p:spPr>
-          <a:xfrm>
-            <a:off x="5943600" y="1280160"/>
-            <a:ext cx="5669280" cy="2240280"/>
-          </a:xfrm>
-          <a:prstGeom prst="roundRect">
-            <a:avLst>
-              <a:gd name="adj" fmla="val 4898"/>
+              <a:gd name="adj" fmla="val 5000"/>
             </a:avLst>
           </a:prstGeom>
           <a:solidFill>
@@ -3928,14 +3535,14 @@
       </p:sp>
       <p:sp>
         <p:nvSpPr>
-          <p:cNvPr id="7" name="circle-247"/>
-          <p:cNvSpPr/>
-          <p:nvPr/>
-        </p:nvSpPr>
-        <p:spPr>
-          <a:xfrm>
-            <a:off x="6217920" y="1554480"/>
-            <a:ext cx="594360" cy="594360"/>
+          <p:cNvPr id="5" name="dot-250"/>
+          <p:cNvSpPr/>
+          <p:nvPr/>
+        </p:nvSpPr>
+        <p:spPr>
+          <a:xfrm>
+            <a:off x="822960" y="2487168"/>
+            <a:ext cx="292608" cy="292608"/>
           </a:xfrm>
           <a:prstGeom prst="ellipse">
             <a:avLst/>
@@ -3946,40 +3553,16 @@
           <a:ln/>
         </p:spPr>
       </p:sp>
-      <p:pic>
-        <p:nvPicPr>
-          <p:cNvPr id="8" name="icon-248" descr="preencoded.png">    </p:cNvPr>
-          <p:cNvPicPr>
-            <a:picLocks noChangeAspect="1"/>
-          </p:cNvPicPr>
-          <p:nvPr/>
-        </p:nvPicPr>
-        <p:blipFill>
-          <a:blip r:embed="rId1"/>
-          <a:stretch>
-            <a:fillRect/>
-          </a:stretch>
-        </p:blipFill>
-        <p:spPr>
-          <a:xfrm>
-            <a:off x="6366510" y="1703070"/>
-            <a:ext cx="297180" cy="297180"/>
-          </a:xfrm>
-          <a:prstGeom prst="rect">
-            <a:avLst/>
-          </a:prstGeom>
-        </p:spPr>
-      </p:pic>
-      <p:sp>
-        <p:nvSpPr>
-          <p:cNvPr id="9" name="text-249"/>
-          <p:cNvSpPr txBox="1"/>
-          <p:nvPr/>
-        </p:nvSpPr>
-        <p:spPr>
-          <a:xfrm>
-            <a:off x="6995160" y="1554480"/>
-            <a:ext cx="4389120" cy="594360"/>
+      <p:sp>
+        <p:nvSpPr>
+          <p:cNvPr id="6" name="text-251"/>
+          <p:cNvSpPr txBox="1"/>
+          <p:nvPr/>
+        </p:nvSpPr>
+        <p:spPr>
+          <a:xfrm>
+            <a:off x="1280160" y="2377440"/>
+            <a:ext cx="4572000" cy="502920"/>
           </a:xfrm>
           <a:prstGeom prst="rect">
             <a:avLst/>
@@ -4000,7 +3583,7 @@
                   <a:schemeClr val="tx1"/>
                 </a:solidFill>
               </a:rPr>
-              <a:t>Publisher confirm (ack / nack)</a:t>
+              <a:t>ms-gimnasios</a:t>
             </a:r>
             <a:endParaRPr lang="en-US" sz="1800" dirty="0"/>
           </a:p>
@@ -4008,50 +3591,14 @@
       </p:sp>
       <p:sp>
         <p:nvSpPr>
-          <p:cNvPr id="10" name="text-250"/>
-          <p:cNvSpPr txBox="1"/>
-          <p:nvPr/>
-        </p:nvSpPr>
-        <p:spPr>
-          <a:xfrm>
-            <a:off x="6995160" y="2103120"/>
-            <a:ext cx="4389120" cy="365760"/>
-          </a:xfrm>
-          <a:prstGeom prst="rect">
-            <a:avLst/>
-          </a:prstGeom>
-          <a:noFill/>
-          <a:ln/>
-        </p:spPr>
-        <p:txBody>
-          <a:bodyPr wrap="square" lIns="0" tIns="0" rIns="0" bIns="0" rtlCol="0" anchor="ctr"/>
-          <a:lstStyle/>
-          <a:p>
-            <a:pPr algn="l" indent="0" marL="0">
-              <a:buNone/>
-            </a:pPr>
-            <a:r>
-              <a:rPr lang="en-US" sz="1300" i="1" dirty="0">
-                <a:solidFill>
-                  <a:schemeClr val="accent6"/>
-                </a:solidFill>
-              </a:rPr>
-              <a:t>¿RabbitMQ recibió el mensaje?</a:t>
-            </a:r>
-            <a:endParaRPr lang="en-US" sz="1300" dirty="0"/>
-          </a:p>
-        </p:txBody>
-      </p:sp>
-      <p:sp>
-        <p:nvSpPr>
-          <p:cNvPr id="11" name="text-251"/>
-          <p:cNvSpPr txBox="1"/>
-          <p:nvPr/>
-        </p:nvSpPr>
-        <p:spPr>
-          <a:xfrm>
-            <a:off x="6217920" y="2514600"/>
-            <a:ext cx="5166360" cy="914400"/>
+          <p:cNvPr id="7" name="list-252"/>
+          <p:cNvSpPr txBox="1"/>
+          <p:nvPr/>
+        </p:nvSpPr>
+        <p:spPr>
+          <a:xfrm>
+            <a:off x="868680" y="3108960"/>
+            <a:ext cx="4846320" cy="2286000"/>
           </a:xfrm>
           <a:prstGeom prst="rect">
             <a:avLst/>
@@ -4063,35 +3610,75 @@
           <a:bodyPr wrap="square" lIns="0" tIns="0" rIns="0" bIns="0" rtlCol="0" anchor="t"/>
           <a:lstStyle/>
           <a:p>
-            <a:pPr algn="l" indent="0" marL="0">
-              <a:buNone/>
-            </a:pPr>
-            <a:r>
-              <a:rPr lang="en-US" sz="1400" dirty="0">
+            <a:pPr marL="228600" indent="-228600">
+              <a:spcAft>
+                <a:spcPts val="800"/>
+              </a:spcAft>
+              <a:buSzPct val="100000"/>
+              <a:buChar char="•"/>
+            </a:pPr>
+            <a:r>
+              <a:rPr lang="en-US" sz="1600" dirty="0">
                 <a:solidFill>
                   <a:schemeClr val="tx1"/>
                 </a:solidFill>
               </a:rPr>
-              <a:t>El broker confirma que aceptó el mensaje. Si responde nack, ConfirmCallback lo registra con log.error.</a:t>
-            </a:r>
-            <a:endParaRPr lang="en-US" sz="1400" dirty="0"/>
-          </a:p>
-        </p:txBody>
-      </p:sp>
-      <p:sp>
-        <p:nvSpPr>
-          <p:cNvPr id="12" name="box-252"/>
-          <p:cNvSpPr/>
-          <p:nvPr/>
-        </p:nvSpPr>
-        <p:spPr>
-          <a:xfrm>
-            <a:off x="5943600" y="3749040"/>
-            <a:ext cx="5669280" cy="2240280"/>
+              <a:t>Guarda cada reserva con el mismo número que tiene en ms-reservas</a:t>
+            </a:r>
+            <a:endParaRPr lang="en-US" sz="1600" dirty="0"/>
+          </a:p>
+          <a:p>
+            <a:pPr marL="228600" indent="-228600">
+              <a:spcAft>
+                <a:spcPts val="800"/>
+              </a:spcAft>
+              <a:buSzPct val="100000"/>
+              <a:buChar char="•"/>
+            </a:pPr>
+            <a:r>
+              <a:rPr lang="en-US" sz="1600" dirty="0">
+                <a:solidFill>
+                  <a:schemeClr val="tx1"/>
+                </a:solidFill>
+              </a:rPr>
+              <a:t>Si llega repetida, sobrescribe ese mismo registro en vez de crear otro</a:t>
+            </a:r>
+            <a:endParaRPr lang="en-US" sz="1600" dirty="0"/>
+          </a:p>
+          <a:p>
+            <a:pPr marL="228600" indent="-228600">
+              <a:spcAft>
+                <a:spcPts val="800"/>
+              </a:spcAft>
+              <a:buSzPct val="100000"/>
+              <a:buChar char="•"/>
+            </a:pPr>
+            <a:r>
+              <a:rPr lang="en-US" sz="1600" dirty="0">
+                <a:solidFill>
+                  <a:schemeClr val="tx1"/>
+                </a:solidFill>
+              </a:rPr>
+              <a:t>Una cancelación actualiza el mismo registro</a:t>
+            </a:r>
+            <a:endParaRPr lang="en-US" sz="1600" dirty="0"/>
+          </a:p>
+        </p:txBody>
+      </p:sp>
+      <p:sp>
+        <p:nvSpPr>
+          <p:cNvPr id="8" name="box-253"/>
+          <p:cNvSpPr/>
+          <p:nvPr/>
+        </p:nvSpPr>
+        <p:spPr>
+          <a:xfrm>
+            <a:off x="6172200" y="2240280"/>
+            <a:ext cx="5440680" cy="2743200"/>
           </a:xfrm>
           <a:prstGeom prst="roundRect">
             <a:avLst>
-              <a:gd name="adj" fmla="val 4898"/>
+              <a:gd name="adj" fmla="val 5000"/>
             </a:avLst>
           </a:prstGeom>
           <a:solidFill>
@@ -4102,58 +3689,34 @@
       </p:sp>
       <p:sp>
         <p:nvSpPr>
-          <p:cNvPr id="13" name="circle-253"/>
-          <p:cNvSpPr/>
-          <p:nvPr/>
-        </p:nvSpPr>
-        <p:spPr>
-          <a:xfrm>
-            <a:off x="6217920" y="4023360"/>
-            <a:ext cx="594360" cy="594360"/>
+          <p:cNvPr id="9" name="dot-254"/>
+          <p:cNvSpPr/>
+          <p:nvPr/>
+        </p:nvSpPr>
+        <p:spPr>
+          <a:xfrm>
+            <a:off x="6446520" y="2487168"/>
+            <a:ext cx="292608" cy="292608"/>
           </a:xfrm>
           <a:prstGeom prst="ellipse">
             <a:avLst/>
           </a:prstGeom>
           <a:solidFill>
-            <a:schemeClr val="accent1"/>
+            <a:schemeClr val="accent3"/>
           </a:solidFill>
           <a:ln/>
         </p:spPr>
       </p:sp>
-      <p:pic>
-        <p:nvPicPr>
-          <p:cNvPr id="14" name="icon-254" descr="preencoded.png">    </p:cNvPr>
-          <p:cNvPicPr>
-            <a:picLocks noChangeAspect="1"/>
-          </p:cNvPicPr>
-          <p:nvPr/>
-        </p:nvPicPr>
-        <p:blipFill>
-          <a:blip r:embed="rId2"/>
-          <a:stretch>
-            <a:fillRect/>
-          </a:stretch>
-        </p:blipFill>
-        <p:spPr>
-          <a:xfrm>
-            <a:off x="6366510" y="4171950"/>
-            <a:ext cx="297180" cy="297180"/>
-          </a:xfrm>
-          <a:prstGeom prst="rect">
-            <a:avLst/>
-          </a:prstGeom>
-        </p:spPr>
-      </p:pic>
-      <p:sp>
-        <p:nvSpPr>
-          <p:cNvPr id="15" name="text-255"/>
-          <p:cNvSpPr txBox="1"/>
-          <p:nvPr/>
-        </p:nvSpPr>
-        <p:spPr>
-          <a:xfrm>
-            <a:off x="6995160" y="4023360"/>
-            <a:ext cx="4389120" cy="594360"/>
+      <p:sp>
+        <p:nvSpPr>
+          <p:cNvPr id="10" name="text-255"/>
+          <p:cNvSpPr txBox="1"/>
+          <p:nvPr/>
+        </p:nvSpPr>
+        <p:spPr>
+          <a:xfrm>
+            <a:off x="6903720" y="2377440"/>
+            <a:ext cx="4572000" cy="502920"/>
           </a:xfrm>
           <a:prstGeom prst="rect">
             <a:avLst/>
@@ -4174,7 +3737,7 @@
                   <a:schemeClr val="tx1"/>
                 </a:solidFill>
               </a:rPr>
-              <a:t>Return (mandatory)</a:t>
+              <a:t>ms-notificaciones</a:t>
             </a:r>
             <a:endParaRPr lang="en-US" sz="1800" dirty="0"/>
           </a:p>
@@ -4182,50 +3745,14 @@
       </p:sp>
       <p:sp>
         <p:nvSpPr>
-          <p:cNvPr id="16" name="text-256"/>
-          <p:cNvSpPr txBox="1"/>
-          <p:nvPr/>
-        </p:nvSpPr>
-        <p:spPr>
-          <a:xfrm>
-            <a:off x="6995160" y="4572000"/>
-            <a:ext cx="4389120" cy="365760"/>
-          </a:xfrm>
-          <a:prstGeom prst="rect">
-            <a:avLst/>
-          </a:prstGeom>
-          <a:noFill/>
-          <a:ln/>
-        </p:spPr>
-        <p:txBody>
-          <a:bodyPr wrap="square" lIns="0" tIns="0" rIns="0" bIns="0" rtlCol="0" anchor="ctr"/>
-          <a:lstStyle/>
-          <a:p>
-            <a:pPr algn="l" indent="0" marL="0">
-              <a:buNone/>
-            </a:pPr>
-            <a:r>
-              <a:rPr lang="en-US" sz="1300" i="1" dirty="0">
-                <a:solidFill>
-                  <a:schemeClr val="accent6"/>
-                </a:solidFill>
-              </a:rPr>
-              <a:t>¿Llegó al menos a una cola?</a:t>
-            </a:r>
-            <a:endParaRPr lang="en-US" sz="1300" dirty="0"/>
-          </a:p>
-        </p:txBody>
-      </p:sp>
-      <p:sp>
-        <p:nvSpPr>
-          <p:cNvPr id="17" name="text-257"/>
-          <p:cNvSpPr txBox="1"/>
-          <p:nvPr/>
-        </p:nvSpPr>
-        <p:spPr>
-          <a:xfrm>
-            <a:off x="6217920" y="4983480"/>
-            <a:ext cx="5166360" cy="914400"/>
+          <p:cNvPr id="11" name="list-256"/>
+          <p:cNvSpPr txBox="1"/>
+          <p:nvPr/>
+        </p:nvSpPr>
+        <p:spPr>
+          <a:xfrm>
+            <a:off x="6492240" y="3108960"/>
+            <a:ext cx="4846320" cy="2286000"/>
           </a:xfrm>
           <a:prstGeom prst="rect">
             <a:avLst/>
@@ -4237,76 +3764,58 @@
           <a:bodyPr wrap="square" lIns="0" tIns="0" rIns="0" bIns="0" rtlCol="0" anchor="t"/>
           <a:lstStyle/>
           <a:p>
-            <a:pPr algn="l" indent="0" marL="0">
-              <a:buNone/>
-            </a:pPr>
-            <a:r>
-              <a:rPr lang="en-US" sz="1400" dirty="0">
+            <a:pPr marL="228600" indent="-228600">
+              <a:spcAft>
+                <a:spcPts val="800"/>
+              </a:spcAft>
+              <a:buSzPct val="100000"/>
+              <a:buChar char="•"/>
+            </a:pPr>
+            <a:r>
+              <a:rPr lang="en-US" sz="1600" dirty="0">
                 <a:solidFill>
                   <a:schemeClr val="tx1"/>
                 </a:solidFill>
               </a:rPr>
-              <a:t>Si ninguna cola calza con la routing key, el broker devuelve el mensaje en vez de botarlo en silencio. ReturnsCallback lo registra con log.warn.</a:t>
-            </a:r>
-            <a:endParaRPr lang="en-US" sz="1400" dirty="0"/>
-          </a:p>
-        </p:txBody>
-      </p:sp>
-      <p:sp>
-        <p:nvSpPr>
-          <p:cNvPr id="18" name="box-258"/>
-          <p:cNvSpPr/>
-          <p:nvPr/>
-        </p:nvSpPr>
-        <p:spPr>
-          <a:xfrm>
-            <a:off x="548640" y="4526280"/>
-            <a:ext cx="4937760" cy="1554480"/>
-          </a:xfrm>
-          <a:prstGeom prst="roundRect">
-            <a:avLst>
-              <a:gd name="adj" fmla="val 7059"/>
-            </a:avLst>
-          </a:prstGeom>
-          <a:solidFill>
-            <a:schemeClr val="bg2"/>
-          </a:solidFill>
-          <a:ln/>
-        </p:spPr>
-      </p:sp>
-      <p:sp>
-        <p:nvSpPr>
-          <p:cNvPr id="19" name="text-259"/>
-          <p:cNvSpPr txBox="1"/>
-          <p:nvPr/>
-        </p:nvSpPr>
-        <p:spPr>
-          <a:xfrm>
-            <a:off x="777240" y="4617720"/>
-            <a:ext cx="4480560" cy="1371600"/>
-          </a:xfrm>
-          <a:prstGeom prst="rect">
-            <a:avLst/>
-          </a:prstGeom>
-          <a:noFill/>
-          <a:ln/>
-        </p:spPr>
-        <p:txBody>
-          <a:bodyPr wrap="square" lIns="0" tIns="0" rIns="0" bIns="0" rtlCol="0" anchor="ctr"/>
-          <a:lstStyle/>
-          <a:p>
-            <a:pPr algn="l" indent="0" marL="0">
-              <a:buNone/>
-            </a:pPr>
-            <a:r>
-              <a:rPr lang="en-US" sz="1400" dirty="0">
+              <a:t>Antes de crear un aviso, revisa si ya existe</a:t>
+            </a:r>
+            <a:endParaRPr lang="en-US" sz="1600" dirty="0"/>
+          </a:p>
+          <a:p>
+            <a:pPr marL="228600" indent="-228600">
+              <a:spcAft>
+                <a:spcPts val="800"/>
+              </a:spcAft>
+              <a:buSzPct val="100000"/>
+              <a:buChar char="•"/>
+            </a:pPr>
+            <a:r>
+              <a:rPr lang="en-US" sz="1600" dirty="0">
                 <a:solidFill>
                   <a:schemeClr val="tx1"/>
                 </a:solidFill>
               </a:rPr>
-              <a:t>Caso real: si ms-reservas publica antes de que ms-gimnasios y ms-notificaciones declaren sus colas, no hay cola que calce y aparece el log.warn del return.</a:t>
-            </a:r>
-            <a:endParaRPr lang="en-US" sz="1400" dirty="0"/>
+              <a:t>La base de datos además impide avisos duplicados</a:t>
+            </a:r>
+            <a:endParaRPr lang="en-US" sz="1600" dirty="0"/>
+          </a:p>
+          <a:p>
+            <a:pPr marL="228600" indent="-228600">
+              <a:spcAft>
+                <a:spcPts val="800"/>
+              </a:spcAft>
+              <a:buSzPct val="100000"/>
+              <a:buChar char="•"/>
+            </a:pPr>
+            <a:r>
+              <a:rPr lang="en-US" sz="1600" dirty="0">
+                <a:solidFill>
+                  <a:schemeClr val="tx1"/>
+                </a:solidFill>
+              </a:rPr>
+              <a:t>El usuario nunca ve el mismo aviso dos veces</a:t>
+            </a:r>
+            <a:endParaRPr lang="en-US" sz="1600" dirty="0"/>
           </a:p>
         </p:txBody>
       </p:sp>
@@ -4412,7 +3921,7 @@
                   <a:schemeClr val="tx1"/>
                 </a:solidFill>
               </a:rPr>
-              <a:t>Lado consumidor: entrega al menos una vez</a:t>
+              <a:t>¿Qué pasa si un mensaje falla?</a:t>
             </a:r>
             <a:endParaRPr lang="en-US" sz="3200" dirty="0"/>
           </a:p>
@@ -4420,54 +3929,570 @@
       </p:sp>
       <p:sp>
         <p:nvSpPr>
-          <p:cNvPr id="3" name="text-260"/>
-          <p:cNvSpPr txBox="1"/>
-          <p:nvPr/>
-        </p:nvSpPr>
-        <p:spPr>
-          <a:xfrm>
-            <a:off x="548640" y="1234440"/>
-            <a:ext cx="11064240" cy="822960"/>
-          </a:xfrm>
-          <a:prstGeom prst="rect">
-            <a:avLst/>
-          </a:prstGeom>
-          <a:noFill/>
-          <a:ln/>
-        </p:spPr>
-        <p:txBody>
-          <a:bodyPr wrap="square" lIns="0" tIns="0" rIns="0" bIns="0" rtlCol="0" anchor="t"/>
-          <a:lstStyle/>
-          <a:p>
-            <a:pPr algn="l" indent="0" marL="0">
-              <a:buNone/>
-            </a:pPr>
-            <a:r>
-              <a:rPr lang="en-US" sz="1600" dirty="0">
-                <a:solidFill>
-                  <a:schemeClr val="tx1"/>
-                </a:solidFill>
-              </a:rPr>
-              <a:t>RabbitMQ puede entregar el mismo mensaje dos veces (por ejemplo, si el consumidor se cae antes del ack). Cada consumidor tiene que ser idempotente: procesar dos veces debe dar el mismo resultado.</a:t>
-            </a:r>
-            <a:endParaRPr lang="en-US" sz="1600" dirty="0"/>
-          </a:p>
-        </p:txBody>
-      </p:sp>
-      <p:sp>
-        <p:nvSpPr>
-          <p:cNvPr id="4" name="box-261"/>
-          <p:cNvSpPr/>
-          <p:nvPr/>
-        </p:nvSpPr>
-        <p:spPr>
-          <a:xfrm>
-            <a:off x="548640" y="2240280"/>
-            <a:ext cx="5440680" cy="3566160"/>
+          <p:cNvPr id="3" name="box-257"/>
+          <p:cNvSpPr/>
+          <p:nvPr/>
+        </p:nvSpPr>
+        <p:spPr>
+          <a:xfrm>
+            <a:off x="548640" y="1417320"/>
+            <a:ext cx="1691640" cy="1280160"/>
           </a:xfrm>
           <a:prstGeom prst="roundRect">
             <a:avLst>
-              <a:gd name="adj" fmla="val 3846"/>
+              <a:gd name="adj" fmla="val 8571"/>
+            </a:avLst>
+          </a:prstGeom>
+          <a:solidFill>
+            <a:schemeClr val="accent6"/>
+          </a:solidFill>
+          <a:ln/>
+        </p:spPr>
+      </p:sp>
+      <p:sp>
+        <p:nvSpPr>
+          <p:cNvPr id="4" name="label-258"/>
+          <p:cNvSpPr txBox="1"/>
+          <p:nvPr/>
+        </p:nvSpPr>
+        <p:spPr>
+          <a:xfrm>
+            <a:off x="548640" y="1417320"/>
+            <a:ext cx="1691640" cy="1280160"/>
+          </a:xfrm>
+          <a:prstGeom prst="rect">
+            <a:avLst/>
+          </a:prstGeom>
+          <a:noFill/>
+          <a:ln/>
+        </p:spPr>
+        <p:txBody>
+          <a:bodyPr wrap="square" lIns="762" tIns="762" rIns="762" bIns="762" rtlCol="0" anchor="ctr"/>
+          <a:lstStyle/>
+          <a:p>
+            <a:pPr algn="ctr" indent="0" marL="0">
+              <a:buNone/>
+            </a:pPr>
+            <a:r>
+              <a:rPr lang="en-US" sz="1400" b="1" dirty="0">
+                <a:solidFill>
+                  <a:schemeClr val="bg1"/>
+                </a:solidFill>
+              </a:rPr>
+              <a:t>Falla</a:t>
+            </a:r>
+            <a:endParaRPr lang="en-US" sz="1400" dirty="0"/>
+          </a:p>
+          <a:p>
+            <a:pPr algn="ctr" indent="0" marL="0">
+              <a:buNone/>
+            </a:pPr>
+            <a:r>
+              <a:rPr lang="en-US" sz="1400" dirty="0">
+                <a:solidFill>
+                  <a:schemeClr val="bg1"/>
+                </a:solidFill>
+              </a:rPr>
+              <a:t>el servicio no pudo procesarlo</a:t>
+            </a:r>
+            <a:endParaRPr lang="en-US" sz="1400" dirty="0"/>
+          </a:p>
+        </p:txBody>
+      </p:sp>
+      <p:sp>
+        <p:nvSpPr>
+          <p:cNvPr id="5" name="arrow-259"/>
+          <p:cNvSpPr/>
+          <p:nvPr/>
+        </p:nvSpPr>
+        <p:spPr>
+          <a:xfrm>
+            <a:off x="2240280" y="2057400"/>
+            <a:ext cx="182880" cy="914"/>
+          </a:xfrm>
+          <a:prstGeom prst="line">
+            <a:avLst/>
+          </a:prstGeom>
+          <a:noFill/>
+          <a:ln w="19050">
+            <a:solidFill>
+              <a:schemeClr val="accent6"/>
+            </a:solidFill>
+            <a:prstDash val="solid"/>
+            <a:tailEnd type="triangle"/>
+          </a:ln>
+        </p:spPr>
+      </p:sp>
+      <p:sp>
+        <p:nvSpPr>
+          <p:cNvPr id="6" name="box-260"/>
+          <p:cNvSpPr/>
+          <p:nvPr/>
+        </p:nvSpPr>
+        <p:spPr>
+          <a:xfrm>
+            <a:off x="2423160" y="1417320"/>
+            <a:ext cx="1691640" cy="1280160"/>
+          </a:xfrm>
+          <a:prstGeom prst="roundRect">
+            <a:avLst>
+              <a:gd name="adj" fmla="val 8571"/>
+            </a:avLst>
+          </a:prstGeom>
+          <a:solidFill>
+            <a:schemeClr val="accent1"/>
+          </a:solidFill>
+          <a:ln/>
+        </p:spPr>
+      </p:sp>
+      <p:sp>
+        <p:nvSpPr>
+          <p:cNvPr id="7" name="label-261"/>
+          <p:cNvSpPr txBox="1"/>
+          <p:nvPr/>
+        </p:nvSpPr>
+        <p:spPr>
+          <a:xfrm>
+            <a:off x="2423160" y="1417320"/>
+            <a:ext cx="1691640" cy="1280160"/>
+          </a:xfrm>
+          <a:prstGeom prst="rect">
+            <a:avLst/>
+          </a:prstGeom>
+          <a:noFill/>
+          <a:ln/>
+        </p:spPr>
+        <p:txBody>
+          <a:bodyPr wrap="square" lIns="762" tIns="762" rIns="762" bIns="762" rtlCol="0" anchor="ctr"/>
+          <a:lstStyle/>
+          <a:p>
+            <a:pPr algn="ctr" indent="0" marL="0">
+              <a:buNone/>
+            </a:pPr>
+            <a:r>
+              <a:rPr lang="en-US" sz="1400" b="1" dirty="0">
+                <a:solidFill>
+                  <a:schemeClr val="bg1"/>
+                </a:solidFill>
+              </a:rPr>
+              <a:t>Reintenta</a:t>
+            </a:r>
+            <a:endParaRPr lang="en-US" sz="1400" dirty="0"/>
+          </a:p>
+          <a:p>
+            <a:pPr algn="ctr" indent="0" marL="0">
+              <a:buNone/>
+            </a:pPr>
+            <a:r>
+              <a:rPr lang="en-US" sz="1400" dirty="0">
+                <a:solidFill>
+                  <a:schemeClr val="bg1"/>
+                </a:solidFill>
+              </a:rPr>
+              <a:t>después de 1 s</a:t>
+            </a:r>
+            <a:endParaRPr lang="en-US" sz="1400" dirty="0"/>
+          </a:p>
+        </p:txBody>
+      </p:sp>
+      <p:sp>
+        <p:nvSpPr>
+          <p:cNvPr id="8" name="arrow-262"/>
+          <p:cNvSpPr/>
+          <p:nvPr/>
+        </p:nvSpPr>
+        <p:spPr>
+          <a:xfrm>
+            <a:off x="4114800" y="2057400"/>
+            <a:ext cx="182880" cy="914"/>
+          </a:xfrm>
+          <a:prstGeom prst="line">
+            <a:avLst/>
+          </a:prstGeom>
+          <a:noFill/>
+          <a:ln w="19050">
+            <a:solidFill>
+              <a:schemeClr val="accent6"/>
+            </a:solidFill>
+            <a:prstDash val="solid"/>
+            <a:tailEnd type="triangle"/>
+          </a:ln>
+        </p:spPr>
+      </p:sp>
+      <p:sp>
+        <p:nvSpPr>
+          <p:cNvPr id="9" name="box-263"/>
+          <p:cNvSpPr/>
+          <p:nvPr/>
+        </p:nvSpPr>
+        <p:spPr>
+          <a:xfrm>
+            <a:off x="4297680" y="1417320"/>
+            <a:ext cx="1691640" cy="1280160"/>
+          </a:xfrm>
+          <a:prstGeom prst="roundRect">
+            <a:avLst>
+              <a:gd name="adj" fmla="val 8571"/>
+            </a:avLst>
+          </a:prstGeom>
+          <a:solidFill>
+            <a:schemeClr val="accent1"/>
+          </a:solidFill>
+          <a:ln/>
+        </p:spPr>
+      </p:sp>
+      <p:sp>
+        <p:nvSpPr>
+          <p:cNvPr id="10" name="label-264"/>
+          <p:cNvSpPr txBox="1"/>
+          <p:nvPr/>
+        </p:nvSpPr>
+        <p:spPr>
+          <a:xfrm>
+            <a:off x="4297680" y="1417320"/>
+            <a:ext cx="1691640" cy="1280160"/>
+          </a:xfrm>
+          <a:prstGeom prst="rect">
+            <a:avLst/>
+          </a:prstGeom>
+          <a:noFill/>
+          <a:ln/>
+        </p:spPr>
+        <p:txBody>
+          <a:bodyPr wrap="square" lIns="762" tIns="762" rIns="762" bIns="762" rtlCol="0" anchor="ctr"/>
+          <a:lstStyle/>
+          <a:p>
+            <a:pPr algn="ctr" indent="0" marL="0">
+              <a:buNone/>
+            </a:pPr>
+            <a:r>
+              <a:rPr lang="en-US" sz="1400" b="1" dirty="0">
+                <a:solidFill>
+                  <a:schemeClr val="bg1"/>
+                </a:solidFill>
+              </a:rPr>
+              <a:t>Reintenta</a:t>
+            </a:r>
+            <a:endParaRPr lang="en-US" sz="1400" dirty="0"/>
+          </a:p>
+          <a:p>
+            <a:pPr algn="ctr" indent="0" marL="0">
+              <a:buNone/>
+            </a:pPr>
+            <a:r>
+              <a:rPr lang="en-US" sz="1400" dirty="0">
+                <a:solidFill>
+                  <a:schemeClr val="bg1"/>
+                </a:solidFill>
+              </a:rPr>
+              <a:t>después de 2 s</a:t>
+            </a:r>
+            <a:endParaRPr lang="en-US" sz="1400" dirty="0"/>
+          </a:p>
+        </p:txBody>
+      </p:sp>
+      <p:sp>
+        <p:nvSpPr>
+          <p:cNvPr id="11" name="arrow-265"/>
+          <p:cNvSpPr/>
+          <p:nvPr/>
+        </p:nvSpPr>
+        <p:spPr>
+          <a:xfrm>
+            <a:off x="5989320" y="2057400"/>
+            <a:ext cx="182880" cy="914"/>
+          </a:xfrm>
+          <a:prstGeom prst="line">
+            <a:avLst/>
+          </a:prstGeom>
+          <a:noFill/>
+          <a:ln w="19050">
+            <a:solidFill>
+              <a:schemeClr val="accent6"/>
+            </a:solidFill>
+            <a:prstDash val="solid"/>
+            <a:tailEnd type="triangle"/>
+          </a:ln>
+        </p:spPr>
+      </p:sp>
+      <p:sp>
+        <p:nvSpPr>
+          <p:cNvPr id="12" name="box-266"/>
+          <p:cNvSpPr/>
+          <p:nvPr/>
+        </p:nvSpPr>
+        <p:spPr>
+          <a:xfrm>
+            <a:off x="6172200" y="1417320"/>
+            <a:ext cx="1691640" cy="1280160"/>
+          </a:xfrm>
+          <a:prstGeom prst="roundRect">
+            <a:avLst>
+              <a:gd name="adj" fmla="val 8571"/>
+            </a:avLst>
+          </a:prstGeom>
+          <a:solidFill>
+            <a:schemeClr val="accent1"/>
+          </a:solidFill>
+          <a:ln/>
+        </p:spPr>
+      </p:sp>
+      <p:sp>
+        <p:nvSpPr>
+          <p:cNvPr id="13" name="label-267"/>
+          <p:cNvSpPr txBox="1"/>
+          <p:nvPr/>
+        </p:nvSpPr>
+        <p:spPr>
+          <a:xfrm>
+            <a:off x="6172200" y="1417320"/>
+            <a:ext cx="1691640" cy="1280160"/>
+          </a:xfrm>
+          <a:prstGeom prst="rect">
+            <a:avLst/>
+          </a:prstGeom>
+          <a:noFill/>
+          <a:ln/>
+        </p:spPr>
+        <p:txBody>
+          <a:bodyPr wrap="square" lIns="762" tIns="762" rIns="762" bIns="762" rtlCol="0" anchor="ctr"/>
+          <a:lstStyle/>
+          <a:p>
+            <a:pPr algn="ctr" indent="0" marL="0">
+              <a:buNone/>
+            </a:pPr>
+            <a:r>
+              <a:rPr lang="en-US" sz="1400" b="1" dirty="0">
+                <a:solidFill>
+                  <a:schemeClr val="bg1"/>
+                </a:solidFill>
+              </a:rPr>
+              <a:t>Reintenta</a:t>
+            </a:r>
+            <a:endParaRPr lang="en-US" sz="1400" dirty="0"/>
+          </a:p>
+          <a:p>
+            <a:pPr algn="ctr" indent="0" marL="0">
+              <a:buNone/>
+            </a:pPr>
+            <a:r>
+              <a:rPr lang="en-US" sz="1400" dirty="0">
+                <a:solidFill>
+                  <a:schemeClr val="bg1"/>
+                </a:solidFill>
+              </a:rPr>
+              <a:t>después de 4 s</a:t>
+            </a:r>
+            <a:endParaRPr lang="en-US" sz="1400" dirty="0"/>
+          </a:p>
+        </p:txBody>
+      </p:sp>
+      <p:sp>
+        <p:nvSpPr>
+          <p:cNvPr id="14" name="arrow-268"/>
+          <p:cNvSpPr/>
+          <p:nvPr/>
+        </p:nvSpPr>
+        <p:spPr>
+          <a:xfrm>
+            <a:off x="7863840" y="2057400"/>
+            <a:ext cx="182880" cy="914"/>
+          </a:xfrm>
+          <a:prstGeom prst="line">
+            <a:avLst/>
+          </a:prstGeom>
+          <a:noFill/>
+          <a:ln w="19050">
+            <a:solidFill>
+              <a:schemeClr val="accent6"/>
+            </a:solidFill>
+            <a:prstDash val="solid"/>
+            <a:tailEnd type="triangle"/>
+          </a:ln>
+        </p:spPr>
+      </p:sp>
+      <p:sp>
+        <p:nvSpPr>
+          <p:cNvPr id="15" name="box-269"/>
+          <p:cNvSpPr/>
+          <p:nvPr/>
+        </p:nvSpPr>
+        <p:spPr>
+          <a:xfrm>
+            <a:off x="8046720" y="1417320"/>
+            <a:ext cx="1691640" cy="1280160"/>
+          </a:xfrm>
+          <a:prstGeom prst="roundRect">
+            <a:avLst>
+              <a:gd name="adj" fmla="val 8571"/>
+            </a:avLst>
+          </a:prstGeom>
+          <a:solidFill>
+            <a:schemeClr val="accent4"/>
+          </a:solidFill>
+          <a:ln/>
+        </p:spPr>
+      </p:sp>
+      <p:sp>
+        <p:nvSpPr>
+          <p:cNvPr id="16" name="label-270"/>
+          <p:cNvSpPr txBox="1"/>
+          <p:nvPr/>
+        </p:nvSpPr>
+        <p:spPr>
+          <a:xfrm>
+            <a:off x="8046720" y="1417320"/>
+            <a:ext cx="1691640" cy="1280160"/>
+          </a:xfrm>
+          <a:prstGeom prst="rect">
+            <a:avLst/>
+          </a:prstGeom>
+          <a:noFill/>
+          <a:ln/>
+        </p:spPr>
+        <p:txBody>
+          <a:bodyPr wrap="square" lIns="762" tIns="762" rIns="762" bIns="762" rtlCol="0" anchor="ctr"/>
+          <a:lstStyle/>
+          <a:p>
+            <a:pPr algn="ctr" indent="0" marL="0">
+              <a:buNone/>
+            </a:pPr>
+            <a:r>
+              <a:rPr lang="en-US" sz="1400" b="1" dirty="0">
+                <a:solidFill>
+                  <a:schemeClr val="bg1"/>
+                </a:solidFill>
+              </a:rPr>
+              <a:t>Se registra</a:t>
+            </a:r>
+            <a:endParaRPr lang="en-US" sz="1400" dirty="0"/>
+          </a:p>
+          <a:p>
+            <a:pPr algn="ctr" indent="0" marL="0">
+              <a:buNone/>
+            </a:pPr>
+            <a:r>
+              <a:rPr lang="en-US" sz="1400" dirty="0">
+                <a:solidFill>
+                  <a:schemeClr val="bg1"/>
+                </a:solidFill>
+              </a:rPr>
+              <a:t>el error en el log</a:t>
+            </a:r>
+            <a:endParaRPr lang="en-US" sz="1400" dirty="0"/>
+          </a:p>
+        </p:txBody>
+      </p:sp>
+      <p:sp>
+        <p:nvSpPr>
+          <p:cNvPr id="17" name="arrow-271"/>
+          <p:cNvSpPr/>
+          <p:nvPr/>
+        </p:nvSpPr>
+        <p:spPr>
+          <a:xfrm>
+            <a:off x="9738360" y="2057400"/>
+            <a:ext cx="182880" cy="914"/>
+          </a:xfrm>
+          <a:prstGeom prst="line">
+            <a:avLst/>
+          </a:prstGeom>
+          <a:noFill/>
+          <a:ln w="19050">
+            <a:solidFill>
+              <a:schemeClr val="accent6"/>
+            </a:solidFill>
+            <a:prstDash val="solid"/>
+            <a:tailEnd type="triangle"/>
+          </a:ln>
+        </p:spPr>
+      </p:sp>
+      <p:sp>
+        <p:nvSpPr>
+          <p:cNvPr id="18" name="box-272"/>
+          <p:cNvSpPr/>
+          <p:nvPr/>
+        </p:nvSpPr>
+        <p:spPr>
+          <a:xfrm>
+            <a:off x="9921240" y="1417320"/>
+            <a:ext cx="1691640" cy="1280160"/>
+          </a:xfrm>
+          <a:prstGeom prst="roundRect">
+            <a:avLst>
+              <a:gd name="adj" fmla="val 8571"/>
+            </a:avLst>
+          </a:prstGeom>
+          <a:solidFill>
+            <a:schemeClr val="accent4"/>
+          </a:solidFill>
+          <a:ln/>
+        </p:spPr>
+      </p:sp>
+      <p:sp>
+        <p:nvSpPr>
+          <p:cNvPr id="19" name="label-273"/>
+          <p:cNvSpPr txBox="1"/>
+          <p:nvPr/>
+        </p:nvSpPr>
+        <p:spPr>
+          <a:xfrm>
+            <a:off x="9921240" y="1417320"/>
+            <a:ext cx="1691640" cy="1280160"/>
+          </a:xfrm>
+          <a:prstGeom prst="rect">
+            <a:avLst/>
+          </a:prstGeom>
+          <a:noFill/>
+          <a:ln/>
+        </p:spPr>
+        <p:txBody>
+          <a:bodyPr wrap="square" lIns="762" tIns="762" rIns="762" bIns="762" rtlCol="0" anchor="ctr"/>
+          <a:lstStyle/>
+          <a:p>
+            <a:pPr algn="ctr" indent="0" marL="0">
+              <a:buNone/>
+            </a:pPr>
+            <a:r>
+              <a:rPr lang="en-US" sz="1400" b="1" dirty="0">
+                <a:solidFill>
+                  <a:schemeClr val="bg1"/>
+                </a:solidFill>
+              </a:rPr>
+              <a:t>Cola de errores</a:t>
+            </a:r>
+            <a:endParaRPr lang="en-US" sz="1400" dirty="0"/>
+          </a:p>
+          <a:p>
+            <a:pPr algn="ctr" indent="0" marL="0">
+              <a:buNone/>
+            </a:pPr>
+            <a:r>
+              <a:rPr lang="en-US" sz="1400" dirty="0">
+                <a:solidFill>
+                  <a:schemeClr val="bg1"/>
+                </a:solidFill>
+              </a:rPr>
+              <a:t>queda guardado</a:t>
+            </a:r>
+            <a:endParaRPr lang="en-US" sz="1400" dirty="0"/>
+          </a:p>
+        </p:txBody>
+      </p:sp>
+      <p:sp>
+        <p:nvSpPr>
+          <p:cNvPr id="20" name="box-274"/>
+          <p:cNvSpPr/>
+          <p:nvPr/>
+        </p:nvSpPr>
+        <p:spPr>
+          <a:xfrm>
+            <a:off x="548640" y="3017520"/>
+            <a:ext cx="3474720" cy="2103120"/>
+          </a:xfrm>
+          <a:prstGeom prst="roundRect">
+            <a:avLst>
+              <a:gd name="adj" fmla="val 5217"/>
             </a:avLst>
           </a:prstGeom>
           <a:solidFill>
@@ -4478,34 +4503,58 @@
       </p:sp>
       <p:sp>
         <p:nvSpPr>
-          <p:cNvPr id="5" name="dot-262"/>
-          <p:cNvSpPr/>
-          <p:nvPr/>
-        </p:nvSpPr>
-        <p:spPr>
-          <a:xfrm>
-            <a:off x="822960" y="2487168"/>
-            <a:ext cx="292608" cy="292608"/>
+          <p:cNvPr id="21" name="circle-275"/>
+          <p:cNvSpPr/>
+          <p:nvPr/>
+        </p:nvSpPr>
+        <p:spPr>
+          <a:xfrm>
+            <a:off x="822960" y="3246120"/>
+            <a:ext cx="548640" cy="548640"/>
           </a:xfrm>
           <a:prstGeom prst="ellipse">
             <a:avLst/>
           </a:prstGeom>
           <a:solidFill>
-            <a:schemeClr val="accent2"/>
+            <a:schemeClr val="accent1"/>
           </a:solidFill>
           <a:ln/>
         </p:spPr>
       </p:sp>
-      <p:sp>
-        <p:nvSpPr>
-          <p:cNvPr id="6" name="text-263"/>
-          <p:cNvSpPr txBox="1"/>
-          <p:nvPr/>
-        </p:nvSpPr>
-        <p:spPr>
-          <a:xfrm>
-            <a:off x="1280160" y="2377440"/>
-            <a:ext cx="4572000" cy="502920"/>
+      <p:pic>
+        <p:nvPicPr>
+          <p:cNvPr id="22" name="icon-276" descr="preencoded.png">    </p:cNvPr>
+          <p:cNvPicPr>
+            <a:picLocks noChangeAspect="1"/>
+          </p:cNvPicPr>
+          <p:nvPr/>
+        </p:nvPicPr>
+        <p:blipFill>
+          <a:blip r:embed="rId1"/>
+          <a:stretch>
+            <a:fillRect/>
+          </a:stretch>
+        </p:blipFill>
+        <p:spPr>
+          <a:xfrm>
+            <a:off x="960120" y="3383280"/>
+            <a:ext cx="274320" cy="274320"/>
+          </a:xfrm>
+          <a:prstGeom prst="rect">
+            <a:avLst/>
+          </a:prstGeom>
+        </p:spPr>
+      </p:pic>
+      <p:sp>
+        <p:nvSpPr>
+          <p:cNvPr id="23" name="text-277"/>
+          <p:cNvSpPr txBox="1"/>
+          <p:nvPr/>
+        </p:nvSpPr>
+        <p:spPr>
+          <a:xfrm>
+            <a:off x="1508760" y="3200400"/>
+            <a:ext cx="2377440" cy="685800"/>
           </a:xfrm>
           <a:prstGeom prst="rect">
             <a:avLst/>
@@ -4521,27 +4570,27 @@
               <a:buNone/>
             </a:pPr>
             <a:r>
-              <a:rPr lang="en-US" sz="1700" b="1" dirty="0">
+              <a:rPr lang="en-US" sz="1500" b="1" dirty="0">
                 <a:solidFill>
                   <a:schemeClr val="tx1"/>
                 </a:solidFill>
               </a:rPr>
-              <a:t>ms-gimnasios · BookingListener</a:t>
-            </a:r>
-            <a:endParaRPr lang="en-US" sz="1700" dirty="0"/>
-          </a:p>
-        </p:txBody>
-      </p:sp>
-      <p:sp>
-        <p:nvSpPr>
-          <p:cNvPr id="7" name="list-264"/>
-          <p:cNvSpPr txBox="1"/>
-          <p:nvPr/>
-        </p:nvSpPr>
-        <p:spPr>
-          <a:xfrm>
-            <a:off x="868680" y="3063240"/>
-            <a:ext cx="4846320" cy="2926080"/>
+              <a:t>Los errores pasajeros se arreglan solos</a:t>
+            </a:r>
+            <a:endParaRPr lang="en-US" sz="1500" dirty="0"/>
+          </a:p>
+        </p:txBody>
+      </p:sp>
+      <p:sp>
+        <p:nvSpPr>
+          <p:cNvPr id="24" name="text-278"/>
+          <p:cNvSpPr txBox="1"/>
+          <p:nvPr/>
+        </p:nvSpPr>
+        <p:spPr>
+          <a:xfrm>
+            <a:off x="822960" y="3977640"/>
+            <a:ext cx="2971800" cy="1097280"/>
           </a:xfrm>
           <a:prstGeom prst="rect">
             <a:avLst/>
@@ -4553,93 +4602,35 @@
           <a:bodyPr wrap="square" lIns="0" tIns="0" rIns="0" bIns="0" rtlCol="0" anchor="t"/>
           <a:lstStyle/>
           <a:p>
-            <a:pPr marL="228600" indent="-228600">
-              <a:spcAft>
-                <a:spcPts val="800"/>
-              </a:spcAft>
-              <a:buSzPct val="100000"/>
-              <a:buChar char="•"/>
-            </a:pPr>
-            <a:r>
-              <a:rPr lang="en-US" sz="1500" dirty="0">
+            <a:pPr algn="l" indent="0" marL="0">
+              <a:buNone/>
+            </a:pPr>
+            <a:r>
+              <a:rPr lang="en-US" sz="1400" dirty="0">
                 <a:solidFill>
                   <a:schemeClr val="tx1"/>
                 </a:solidFill>
               </a:rPr>
-              <a:t>Guarda ReservaGimnasio usando el mismo id de la reserva de ms-reservas</a:t>
-            </a:r>
-            <a:endParaRPr lang="en-US" sz="1500" dirty="0"/>
-          </a:p>
-          <a:p>
-            <a:pPr marL="228600" indent="-228600">
-              <a:spcAft>
-                <a:spcPts val="800"/>
-              </a:spcAft>
-              <a:buSzPct val="100000"/>
-              <a:buChar char="•"/>
-            </a:pPr>
-            <a:r>
-              <a:rPr lang="en-US" sz="1500" dirty="0">
-                <a:solidFill>
-                  <a:schemeClr val="tx1"/>
-                </a:solidFill>
-              </a:rPr>
-              <a:t>save() inserta o reemplaza: un duplicado reescribe la misma fila</a:t>
-            </a:r>
-            <a:endParaRPr lang="en-US" sz="1500" dirty="0"/>
-          </a:p>
-          <a:p>
-            <a:pPr marL="228600" indent="-228600">
-              <a:spcAft>
-                <a:spcPts val="800"/>
-              </a:spcAft>
-              <a:buSzPct val="100000"/>
-              <a:buChar char="•"/>
-            </a:pPr>
-            <a:r>
-              <a:rPr lang="en-US" sz="1500" dirty="0">
-                <a:solidFill>
-                  <a:schemeClr val="tx1"/>
-                </a:solidFill>
-              </a:rPr>
-              <a:t>La cancelación reemplaza la fila con estado CANCELADA</a:t>
-            </a:r>
-            <a:endParaRPr lang="en-US" sz="1500" dirty="0"/>
-          </a:p>
-          <a:p>
-            <a:pPr marL="228600" indent="-228600">
-              <a:spcAft>
-                <a:spcPts val="800"/>
-              </a:spcAft>
-              <a:buSzPct val="100000"/>
-              <a:buChar char="•"/>
-            </a:pPr>
-            <a:r>
-              <a:rPr lang="en-US" sz="1500" dirty="0">
-                <a:solidFill>
-                  <a:schemeClr val="tx1"/>
-                </a:solidFill>
-              </a:rPr>
-              <a:t>Gimnasio desconocido: lanza GymNotFoundException y el mensaje termina en la DLQ</a:t>
-            </a:r>
-            <a:endParaRPr lang="en-US" sz="1500" dirty="0"/>
-          </a:p>
-        </p:txBody>
-      </p:sp>
-      <p:sp>
-        <p:nvSpPr>
-          <p:cNvPr id="8" name="box-265"/>
-          <p:cNvSpPr/>
-          <p:nvPr/>
-        </p:nvSpPr>
-        <p:spPr>
-          <a:xfrm>
-            <a:off x="6172200" y="2240280"/>
-            <a:ext cx="5440680" cy="3566160"/>
+              <a:t>Si la base de datos se demoró un momento, el reintento lo resuelve sin que nadie haga nada.</a:t>
+            </a:r>
+            <a:endParaRPr lang="en-US" sz="1400" dirty="0"/>
+          </a:p>
+        </p:txBody>
+      </p:sp>
+      <p:sp>
+        <p:nvSpPr>
+          <p:cNvPr id="25" name="box-279"/>
+          <p:cNvSpPr/>
+          <p:nvPr/>
+        </p:nvSpPr>
+        <p:spPr>
+          <a:xfrm>
+            <a:off x="4343400" y="3017520"/>
+            <a:ext cx="3474720" cy="2103120"/>
           </a:xfrm>
           <a:prstGeom prst="roundRect">
             <a:avLst>
-              <a:gd name="adj" fmla="val 3846"/>
+              <a:gd name="adj" fmla="val 5217"/>
             </a:avLst>
           </a:prstGeom>
           <a:solidFill>
@@ -4650,14 +4641,152 @@
       </p:sp>
       <p:sp>
         <p:nvSpPr>
-          <p:cNvPr id="9" name="dot-266"/>
-          <p:cNvSpPr/>
-          <p:nvPr/>
-        </p:nvSpPr>
-        <p:spPr>
-          <a:xfrm>
-            <a:off x="6446520" y="2487168"/>
-            <a:ext cx="292608" cy="292608"/>
+          <p:cNvPr id="26" name="circle-280"/>
+          <p:cNvSpPr/>
+          <p:nvPr/>
+        </p:nvSpPr>
+        <p:spPr>
+          <a:xfrm>
+            <a:off x="4617720" y="3246120"/>
+            <a:ext cx="548640" cy="548640"/>
+          </a:xfrm>
+          <a:prstGeom prst="ellipse">
+            <a:avLst/>
+          </a:prstGeom>
+          <a:solidFill>
+            <a:schemeClr val="accent4"/>
+          </a:solidFill>
+          <a:ln/>
+        </p:spPr>
+      </p:sp>
+      <p:pic>
+        <p:nvPicPr>
+          <p:cNvPr id="27" name="icon-281" descr="preencoded.png">    </p:cNvPr>
+          <p:cNvPicPr>
+            <a:picLocks noChangeAspect="1"/>
+          </p:cNvPicPr>
+          <p:nvPr/>
+        </p:nvPicPr>
+        <p:blipFill>
+          <a:blip r:embed="rId2"/>
+          <a:stretch>
+            <a:fillRect/>
+          </a:stretch>
+        </p:blipFill>
+        <p:spPr>
+          <a:xfrm>
+            <a:off x="4754880" y="3383280"/>
+            <a:ext cx="274320" cy="274320"/>
+          </a:xfrm>
+          <a:prstGeom prst="rect">
+            <a:avLst/>
+          </a:prstGeom>
+        </p:spPr>
+      </p:pic>
+      <p:sp>
+        <p:nvSpPr>
+          <p:cNvPr id="28" name="text-282"/>
+          <p:cNvSpPr txBox="1"/>
+          <p:nvPr/>
+        </p:nvSpPr>
+        <p:spPr>
+          <a:xfrm>
+            <a:off x="5303520" y="3200400"/>
+            <a:ext cx="2377440" cy="685800"/>
+          </a:xfrm>
+          <a:prstGeom prst="rect">
+            <a:avLst/>
+          </a:prstGeom>
+          <a:noFill/>
+          <a:ln/>
+        </p:spPr>
+        <p:txBody>
+          <a:bodyPr wrap="square" lIns="0" tIns="0" rIns="0" bIns="0" rtlCol="0" anchor="ctr"/>
+          <a:lstStyle/>
+          <a:p>
+            <a:pPr algn="l" indent="0" marL="0">
+              <a:buNone/>
+            </a:pPr>
+            <a:r>
+              <a:rPr lang="en-US" sz="1500" b="1" dirty="0">
+                <a:solidFill>
+                  <a:schemeClr val="tx1"/>
+                </a:solidFill>
+              </a:rPr>
+              <a:t>No se repite para siempre</a:t>
+            </a:r>
+            <a:endParaRPr lang="en-US" sz="1500" dirty="0"/>
+          </a:p>
+        </p:txBody>
+      </p:sp>
+      <p:sp>
+        <p:nvSpPr>
+          <p:cNvPr id="29" name="text-283"/>
+          <p:cNvSpPr txBox="1"/>
+          <p:nvPr/>
+        </p:nvSpPr>
+        <p:spPr>
+          <a:xfrm>
+            <a:off x="4617720" y="3977640"/>
+            <a:ext cx="2971800" cy="1097280"/>
+          </a:xfrm>
+          <a:prstGeom prst="rect">
+            <a:avLst/>
+          </a:prstGeom>
+          <a:noFill/>
+          <a:ln/>
+        </p:spPr>
+        <p:txBody>
+          <a:bodyPr wrap="square" lIns="0" tIns="0" rIns="0" bIns="0" rtlCol="0" anchor="t"/>
+          <a:lstStyle/>
+          <a:p>
+            <a:pPr algn="l" indent="0" marL="0">
+              <a:buNone/>
+            </a:pPr>
+            <a:r>
+              <a:rPr lang="en-US" sz="1400" dirty="0">
+                <a:solidFill>
+                  <a:schemeClr val="tx1"/>
+                </a:solidFill>
+              </a:rPr>
+              <a:t>Después de 4 intentos se deja de reintentar, para no trabar la cola con un mensaje que siempre falla.</a:t>
+            </a:r>
+            <a:endParaRPr lang="en-US" sz="1400" dirty="0"/>
+          </a:p>
+        </p:txBody>
+      </p:sp>
+      <p:sp>
+        <p:nvSpPr>
+          <p:cNvPr id="30" name="box-284"/>
+          <p:cNvSpPr/>
+          <p:nvPr/>
+        </p:nvSpPr>
+        <p:spPr>
+          <a:xfrm>
+            <a:off x="8138160" y="3017520"/>
+            <a:ext cx="3474720" cy="2103120"/>
+          </a:xfrm>
+          <a:prstGeom prst="roundRect">
+            <a:avLst>
+              <a:gd name="adj" fmla="val 5217"/>
+            </a:avLst>
+          </a:prstGeom>
+          <a:solidFill>
+            <a:schemeClr val="bg2"/>
+          </a:solidFill>
+          <a:ln/>
+        </p:spPr>
+      </p:sp>
+      <p:sp>
+        <p:nvSpPr>
+          <p:cNvPr id="31" name="circle-285"/>
+          <p:cNvSpPr/>
+          <p:nvPr/>
+        </p:nvSpPr>
+        <p:spPr>
+          <a:xfrm>
+            <a:off x="8412480" y="3246120"/>
+            <a:ext cx="548640" cy="548640"/>
           </a:xfrm>
           <a:prstGeom prst="ellipse">
             <a:avLst/>
@@ -4668,16 +4797,40 @@
           <a:ln/>
         </p:spPr>
       </p:sp>
-      <p:sp>
-        <p:nvSpPr>
-          <p:cNvPr id="10" name="text-267"/>
-          <p:cNvSpPr txBox="1"/>
-          <p:nvPr/>
-        </p:nvSpPr>
-        <p:spPr>
-          <a:xfrm>
-            <a:off x="6903720" y="2377440"/>
-            <a:ext cx="4572000" cy="502920"/>
+      <p:pic>
+        <p:nvPicPr>
+          <p:cNvPr id="32" name="icon-286" descr="preencoded.png">    </p:cNvPr>
+          <p:cNvPicPr>
+            <a:picLocks noChangeAspect="1"/>
+          </p:cNvPicPr>
+          <p:nvPr/>
+        </p:nvPicPr>
+        <p:blipFill>
+          <a:blip r:embed="rId3"/>
+          <a:stretch>
+            <a:fillRect/>
+          </a:stretch>
+        </p:blipFill>
+        <p:spPr>
+          <a:xfrm>
+            <a:off x="8549640" y="3383280"/>
+            <a:ext cx="274320" cy="274320"/>
+          </a:xfrm>
+          <a:prstGeom prst="rect">
+            <a:avLst/>
+          </a:prstGeom>
+        </p:spPr>
+      </p:pic>
+      <p:sp>
+        <p:nvSpPr>
+          <p:cNvPr id="33" name="text-287"/>
+          <p:cNvSpPr txBox="1"/>
+          <p:nvPr/>
+        </p:nvSpPr>
+        <p:spPr>
+          <a:xfrm>
+            <a:off x="9098280" y="3200400"/>
+            <a:ext cx="2377440" cy="685800"/>
           </a:xfrm>
           <a:prstGeom prst="rect">
             <a:avLst/>
@@ -4693,27 +4846,27 @@
               <a:buNone/>
             </a:pPr>
             <a:r>
-              <a:rPr lang="en-US" sz="1700" b="1" dirty="0">
+              <a:rPr lang="en-US" sz="1500" b="1" dirty="0">
                 <a:solidFill>
                   <a:schemeClr val="tx1"/>
                 </a:solidFill>
               </a:rPr>
-              <a:t>ms-notificaciones · NotificationService</a:t>
-            </a:r>
-            <a:endParaRPr lang="en-US" sz="1700" dirty="0"/>
-          </a:p>
-        </p:txBody>
-      </p:sp>
-      <p:sp>
-        <p:nvSpPr>
-          <p:cNvPr id="11" name="list-268"/>
-          <p:cNvSpPr txBox="1"/>
-          <p:nvPr/>
-        </p:nvSpPr>
-        <p:spPr>
-          <a:xfrm>
-            <a:off x="6492240" y="3063240"/>
-            <a:ext cx="4846320" cy="2926080"/>
+              <a:t>Nada se pierde</a:t>
+            </a:r>
+            <a:endParaRPr lang="en-US" sz="1500" dirty="0"/>
+          </a:p>
+        </p:txBody>
+      </p:sp>
+      <p:sp>
+        <p:nvSpPr>
+          <p:cNvPr id="34" name="text-288"/>
+          <p:cNvSpPr txBox="1"/>
+          <p:nvPr/>
+        </p:nvSpPr>
+        <p:spPr>
+          <a:xfrm>
+            <a:off x="8412480" y="3977640"/>
+            <a:ext cx="2971800" cy="1097280"/>
           </a:xfrm>
           <a:prstGeom prst="rect">
             <a:avLst/>
@@ -4725,12 +4878,66 @@
           <a:bodyPr wrap="square" lIns="0" tIns="0" rIns="0" bIns="0" rtlCol="0" anchor="t"/>
           <a:lstStyle/>
           <a:p>
-            <a:pPr marL="228600" indent="-228600">
-              <a:spcAft>
-                <a:spcPts val="800"/>
-              </a:spcAft>
-              <a:buSzPct val="100000"/>
-              <a:buChar char="•"/>
+            <a:pPr algn="l" indent="0" marL="0">
+              <a:buNone/>
+            </a:pPr>
+            <a:r>
+              <a:rPr lang="en-US" sz="1400" dirty="0">
+                <a:solidFill>
+                  <a:schemeClr val="tx1"/>
+                </a:solidFill>
+              </a:rPr>
+              <a:t>El mensaje queda en la cola de errores y se puede revisar o reenviar desde el panel de RabbitMQ.</a:t>
+            </a:r>
+            <a:endParaRPr lang="en-US" sz="1400" dirty="0"/>
+          </a:p>
+        </p:txBody>
+      </p:sp>
+      <p:sp>
+        <p:nvSpPr>
+          <p:cNvPr id="35" name="box-289"/>
+          <p:cNvSpPr/>
+          <p:nvPr/>
+        </p:nvSpPr>
+        <p:spPr>
+          <a:xfrm>
+            <a:off x="548640" y="5349240"/>
+            <a:ext cx="11064240" cy="731520"/>
+          </a:xfrm>
+          <a:prstGeom prst="roundRect">
+            <a:avLst>
+              <a:gd name="adj" fmla="val 15000"/>
+            </a:avLst>
+          </a:prstGeom>
+          <a:solidFill>
+            <a:schemeClr val="bg2"/>
+          </a:solidFill>
+          <a:ln/>
+        </p:spPr>
+      </p:sp>
+      <p:sp>
+        <p:nvSpPr>
+          <p:cNvPr id="36" name="label-290"/>
+          <p:cNvSpPr txBox="1"/>
+          <p:nvPr/>
+        </p:nvSpPr>
+        <p:spPr>
+          <a:xfrm>
+            <a:off x="548640" y="5349240"/>
+            <a:ext cx="11064240" cy="731520"/>
+          </a:xfrm>
+          <a:prstGeom prst="rect">
+            <a:avLst/>
+          </a:prstGeom>
+          <a:noFill/>
+          <a:ln/>
+        </p:spPr>
+        <p:txBody>
+          <a:bodyPr wrap="square" lIns="762" tIns="762" rIns="762" bIns="762" rtlCol="0" anchor="ctr"/>
+          <a:lstStyle/>
+          <a:p>
+            <a:pPr algn="ctr" indent="0" marL="0">
+              <a:buNone/>
             </a:pPr>
             <a:r>
               <a:rPr lang="en-US" sz="1500" dirty="0">
@@ -4738,61 +4945,7 @@
                   <a:schemeClr val="tx1"/>
                 </a:solidFill>
               </a:rPr>
-              <a:t>Revisa existsByReservaIdAndTipo antes de insertar</a:t>
-            </a:r>
-            <a:endParaRPr lang="en-US" sz="1500" dirty="0"/>
-          </a:p>
-          <a:p>
-            <a:pPr marL="228600" indent="-228600">
-              <a:spcAft>
-                <a:spcPts val="800"/>
-              </a:spcAft>
-              <a:buSzPct val="100000"/>
-              <a:buChar char="•"/>
-            </a:pPr>
-            <a:r>
-              <a:rPr lang="en-US" sz="1500" dirty="0">
-                <a:solidFill>
-                  <a:schemeClr val="tx1"/>
-                </a:solidFill>
-              </a:rPr>
-              <a:t>UNIQUE(reserva_id, tipo) en la tabla como segunda barrera</a:t>
-            </a:r>
-            <a:endParaRPr lang="en-US" sz="1500" dirty="0"/>
-          </a:p>
-          <a:p>
-            <a:pPr marL="228600" indent="-228600">
-              <a:spcAft>
-                <a:spcPts val="800"/>
-              </a:spcAft>
-              <a:buSzPct val="100000"/>
-              <a:buChar char="•"/>
-            </a:pPr>
-            <a:r>
-              <a:rPr lang="en-US" sz="1500" dirty="0">
-                <a:solidFill>
-                  <a:schemeClr val="tx1"/>
-                </a:solidFill>
-              </a:rPr>
-              <a:t>Una reserva da como máximo un aviso de creación y uno de cancelación</a:t>
-            </a:r>
-            <a:endParaRPr lang="en-US" sz="1500" dirty="0"/>
-          </a:p>
-          <a:p>
-            <a:pPr marL="228600" indent="-228600">
-              <a:spcAft>
-                <a:spcPts val="800"/>
-              </a:spcAft>
-              <a:buSzPct val="100000"/>
-              <a:buChar char="•"/>
-            </a:pPr>
-            <a:r>
-              <a:rPr lang="en-US" sz="1500" dirty="0">
-                <a:solidFill>
-                  <a:schemeClr val="tx1"/>
-                </a:solidFill>
-              </a:rPr>
-              <a:t>Mensaje incompleto (sin id, oid, fecha u hora): IllegalArgumentException, va a la DLQ</a:t>
+              <a:t>Ejemplo: llega una reserva de un gimnasio que no existe → falla 4 veces → termina en gimnasios.bookings.dlq</a:t>
             </a:r>
             <a:endParaRPr lang="en-US" sz="1500" dirty="0"/>
           </a:p>
@@ -4900,7 +5053,7 @@
                   <a:schemeClr val="tx1"/>
                 </a:solidFill>
               </a:rPr>
-              <a:t>Cuando un mensaje falla: reintentos y DLQ</a:t>
+              <a:t>Cómo llega la notificación al frontend</a:t>
             </a:r>
             <a:endParaRPr lang="en-US" sz="3200" dirty="0"/>
           </a:p>
@@ -4908,115 +5061,132 @@
       </p:sp>
       <p:sp>
         <p:nvSpPr>
-          <p:cNvPr id="3" name="box-269"/>
-          <p:cNvSpPr/>
-          <p:nvPr/>
-        </p:nvSpPr>
-        <p:spPr>
-          <a:xfrm>
-            <a:off x="548640" y="1417320"/>
-            <a:ext cx="1691640" cy="1280160"/>
-          </a:xfrm>
-          <a:prstGeom prst="roundRect">
-            <a:avLst>
-              <a:gd name="adj" fmla="val 8571"/>
-            </a:avLst>
-          </a:prstGeom>
-          <a:solidFill>
-            <a:schemeClr val="accent6"/>
-          </a:solidFill>
-          <a:ln/>
-        </p:spPr>
-      </p:sp>
-      <p:sp>
-        <p:nvSpPr>
-          <p:cNvPr id="4" name="label-270"/>
-          <p:cNvSpPr txBox="1"/>
-          <p:nvPr/>
-        </p:nvSpPr>
-        <p:spPr>
-          <a:xfrm>
-            <a:off x="548640" y="1417320"/>
-            <a:ext cx="1691640" cy="1280160"/>
-          </a:xfrm>
-          <a:prstGeom prst="rect">
-            <a:avLst/>
-          </a:prstGeom>
-          <a:noFill/>
-          <a:ln/>
-        </p:spPr>
-        <p:txBody>
-          <a:bodyPr wrap="square" lIns="762" tIns="762" rIns="762" bIns="762" rtlCol="0" anchor="ctr"/>
-          <a:lstStyle/>
-          <a:p>
-            <a:pPr algn="ctr" indent="0" marL="0">
-              <a:buNone/>
-            </a:pPr>
-            <a:r>
-              <a:rPr lang="en-US" sz="1300" b="1" dirty="0">
-                <a:solidFill>
-                  <a:schemeClr val="bg1"/>
-                </a:solidFill>
-              </a:rPr>
-              <a:t>Intento 1</a:t>
-            </a:r>
-            <a:endParaRPr lang="en-US" sz="1300" dirty="0"/>
-          </a:p>
-          <a:p>
-            <a:pPr algn="ctr" indent="0" marL="0">
-              <a:buNone/>
-            </a:pPr>
-            <a:r>
-              <a:rPr lang="en-US" sz="1300" dirty="0">
-                <a:solidFill>
-                  <a:schemeClr val="bg1"/>
-                </a:solidFill>
-              </a:rPr>
-              <a:t>el listener lanza excepción</a:t>
-            </a:r>
-            <a:endParaRPr lang="en-US" sz="1300" dirty="0"/>
-          </a:p>
-        </p:txBody>
-      </p:sp>
-      <p:sp>
-        <p:nvSpPr>
-          <p:cNvPr id="5" name="arrow-271"/>
-          <p:cNvSpPr/>
-          <p:nvPr/>
-        </p:nvSpPr>
-        <p:spPr>
-          <a:xfrm>
-            <a:off x="2240280" y="2057400"/>
-            <a:ext cx="182880" cy="914"/>
+          <p:cNvPr id="3" name="timeline-291"/>
+          <p:cNvSpPr/>
+          <p:nvPr/>
+        </p:nvSpPr>
+        <p:spPr>
+          <a:xfrm>
+            <a:off x="685800" y="2148840"/>
+            <a:ext cx="10927080" cy="0"/>
           </a:xfrm>
           <a:prstGeom prst="line">
             <a:avLst/>
           </a:prstGeom>
           <a:noFill/>
-          <a:ln w="19050">
+          <a:ln w="25400">
             <a:solidFill>
               <a:schemeClr val="accent6"/>
             </a:solidFill>
             <a:prstDash val="solid"/>
-            <a:tailEnd type="triangle"/>
           </a:ln>
         </p:spPr>
       </p:sp>
       <p:sp>
         <p:nvSpPr>
-          <p:cNvPr id="6" name="box-272"/>
-          <p:cNvSpPr/>
-          <p:nvPr/>
-        </p:nvSpPr>
-        <p:spPr>
-          <a:xfrm>
-            <a:off x="2423160" y="1417320"/>
-            <a:ext cx="1691640" cy="1280160"/>
-          </a:xfrm>
-          <a:prstGeom prst="roundRect">
-            <a:avLst>
-              <a:gd name="adj" fmla="val 8571"/>
-            </a:avLst>
+          <p:cNvPr id="4" name="mark-292"/>
+          <p:cNvSpPr/>
+          <p:nvPr/>
+        </p:nvSpPr>
+        <p:spPr>
+          <a:xfrm>
+            <a:off x="557784" y="2020824"/>
+            <a:ext cx="256032" cy="256032"/>
+          </a:xfrm>
+          <a:prstGeom prst="ellipse">
+            <a:avLst/>
+          </a:prstGeom>
+          <a:solidFill>
+            <a:schemeClr val="accent5"/>
+          </a:solidFill>
+          <a:ln/>
+        </p:spPr>
+      </p:sp>
+      <p:sp>
+        <p:nvSpPr>
+          <p:cNvPr id="5" name="text-293"/>
+          <p:cNvSpPr txBox="1"/>
+          <p:nvPr/>
+        </p:nvSpPr>
+        <p:spPr>
+          <a:xfrm>
+            <a:off x="548640" y="1417320"/>
+            <a:ext cx="2377440" cy="457200"/>
+          </a:xfrm>
+          <a:prstGeom prst="rect">
+            <a:avLst/>
+          </a:prstGeom>
+          <a:noFill/>
+          <a:ln/>
+        </p:spPr>
+        <p:txBody>
+          <a:bodyPr wrap="square" lIns="0" tIns="0" rIns="0" bIns="0" rtlCol="0" anchor="ctr"/>
+          <a:lstStyle/>
+          <a:p>
+            <a:pPr algn="l" indent="0" marL="0">
+              <a:buNone/>
+            </a:pPr>
+            <a:r>
+              <a:rPr lang="en-US" sz="1600" b="1" dirty="0">
+                <a:solidFill>
+                  <a:schemeClr val="tx1"/>
+                </a:solidFill>
+              </a:rPr>
+              <a:t>0 s</a:t>
+            </a:r>
+            <a:endParaRPr lang="en-US" sz="1600" dirty="0"/>
+          </a:p>
+        </p:txBody>
+      </p:sp>
+      <p:sp>
+        <p:nvSpPr>
+          <p:cNvPr id="6" name="text-294"/>
+          <p:cNvSpPr txBox="1"/>
+          <p:nvPr/>
+        </p:nvSpPr>
+        <p:spPr>
+          <a:xfrm>
+            <a:off x="548640" y="2423160"/>
+            <a:ext cx="2651760" cy="731520"/>
+          </a:xfrm>
+          <a:prstGeom prst="rect">
+            <a:avLst/>
+          </a:prstGeom>
+          <a:noFill/>
+          <a:ln/>
+        </p:spPr>
+        <p:txBody>
+          <a:bodyPr wrap="square" lIns="0" tIns="0" rIns="0" bIns="0" rtlCol="0" anchor="t"/>
+          <a:lstStyle/>
+          <a:p>
+            <a:pPr algn="l" indent="0" marL="0">
+              <a:buNone/>
+            </a:pPr>
+            <a:r>
+              <a:rPr lang="en-US" sz="1300" dirty="0">
+                <a:solidFill>
+                  <a:schemeClr val="tx1"/>
+                </a:solidFill>
+              </a:rPr>
+              <a:t>El usuario reserva y ve la confirmación</a:t>
+            </a:r>
+            <a:endParaRPr lang="en-US" sz="1300" dirty="0"/>
+          </a:p>
+        </p:txBody>
+      </p:sp>
+      <p:sp>
+        <p:nvSpPr>
+          <p:cNvPr id="7" name="mark-295"/>
+          <p:cNvSpPr/>
+          <p:nvPr/>
+        </p:nvSpPr>
+        <p:spPr>
+          <a:xfrm>
+            <a:off x="3392424" y="2020824"/>
+            <a:ext cx="256032" cy="256032"/>
+          </a:xfrm>
+          <a:prstGeom prst="ellipse">
+            <a:avLst/>
           </a:prstGeom>
           <a:solidFill>
             <a:schemeClr val="accent1"/>
@@ -5026,49 +5196,163 @@
       </p:sp>
       <p:sp>
         <p:nvSpPr>
-          <p:cNvPr id="7" name="label-273"/>
-          <p:cNvSpPr txBox="1"/>
-          <p:nvPr/>
-        </p:nvSpPr>
-        <p:spPr>
-          <a:xfrm>
-            <a:off x="2423160" y="1417320"/>
-            <a:ext cx="1691640" cy="1280160"/>
-          </a:xfrm>
-          <a:prstGeom prst="rect">
-            <a:avLst/>
-          </a:prstGeom>
-          <a:noFill/>
-          <a:ln/>
-        </p:spPr>
-        <p:txBody>
-          <a:bodyPr wrap="square" lIns="762" tIns="762" rIns="762" bIns="762" rtlCol="0" anchor="ctr"/>
-          <a:lstStyle/>
-          <a:p>
-            <a:pPr algn="ctr" indent="0" marL="0">
-              <a:buNone/>
-            </a:pPr>
-            <a:r>
-              <a:rPr lang="en-US" sz="1300" b="1" dirty="0">
-                <a:solidFill>
-                  <a:schemeClr val="bg1"/>
-                </a:solidFill>
-              </a:rPr>
-              <a:t>Espera 1 s</a:t>
+          <p:cNvPr id="8" name="text-296"/>
+          <p:cNvSpPr txBox="1"/>
+          <p:nvPr/>
+        </p:nvSpPr>
+        <p:spPr>
+          <a:xfrm>
+            <a:off x="3383280" y="1417320"/>
+            <a:ext cx="2377440" cy="457200"/>
+          </a:xfrm>
+          <a:prstGeom prst="rect">
+            <a:avLst/>
+          </a:prstGeom>
+          <a:noFill/>
+          <a:ln/>
+        </p:spPr>
+        <p:txBody>
+          <a:bodyPr wrap="square" lIns="0" tIns="0" rIns="0" bIns="0" rtlCol="0" anchor="ctr"/>
+          <a:lstStyle/>
+          <a:p>
+            <a:pPr algn="l" indent="0" marL="0">
+              <a:buNone/>
+            </a:pPr>
+            <a:r>
+              <a:rPr lang="en-US" sz="1600" b="1" dirty="0">
+                <a:solidFill>
+                  <a:schemeClr val="tx1"/>
+                </a:solidFill>
+              </a:rPr>
+              <a:t>milisegundos</a:t>
+            </a:r>
+            <a:endParaRPr lang="en-US" sz="1600" dirty="0"/>
+          </a:p>
+        </p:txBody>
+      </p:sp>
+      <p:sp>
+        <p:nvSpPr>
+          <p:cNvPr id="9" name="text-297"/>
+          <p:cNvSpPr txBox="1"/>
+          <p:nvPr/>
+        </p:nvSpPr>
+        <p:spPr>
+          <a:xfrm>
+            <a:off x="3383280" y="2423160"/>
+            <a:ext cx="2651760" cy="731520"/>
+          </a:xfrm>
+          <a:prstGeom prst="rect">
+            <a:avLst/>
+          </a:prstGeom>
+          <a:noFill/>
+          <a:ln/>
+        </p:spPr>
+        <p:txBody>
+          <a:bodyPr wrap="square" lIns="0" tIns="0" rIns="0" bIns="0" rtlCol="0" anchor="t"/>
+          <a:lstStyle/>
+          <a:p>
+            <a:pPr algn="l" indent="0" marL="0">
+              <a:buNone/>
+            </a:pPr>
+            <a:r>
+              <a:rPr lang="en-US" sz="1300" dirty="0">
+                <a:solidFill>
+                  <a:schemeClr val="tx1"/>
+                </a:solidFill>
+              </a:rPr>
+              <a:t>RabbitMQ entrega a ms-notificaciones</a:t>
             </a:r>
             <a:endParaRPr lang="en-US" sz="1300" dirty="0"/>
           </a:p>
-          <a:p>
-            <a:pPr algn="ctr" indent="0" marL="0">
+        </p:txBody>
+      </p:sp>
+      <p:sp>
+        <p:nvSpPr>
+          <p:cNvPr id="10" name="mark-298"/>
+          <p:cNvSpPr/>
+          <p:nvPr/>
+        </p:nvSpPr>
+        <p:spPr>
+          <a:xfrm>
+            <a:off x="6227064" y="2020824"/>
+            <a:ext cx="256032" cy="256032"/>
+          </a:xfrm>
+          <a:prstGeom prst="ellipse">
+            <a:avLst/>
+          </a:prstGeom>
+          <a:solidFill>
+            <a:schemeClr val="accent5"/>
+          </a:solidFill>
+          <a:ln/>
+        </p:spPr>
+      </p:sp>
+      <p:sp>
+        <p:nvSpPr>
+          <p:cNvPr id="11" name="text-299"/>
+          <p:cNvSpPr txBox="1"/>
+          <p:nvPr/>
+        </p:nvSpPr>
+        <p:spPr>
+          <a:xfrm>
+            <a:off x="6217920" y="1417320"/>
+            <a:ext cx="2377440" cy="457200"/>
+          </a:xfrm>
+          <a:prstGeom prst="rect">
+            <a:avLst/>
+          </a:prstGeom>
+          <a:noFill/>
+          <a:ln/>
+        </p:spPr>
+        <p:txBody>
+          <a:bodyPr wrap="square" lIns="0" tIns="0" rIns="0" bIns="0" rtlCol="0" anchor="ctr"/>
+          <a:lstStyle/>
+          <a:p>
+            <a:pPr algn="l" indent="0" marL="0">
+              <a:buNone/>
+            </a:pPr>
+            <a:r>
+              <a:rPr lang="en-US" sz="1600" b="1" dirty="0">
+                <a:solidFill>
+                  <a:schemeClr val="tx1"/>
+                </a:solidFill>
+              </a:rPr>
+              <a:t>1,5 s</a:t>
+            </a:r>
+            <a:endParaRPr lang="en-US" sz="1600" dirty="0"/>
+          </a:p>
+        </p:txBody>
+      </p:sp>
+      <p:sp>
+        <p:nvSpPr>
+          <p:cNvPr id="12" name="text-300"/>
+          <p:cNvSpPr txBox="1"/>
+          <p:nvPr/>
+        </p:nvSpPr>
+        <p:spPr>
+          <a:xfrm>
+            <a:off x="6217920" y="2423160"/>
+            <a:ext cx="2651760" cy="731520"/>
+          </a:xfrm>
+          <a:prstGeom prst="rect">
+            <a:avLst/>
+          </a:prstGeom>
+          <a:noFill/>
+          <a:ln/>
+        </p:spPr>
+        <p:txBody>
+          <a:bodyPr wrap="square" lIns="0" tIns="0" rIns="0" bIns="0" rtlCol="0" anchor="t"/>
+          <a:lstStyle/>
+          <a:p>
+            <a:pPr algn="l" indent="0" marL="0">
               <a:buNone/>
             </a:pPr>
             <a:r>
               <a:rPr lang="en-US" sz="1300" dirty="0">
                 <a:solidFill>
-                  <a:schemeClr val="bg1"/>
-                </a:solidFill>
-              </a:rPr>
-              <a:t>intento 2</a:t>
+                  <a:schemeClr val="tx1"/>
+                </a:solidFill>
+              </a:rPr>
+              <a:t>La campana se recarga sola</a:t>
             </a:r>
             <a:endParaRPr lang="en-US" sz="1300" dirty="0"/>
           </a:p>
@@ -5076,43 +5360,407 @@
       </p:sp>
       <p:sp>
         <p:nvSpPr>
-          <p:cNvPr id="8" name="arrow-274"/>
-          <p:cNvSpPr/>
-          <p:nvPr/>
-        </p:nvSpPr>
-        <p:spPr>
-          <a:xfrm>
-            <a:off x="4114800" y="2057400"/>
-            <a:ext cx="182880" cy="914"/>
-          </a:xfrm>
-          <a:prstGeom prst="line">
-            <a:avLst/>
-          </a:prstGeom>
-          <a:noFill/>
-          <a:ln w="19050">
-            <a:solidFill>
-              <a:schemeClr val="accent6"/>
-            </a:solidFill>
-            <a:prstDash val="solid"/>
-            <a:tailEnd type="triangle"/>
-          </a:ln>
-        </p:spPr>
-      </p:sp>
-      <p:sp>
-        <p:nvSpPr>
-          <p:cNvPr id="9" name="box-275"/>
-          <p:cNvSpPr/>
-          <p:nvPr/>
-        </p:nvSpPr>
-        <p:spPr>
-          <a:xfrm>
-            <a:off x="4297680" y="1417320"/>
-            <a:ext cx="1691640" cy="1280160"/>
+          <p:cNvPr id="13" name="mark-301"/>
+          <p:cNvSpPr/>
+          <p:nvPr/>
+        </p:nvSpPr>
+        <p:spPr>
+          <a:xfrm>
+            <a:off x="9061704" y="2020824"/>
+            <a:ext cx="256032" cy="256032"/>
+          </a:xfrm>
+          <a:prstGeom prst="ellipse">
+            <a:avLst/>
+          </a:prstGeom>
+          <a:solidFill>
+            <a:schemeClr val="accent5"/>
+          </a:solidFill>
+          <a:ln/>
+        </p:spPr>
+      </p:sp>
+      <p:sp>
+        <p:nvSpPr>
+          <p:cNvPr id="14" name="text-302"/>
+          <p:cNvSpPr txBox="1"/>
+          <p:nvPr/>
+        </p:nvSpPr>
+        <p:spPr>
+          <a:xfrm>
+            <a:off x="9052560" y="1417320"/>
+            <a:ext cx="2377440" cy="457200"/>
+          </a:xfrm>
+          <a:prstGeom prst="rect">
+            <a:avLst/>
+          </a:prstGeom>
+          <a:noFill/>
+          <a:ln/>
+        </p:spPr>
+        <p:txBody>
+          <a:bodyPr wrap="square" lIns="0" tIns="0" rIns="0" bIns="0" rtlCol="0" anchor="ctr"/>
+          <a:lstStyle/>
+          <a:p>
+            <a:pPr algn="l" indent="0" marL="0">
+              <a:buNone/>
+            </a:pPr>
+            <a:r>
+              <a:rPr lang="en-US" sz="1600" b="1" dirty="0">
+                <a:solidFill>
+                  <a:schemeClr val="tx1"/>
+                </a:solidFill>
+              </a:rPr>
+              <a:t>cada 30 s</a:t>
+            </a:r>
+            <a:endParaRPr lang="en-US" sz="1600" dirty="0"/>
+          </a:p>
+        </p:txBody>
+      </p:sp>
+      <p:sp>
+        <p:nvSpPr>
+          <p:cNvPr id="15" name="text-303"/>
+          <p:cNvSpPr txBox="1"/>
+          <p:nvPr/>
+        </p:nvSpPr>
+        <p:spPr>
+          <a:xfrm>
+            <a:off x="9052560" y="2423160"/>
+            <a:ext cx="2651760" cy="731520"/>
+          </a:xfrm>
+          <a:prstGeom prst="rect">
+            <a:avLst/>
+          </a:prstGeom>
+          <a:noFill/>
+          <a:ln/>
+        </p:spPr>
+        <p:txBody>
+          <a:bodyPr wrap="square" lIns="0" tIns="0" rIns="0" bIns="0" rtlCol="0" anchor="t"/>
+          <a:lstStyle/>
+          <a:p>
+            <a:pPr algn="l" indent="0" marL="0">
+              <a:buNone/>
+            </a:pPr>
+            <a:r>
+              <a:rPr lang="en-US" sz="1300" dirty="0">
+                <a:solidFill>
+                  <a:schemeClr val="tx1"/>
+                </a:solidFill>
+              </a:rPr>
+              <a:t>La campana vuelve a consultar</a:t>
+            </a:r>
+            <a:endParaRPr lang="en-US" sz="1300" dirty="0"/>
+          </a:p>
+        </p:txBody>
+      </p:sp>
+      <p:sp>
+        <p:nvSpPr>
+          <p:cNvPr id="16" name="box-304"/>
+          <p:cNvSpPr/>
+          <p:nvPr/>
+        </p:nvSpPr>
+        <p:spPr>
+          <a:xfrm>
+            <a:off x="548640" y="3429000"/>
+            <a:ext cx="3520440" cy="2011680"/>
           </a:xfrm>
           <a:prstGeom prst="roundRect">
             <a:avLst>
-              <a:gd name="adj" fmla="val 8571"/>
+              <a:gd name="adj" fmla="val 5455"/>
             </a:avLst>
+          </a:prstGeom>
+          <a:solidFill>
+            <a:schemeClr val="bg2"/>
+          </a:solidFill>
+          <a:ln/>
+        </p:spPr>
+      </p:sp>
+      <p:sp>
+        <p:nvSpPr>
+          <p:cNvPr id="17" name="circle-305"/>
+          <p:cNvSpPr/>
+          <p:nvPr/>
+        </p:nvSpPr>
+        <p:spPr>
+          <a:xfrm>
+            <a:off x="822960" y="3657600"/>
+            <a:ext cx="548640" cy="548640"/>
+          </a:xfrm>
+          <a:prstGeom prst="ellipse">
+            <a:avLst/>
+          </a:prstGeom>
+          <a:solidFill>
+            <a:schemeClr val="accent5"/>
+          </a:solidFill>
+          <a:ln/>
+        </p:spPr>
+      </p:sp>
+      <p:pic>
+        <p:nvPicPr>
+          <p:cNvPr id="18" name="icon-306" descr="preencoded.png">    </p:cNvPr>
+          <p:cNvPicPr>
+            <a:picLocks noChangeAspect="1"/>
+          </p:cNvPicPr>
+          <p:nvPr/>
+        </p:nvPicPr>
+        <p:blipFill>
+          <a:blip r:embed="rId1"/>
+          <a:stretch>
+            <a:fillRect/>
+          </a:stretch>
+        </p:blipFill>
+        <p:spPr>
+          <a:xfrm>
+            <a:off x="960120" y="3794760"/>
+            <a:ext cx="274320" cy="274320"/>
+          </a:xfrm>
+          <a:prstGeom prst="rect">
+            <a:avLst/>
+          </a:prstGeom>
+        </p:spPr>
+      </p:pic>
+      <p:sp>
+        <p:nvSpPr>
+          <p:cNvPr id="19" name="text-307"/>
+          <p:cNvSpPr txBox="1"/>
+          <p:nvPr/>
+        </p:nvSpPr>
+        <p:spPr>
+          <a:xfrm>
+            <a:off x="1508760" y="3657600"/>
+            <a:ext cx="2423160" cy="548640"/>
+          </a:xfrm>
+          <a:prstGeom prst="rect">
+            <a:avLst/>
+          </a:prstGeom>
+          <a:noFill/>
+          <a:ln/>
+        </p:spPr>
+        <p:txBody>
+          <a:bodyPr wrap="square" lIns="0" tIns="0" rIns="0" bIns="0" rtlCol="0" anchor="ctr"/>
+          <a:lstStyle/>
+          <a:p>
+            <a:pPr algn="l" indent="0" marL="0">
+              <a:buNone/>
+            </a:pPr>
+            <a:r>
+              <a:rPr lang="en-US" sz="1600" b="1" dirty="0">
+                <a:solidFill>
+                  <a:schemeClr val="tx1"/>
+                </a:solidFill>
+              </a:rPr>
+              <a:t>La campana</a:t>
+            </a:r>
+            <a:endParaRPr lang="en-US" sz="1600" dirty="0"/>
+          </a:p>
+        </p:txBody>
+      </p:sp>
+      <p:sp>
+        <p:nvSpPr>
+          <p:cNvPr id="20" name="text-308"/>
+          <p:cNvSpPr txBox="1"/>
+          <p:nvPr/>
+        </p:nvSpPr>
+        <p:spPr>
+          <a:xfrm>
+            <a:off x="822960" y="4389120"/>
+            <a:ext cx="3017520" cy="1645920"/>
+          </a:xfrm>
+          <a:prstGeom prst="rect">
+            <a:avLst/>
+          </a:prstGeom>
+          <a:noFill/>
+          <a:ln/>
+        </p:spPr>
+        <p:txBody>
+          <a:bodyPr wrap="square" lIns="0" tIns="0" rIns="0" bIns="0" rtlCol="0" anchor="t"/>
+          <a:lstStyle/>
+          <a:p>
+            <a:pPr algn="l" indent="0" marL="0">
+              <a:buNone/>
+            </a:pPr>
+            <a:r>
+              <a:rPr lang="en-US" sz="1400" dirty="0">
+                <a:solidFill>
+                  <a:schemeClr val="tx1"/>
+                </a:solidFill>
+              </a:rPr>
+              <a:t>Muestra cuántos avisos hay sin leer y permite marcarlos como leídos.</a:t>
+            </a:r>
+            <a:endParaRPr lang="en-US" sz="1400" dirty="0"/>
+          </a:p>
+        </p:txBody>
+      </p:sp>
+      <p:sp>
+        <p:nvSpPr>
+          <p:cNvPr id="21" name="box-309"/>
+          <p:cNvSpPr/>
+          <p:nvPr/>
+        </p:nvSpPr>
+        <p:spPr>
+          <a:xfrm>
+            <a:off x="4320540" y="3429000"/>
+            <a:ext cx="3520440" cy="2011680"/>
+          </a:xfrm>
+          <a:prstGeom prst="roundRect">
+            <a:avLst>
+              <a:gd name="adj" fmla="val 5455"/>
+            </a:avLst>
+          </a:prstGeom>
+          <a:solidFill>
+            <a:schemeClr val="bg2"/>
+          </a:solidFill>
+          <a:ln/>
+        </p:spPr>
+      </p:sp>
+      <p:sp>
+        <p:nvSpPr>
+          <p:cNvPr id="22" name="circle-310"/>
+          <p:cNvSpPr/>
+          <p:nvPr/>
+        </p:nvSpPr>
+        <p:spPr>
+          <a:xfrm>
+            <a:off x="4594860" y="3657600"/>
+            <a:ext cx="548640" cy="548640"/>
+          </a:xfrm>
+          <a:prstGeom prst="ellipse">
+            <a:avLst/>
+          </a:prstGeom>
+          <a:solidFill>
+            <a:schemeClr val="accent5"/>
+          </a:solidFill>
+          <a:ln/>
+        </p:spPr>
+      </p:sp>
+      <p:pic>
+        <p:nvPicPr>
+          <p:cNvPr id="23" name="icon-311" descr="preencoded.png">    </p:cNvPr>
+          <p:cNvPicPr>
+            <a:picLocks noChangeAspect="1"/>
+          </p:cNvPicPr>
+          <p:nvPr/>
+        </p:nvPicPr>
+        <p:blipFill>
+          <a:blip r:embed="rId2"/>
+          <a:stretch>
+            <a:fillRect/>
+          </a:stretch>
+        </p:blipFill>
+        <p:spPr>
+          <a:xfrm>
+            <a:off x="4732020" y="3794760"/>
+            <a:ext cx="274320" cy="274320"/>
+          </a:xfrm>
+          <a:prstGeom prst="rect">
+            <a:avLst/>
+          </a:prstGeom>
+        </p:spPr>
+      </p:pic>
+      <p:sp>
+        <p:nvSpPr>
+          <p:cNvPr id="24" name="text-312"/>
+          <p:cNvSpPr txBox="1"/>
+          <p:nvPr/>
+        </p:nvSpPr>
+        <p:spPr>
+          <a:xfrm>
+            <a:off x="5280660" y="3657600"/>
+            <a:ext cx="2423160" cy="548640"/>
+          </a:xfrm>
+          <a:prstGeom prst="rect">
+            <a:avLst/>
+          </a:prstGeom>
+          <a:noFill/>
+          <a:ln/>
+        </p:spPr>
+        <p:txBody>
+          <a:bodyPr wrap="square" lIns="0" tIns="0" rIns="0" bIns="0" rtlCol="0" anchor="ctr"/>
+          <a:lstStyle/>
+          <a:p>
+            <a:pPr algn="l" indent="0" marL="0">
+              <a:buNone/>
+            </a:pPr>
+            <a:r>
+              <a:rPr lang="en-US" sz="1600" b="1" dirty="0">
+                <a:solidFill>
+                  <a:schemeClr val="tx1"/>
+                </a:solidFill>
+              </a:rPr>
+              <a:t>Ahorra consultas</a:t>
+            </a:r>
+            <a:endParaRPr lang="en-US" sz="1600" dirty="0"/>
+          </a:p>
+        </p:txBody>
+      </p:sp>
+      <p:sp>
+        <p:nvSpPr>
+          <p:cNvPr id="25" name="text-313"/>
+          <p:cNvSpPr txBox="1"/>
+          <p:nvPr/>
+        </p:nvSpPr>
+        <p:spPr>
+          <a:xfrm>
+            <a:off x="4594860" y="4389120"/>
+            <a:ext cx="3017520" cy="1645920"/>
+          </a:xfrm>
+          <a:prstGeom prst="rect">
+            <a:avLst/>
+          </a:prstGeom>
+          <a:noFill/>
+          <a:ln/>
+        </p:spPr>
+        <p:txBody>
+          <a:bodyPr wrap="square" lIns="0" tIns="0" rIns="0" bIns="0" rtlCol="0" anchor="t"/>
+          <a:lstStyle/>
+          <a:p>
+            <a:pPr algn="l" indent="0" marL="0">
+              <a:buNone/>
+            </a:pPr>
+            <a:r>
+              <a:rPr lang="en-US" sz="1400" dirty="0">
+                <a:solidFill>
+                  <a:schemeClr val="tx1"/>
+                </a:solidFill>
+              </a:rPr>
+              <a:t>Si la pestaña está en segundo plano no consulta, y recarga al volver.</a:t>
+            </a:r>
+            <a:endParaRPr lang="en-US" sz="1400" dirty="0"/>
+          </a:p>
+        </p:txBody>
+      </p:sp>
+      <p:sp>
+        <p:nvSpPr>
+          <p:cNvPr id="26" name="box-314"/>
+          <p:cNvSpPr/>
+          <p:nvPr/>
+        </p:nvSpPr>
+        <p:spPr>
+          <a:xfrm>
+            <a:off x="8092440" y="3429000"/>
+            <a:ext cx="3520440" cy="2011680"/>
+          </a:xfrm>
+          <a:prstGeom prst="roundRect">
+            <a:avLst>
+              <a:gd name="adj" fmla="val 5455"/>
+            </a:avLst>
+          </a:prstGeom>
+          <a:solidFill>
+            <a:schemeClr val="bg2"/>
+          </a:solidFill>
+          <a:ln/>
+        </p:spPr>
+      </p:sp>
+      <p:sp>
+        <p:nvSpPr>
+          <p:cNvPr id="27" name="circle-315"/>
+          <p:cNvSpPr/>
+          <p:nvPr/>
+        </p:nvSpPr>
+        <p:spPr>
+          <a:xfrm>
+            <a:off x="8366760" y="3657600"/>
+            <a:ext cx="548640" cy="548640"/>
+          </a:xfrm>
+          <a:prstGeom prst="ellipse">
+            <a:avLst/>
           </a:prstGeom>
           <a:solidFill>
             <a:schemeClr val="accent1"/>
@@ -5120,376 +5768,76 @@
           <a:ln/>
         </p:spPr>
       </p:sp>
-      <p:sp>
-        <p:nvSpPr>
-          <p:cNvPr id="10" name="label-276"/>
-          <p:cNvSpPr txBox="1"/>
-          <p:nvPr/>
-        </p:nvSpPr>
-        <p:spPr>
-          <a:xfrm>
-            <a:off x="4297680" y="1417320"/>
-            <a:ext cx="1691640" cy="1280160"/>
-          </a:xfrm>
-          <a:prstGeom prst="rect">
-            <a:avLst/>
-          </a:prstGeom>
-          <a:noFill/>
-          <a:ln/>
-        </p:spPr>
-        <p:txBody>
-          <a:bodyPr wrap="square" lIns="762" tIns="762" rIns="762" bIns="762" rtlCol="0" anchor="ctr"/>
-          <a:lstStyle/>
-          <a:p>
-            <a:pPr algn="ctr" indent="0" marL="0">
-              <a:buNone/>
-            </a:pPr>
-            <a:r>
-              <a:rPr lang="en-US" sz="1300" b="1" dirty="0">
-                <a:solidFill>
-                  <a:schemeClr val="bg1"/>
-                </a:solidFill>
-              </a:rPr>
-              <a:t>Espera 2 s</a:t>
-            </a:r>
-            <a:endParaRPr lang="en-US" sz="1300" dirty="0"/>
-          </a:p>
-          <a:p>
-            <a:pPr algn="ctr" indent="0" marL="0">
-              <a:buNone/>
-            </a:pPr>
-            <a:r>
-              <a:rPr lang="en-US" sz="1300" dirty="0">
-                <a:solidFill>
-                  <a:schemeClr val="bg1"/>
-                </a:solidFill>
-              </a:rPr>
-              <a:t>intento 3</a:t>
-            </a:r>
-            <a:endParaRPr lang="en-US" sz="1300" dirty="0"/>
-          </a:p>
-        </p:txBody>
-      </p:sp>
-      <p:sp>
-        <p:nvSpPr>
-          <p:cNvPr id="11" name="arrow-277"/>
-          <p:cNvSpPr/>
-          <p:nvPr/>
-        </p:nvSpPr>
-        <p:spPr>
-          <a:xfrm>
-            <a:off x="5989320" y="2057400"/>
-            <a:ext cx="182880" cy="914"/>
-          </a:xfrm>
-          <a:prstGeom prst="line">
-            <a:avLst/>
-          </a:prstGeom>
-          <a:noFill/>
-          <a:ln w="19050">
-            <a:solidFill>
-              <a:schemeClr val="accent6"/>
-            </a:solidFill>
-            <a:prstDash val="solid"/>
-            <a:tailEnd type="triangle"/>
-          </a:ln>
-        </p:spPr>
-      </p:sp>
-      <p:sp>
-        <p:nvSpPr>
-          <p:cNvPr id="12" name="box-278"/>
-          <p:cNvSpPr/>
-          <p:nvPr/>
-        </p:nvSpPr>
-        <p:spPr>
-          <a:xfrm>
-            <a:off x="6172200" y="1417320"/>
-            <a:ext cx="1691640" cy="1280160"/>
-          </a:xfrm>
-          <a:prstGeom prst="roundRect">
-            <a:avLst>
-              <a:gd name="adj" fmla="val 8571"/>
-            </a:avLst>
-          </a:prstGeom>
-          <a:solidFill>
-            <a:schemeClr val="accent1"/>
-          </a:solidFill>
-          <a:ln/>
-        </p:spPr>
-      </p:sp>
-      <p:sp>
-        <p:nvSpPr>
-          <p:cNvPr id="13" name="label-279"/>
-          <p:cNvSpPr txBox="1"/>
-          <p:nvPr/>
-        </p:nvSpPr>
-        <p:spPr>
-          <a:xfrm>
-            <a:off x="6172200" y="1417320"/>
-            <a:ext cx="1691640" cy="1280160"/>
-          </a:xfrm>
-          <a:prstGeom prst="rect">
-            <a:avLst/>
-          </a:prstGeom>
-          <a:noFill/>
-          <a:ln/>
-        </p:spPr>
-        <p:txBody>
-          <a:bodyPr wrap="square" lIns="762" tIns="762" rIns="762" bIns="762" rtlCol="0" anchor="ctr"/>
-          <a:lstStyle/>
-          <a:p>
-            <a:pPr algn="ctr" indent="0" marL="0">
-              <a:buNone/>
-            </a:pPr>
-            <a:r>
-              <a:rPr lang="en-US" sz="1300" b="1" dirty="0">
-                <a:solidFill>
-                  <a:schemeClr val="bg1"/>
-                </a:solidFill>
-              </a:rPr>
-              <a:t>Espera 4 s</a:t>
-            </a:r>
-            <a:endParaRPr lang="en-US" sz="1300" dirty="0"/>
-          </a:p>
-          <a:p>
-            <a:pPr algn="ctr" indent="0" marL="0">
-              <a:buNone/>
-            </a:pPr>
-            <a:r>
-              <a:rPr lang="en-US" sz="1300" dirty="0">
-                <a:solidFill>
-                  <a:schemeClr val="bg1"/>
-                </a:solidFill>
-              </a:rPr>
-              <a:t>intento 4</a:t>
-            </a:r>
-            <a:endParaRPr lang="en-US" sz="1300" dirty="0"/>
-          </a:p>
-        </p:txBody>
-      </p:sp>
-      <p:sp>
-        <p:nvSpPr>
-          <p:cNvPr id="14" name="arrow-280"/>
-          <p:cNvSpPr/>
-          <p:nvPr/>
-        </p:nvSpPr>
-        <p:spPr>
-          <a:xfrm>
-            <a:off x="7863840" y="2057400"/>
-            <a:ext cx="182880" cy="914"/>
-          </a:xfrm>
-          <a:prstGeom prst="line">
-            <a:avLst/>
-          </a:prstGeom>
-          <a:noFill/>
-          <a:ln w="19050">
-            <a:solidFill>
-              <a:schemeClr val="accent6"/>
-            </a:solidFill>
-            <a:prstDash val="solid"/>
-            <a:tailEnd type="triangle"/>
-          </a:ln>
-        </p:spPr>
-      </p:sp>
-      <p:sp>
-        <p:nvSpPr>
-          <p:cNvPr id="15" name="box-281"/>
-          <p:cNvSpPr/>
-          <p:nvPr/>
-        </p:nvSpPr>
-        <p:spPr>
-          <a:xfrm>
-            <a:off x="8046720" y="1417320"/>
-            <a:ext cx="1691640" cy="1280160"/>
-          </a:xfrm>
-          <a:prstGeom prst="roundRect">
-            <a:avLst>
-              <a:gd name="adj" fmla="val 8571"/>
-            </a:avLst>
-          </a:prstGeom>
-          <a:solidFill>
-            <a:schemeClr val="accent4"/>
-          </a:solidFill>
-          <a:ln/>
-        </p:spPr>
-      </p:sp>
-      <p:sp>
-        <p:nvSpPr>
-          <p:cNvPr id="16" name="label-282"/>
-          <p:cNvSpPr txBox="1"/>
-          <p:nvPr/>
-        </p:nvSpPr>
-        <p:spPr>
-          <a:xfrm>
-            <a:off x="8046720" y="1417320"/>
-            <a:ext cx="1691640" cy="1280160"/>
-          </a:xfrm>
-          <a:prstGeom prst="rect">
-            <a:avLst/>
-          </a:prstGeom>
-          <a:noFill/>
-          <a:ln/>
-        </p:spPr>
-        <p:txBody>
-          <a:bodyPr wrap="square" lIns="762" tIns="762" rIns="762" bIns="762" rtlCol="0" anchor="ctr"/>
-          <a:lstStyle/>
-          <a:p>
-            <a:pPr algn="ctr" indent="0" marL="0">
-              <a:buNone/>
-            </a:pPr>
-            <a:r>
-              <a:rPr lang="en-US" sz="1300" b="1" dirty="0">
-                <a:solidFill>
-                  <a:schemeClr val="bg1"/>
-                </a:solidFill>
-              </a:rPr>
-              <a:t>DeadLetter Recoverer</a:t>
-            </a:r>
-            <a:endParaRPr lang="en-US" sz="1300" dirty="0"/>
-          </a:p>
-          <a:p>
-            <a:pPr algn="ctr" indent="0" marL="0">
-              <a:buNone/>
-            </a:pPr>
-            <a:r>
-              <a:rPr lang="en-US" sz="1300" dirty="0">
-                <a:solidFill>
-                  <a:schemeClr val="bg1"/>
-                </a:solidFill>
-              </a:rPr>
-              <a:t>log.error + reject sin requeue</a:t>
-            </a:r>
-            <a:endParaRPr lang="en-US" sz="1300" dirty="0"/>
-          </a:p>
-        </p:txBody>
-      </p:sp>
-      <p:sp>
-        <p:nvSpPr>
-          <p:cNvPr id="17" name="arrow-283"/>
-          <p:cNvSpPr/>
-          <p:nvPr/>
-        </p:nvSpPr>
-        <p:spPr>
-          <a:xfrm>
-            <a:off x="9738360" y="2057400"/>
-            <a:ext cx="182880" cy="914"/>
-          </a:xfrm>
-          <a:prstGeom prst="line">
-            <a:avLst/>
-          </a:prstGeom>
-          <a:noFill/>
-          <a:ln w="19050">
-            <a:solidFill>
-              <a:schemeClr val="accent6"/>
-            </a:solidFill>
-            <a:prstDash val="solid"/>
-            <a:tailEnd type="triangle"/>
-          </a:ln>
-        </p:spPr>
-      </p:sp>
-      <p:sp>
-        <p:nvSpPr>
-          <p:cNvPr id="18" name="box-284"/>
-          <p:cNvSpPr/>
-          <p:nvPr/>
-        </p:nvSpPr>
-        <p:spPr>
-          <a:xfrm>
-            <a:off x="9921240" y="1417320"/>
-            <a:ext cx="1691640" cy="1280160"/>
-          </a:xfrm>
-          <a:prstGeom prst="roundRect">
-            <a:avLst>
-              <a:gd name="adj" fmla="val 8571"/>
-            </a:avLst>
-          </a:prstGeom>
-          <a:solidFill>
-            <a:schemeClr val="accent4"/>
-          </a:solidFill>
-          <a:ln/>
-        </p:spPr>
-      </p:sp>
-      <p:sp>
-        <p:nvSpPr>
-          <p:cNvPr id="19" name="label-285"/>
-          <p:cNvSpPr txBox="1"/>
-          <p:nvPr/>
-        </p:nvSpPr>
-        <p:spPr>
-          <a:xfrm>
-            <a:off x="9921240" y="1417320"/>
-            <a:ext cx="1691640" cy="1280160"/>
-          </a:xfrm>
-          <a:prstGeom prst="rect">
-            <a:avLst/>
-          </a:prstGeom>
-          <a:noFill/>
-          <a:ln/>
-        </p:spPr>
-        <p:txBody>
-          <a:bodyPr wrap="square" lIns="762" tIns="762" rIns="762" bIns="762" rtlCol="0" anchor="ctr"/>
-          <a:lstStyle/>
-          <a:p>
-            <a:pPr algn="ctr" indent="0" marL="0">
-              <a:buNone/>
-            </a:pPr>
-            <a:r>
-              <a:rPr lang="en-US" sz="1300" b="1" dirty="0">
-                <a:solidFill>
-                  <a:schemeClr val="bg1"/>
-                </a:solidFill>
-              </a:rPr>
-              <a:t>reservafit.dlx</a:t>
-            </a:r>
-            <a:endParaRPr lang="en-US" sz="1300" dirty="0"/>
-          </a:p>
-          <a:p>
-            <a:pPr algn="ctr" indent="0" marL="0">
-              <a:buNone/>
-            </a:pPr>
-            <a:r>
-              <a:rPr lang="en-US" sz="1300" dirty="0">
-                <a:solidFill>
-                  <a:schemeClr val="bg1"/>
-                </a:solidFill>
-              </a:rPr>
-              <a:t>→ &lt;cola&gt;.dlq</a:t>
-            </a:r>
-            <a:endParaRPr lang="en-US" sz="1300" dirty="0"/>
-          </a:p>
-        </p:txBody>
-      </p:sp>
-      <p:sp>
-        <p:nvSpPr>
-          <p:cNvPr id="20" name="box-286"/>
-          <p:cNvSpPr/>
-          <p:nvPr/>
-        </p:nvSpPr>
-        <p:spPr>
-          <a:xfrm>
-            <a:off x="548640" y="3017520"/>
-            <a:ext cx="5120640" cy="3063240"/>
-          </a:xfrm>
-          <a:prstGeom prst="roundRect">
-            <a:avLst>
-              <a:gd name="adj" fmla="val 2985"/>
-            </a:avLst>
-          </a:prstGeom>
-          <a:solidFill>
-            <a:schemeClr val="tx2"/>
-          </a:solidFill>
-          <a:ln/>
-        </p:spPr>
-      </p:sp>
-      <p:sp>
-        <p:nvSpPr>
-          <p:cNvPr id="21" name="code-287"/>
-          <p:cNvSpPr txBox="1"/>
-          <p:nvPr/>
-        </p:nvSpPr>
-        <p:spPr>
-          <a:xfrm>
-            <a:off x="777240" y="3154680"/>
-            <a:ext cx="4663440" cy="2788920"/>
+      <p:pic>
+        <p:nvPicPr>
+          <p:cNvPr id="28" name="icon-316" descr="preencoded.png">    </p:cNvPr>
+          <p:cNvPicPr>
+            <a:picLocks noChangeAspect="1"/>
+          </p:cNvPicPr>
+          <p:nvPr/>
+        </p:nvPicPr>
+        <p:blipFill>
+          <a:blip r:embed="rId3"/>
+          <a:stretch>
+            <a:fillRect/>
+          </a:stretch>
+        </p:blipFill>
+        <p:spPr>
+          <a:xfrm>
+            <a:off x="8503920" y="3794760"/>
+            <a:ext cx="274320" cy="274320"/>
+          </a:xfrm>
+          <a:prstGeom prst="rect">
+            <a:avLst/>
+          </a:prstGeom>
+        </p:spPr>
+      </p:pic>
+      <p:sp>
+        <p:nvSpPr>
+          <p:cNvPr id="29" name="text-317"/>
+          <p:cNvSpPr txBox="1"/>
+          <p:nvPr/>
+        </p:nvSpPr>
+        <p:spPr>
+          <a:xfrm>
+            <a:off x="9052560" y="3657600"/>
+            <a:ext cx="2423160" cy="548640"/>
+          </a:xfrm>
+          <a:prstGeom prst="rect">
+            <a:avLst/>
+          </a:prstGeom>
+          <a:noFill/>
+          <a:ln/>
+        </p:spPr>
+        <p:txBody>
+          <a:bodyPr wrap="square" lIns="0" tIns="0" rIns="0" bIns="0" rtlCol="0" anchor="ctr"/>
+          <a:lstStyle/>
+          <a:p>
+            <a:pPr algn="l" indent="0" marL="0">
+              <a:buNone/>
+            </a:pPr>
+            <a:r>
+              <a:rPr lang="en-US" sz="1600" b="1" dirty="0">
+                <a:solidFill>
+                  <a:schemeClr val="tx1"/>
+                </a:solidFill>
+              </a:rPr>
+              <a:t>Consistencia eventual</a:t>
+            </a:r>
+            <a:endParaRPr lang="en-US" sz="1600" dirty="0"/>
+          </a:p>
+        </p:txBody>
+      </p:sp>
+      <p:sp>
+        <p:nvSpPr>
+          <p:cNvPr id="30" name="text-318"/>
+          <p:cNvSpPr txBox="1"/>
+          <p:nvPr/>
+        </p:nvSpPr>
+        <p:spPr>
+          <a:xfrm>
+            <a:off x="8366760" y="4389120"/>
+            <a:ext cx="3017520" cy="1645920"/>
           </a:xfrm>
           <a:prstGeom prst="rect">
             <a:avLst/>
@@ -5501,427 +5849,16 @@
           <a:bodyPr wrap="square" lIns="0" tIns="0" rIns="0" bIns="0" rtlCol="0" anchor="t"/>
           <a:lstStyle/>
           <a:p>
-            <a:pPr indent="0" marL="0">
-              <a:buNone/>
-            </a:pPr>
-            <a:r>
-              <a:rPr lang="en-US" sz="1500" dirty="0">
-                <a:solidFill>
-                  <a:schemeClr val="accent6"/>
-                </a:solidFill>
-                <a:latin typeface="Courier New" pitchFamily="34" charset="0"/>
-                <a:ea typeface="Courier New" pitchFamily="34" charset="-122"/>
-                <a:cs typeface="Courier New" pitchFamily="34" charset="-120"/>
-              </a:rPr>
-              <a:t># ms-gimnasios y ms-notificaciones</a:t>
-            </a:r>
-            <a:pPr indent="0" marL="0">
-              <a:buNone/>
-            </a:pPr>
-            <a:endParaRPr lang="en-US" sz="1500" dirty="0"/>
-          </a:p>
-          <a:p>
-            <a:pPr indent="0" marL="0">
-              <a:buNone/>
-            </a:pPr>
-            <a:r>
-              <a:rPr lang="en-US" sz="1500" dirty="0">
-                <a:solidFill>
-                  <a:schemeClr val="bg2"/>
-                </a:solidFill>
-                <a:latin typeface="Courier New" pitchFamily="34" charset="0"/>
-                <a:ea typeface="Courier New" pitchFamily="34" charset="-122"/>
-                <a:cs typeface="Courier New" pitchFamily="34" charset="-120"/>
-              </a:rPr>
-              <a:t>spring.rabbitmq.listener.simple:</a:t>
-            </a:r>
-            <a:endParaRPr lang="en-US" sz="1500" dirty="0"/>
-          </a:p>
-          <a:p>
-            <a:pPr indent="0" marL="0">
-              <a:buNone/>
-            </a:pPr>
-            <a:r>
-              <a:rPr lang="en-US" sz="1500" dirty="0">
-                <a:solidFill>
-                  <a:schemeClr val="accent1"/>
-                </a:solidFill>
-                <a:latin typeface="Courier New" pitchFamily="34" charset="0"/>
-                <a:ea typeface="Courier New" pitchFamily="34" charset="-122"/>
-                <a:cs typeface="Courier New" pitchFamily="34" charset="-120"/>
-              </a:rPr>
-              <a:t>  default-requeue-rejected: </a:t>
-            </a:r>
-            <a:pPr indent="0" marL="0">
-              <a:buNone/>
-            </a:pPr>
-            <a:r>
-              <a:rPr lang="en-US" sz="1500" dirty="0">
-                <a:solidFill>
-                  <a:schemeClr val="bg2"/>
-                </a:solidFill>
-                <a:latin typeface="Courier New" pitchFamily="34" charset="0"/>
-                <a:ea typeface="Courier New" pitchFamily="34" charset="-122"/>
-                <a:cs typeface="Courier New" pitchFamily="34" charset="-120"/>
-              </a:rPr>
-              <a:t>false</a:t>
-            </a:r>
-            <a:endParaRPr lang="en-US" sz="1500" dirty="0"/>
-          </a:p>
-          <a:p>
-            <a:pPr indent="0" marL="0">
-              <a:buNone/>
-            </a:pPr>
-            <a:r>
-              <a:rPr lang="en-US" sz="1500" dirty="0">
-                <a:solidFill>
-                  <a:schemeClr val="bg2"/>
-                </a:solidFill>
-                <a:latin typeface="Courier New" pitchFamily="34" charset="0"/>
-                <a:ea typeface="Courier New" pitchFamily="34" charset="-122"/>
-                <a:cs typeface="Courier New" pitchFamily="34" charset="-120"/>
-              </a:rPr>
-              <a:t>  retry:</a:t>
-            </a:r>
-            <a:endParaRPr lang="en-US" sz="1500" dirty="0"/>
-          </a:p>
-          <a:p>
-            <a:pPr indent="0" marL="0">
-              <a:buNone/>
-            </a:pPr>
-            <a:r>
-              <a:rPr lang="en-US" sz="1500" dirty="0">
-                <a:solidFill>
-                  <a:schemeClr val="accent1"/>
-                </a:solidFill>
-                <a:latin typeface="Courier New" pitchFamily="34" charset="0"/>
-                <a:ea typeface="Courier New" pitchFamily="34" charset="-122"/>
-                <a:cs typeface="Courier New" pitchFamily="34" charset="-120"/>
-              </a:rPr>
-              <a:t>    enabled: </a:t>
-            </a:r>
-            <a:pPr indent="0" marL="0">
-              <a:buNone/>
-            </a:pPr>
-            <a:r>
-              <a:rPr lang="en-US" sz="1500" dirty="0">
-                <a:solidFill>
-                  <a:schemeClr val="bg2"/>
-                </a:solidFill>
-                <a:latin typeface="Courier New" pitchFamily="34" charset="0"/>
-                <a:ea typeface="Courier New" pitchFamily="34" charset="-122"/>
-                <a:cs typeface="Courier New" pitchFamily="34" charset="-120"/>
-              </a:rPr>
-              <a:t>true</a:t>
-            </a:r>
-            <a:endParaRPr lang="en-US" sz="1500" dirty="0"/>
-          </a:p>
-          <a:p>
-            <a:pPr indent="0" marL="0">
-              <a:buNone/>
-            </a:pPr>
-            <a:r>
-              <a:rPr lang="en-US" sz="1500" dirty="0">
-                <a:solidFill>
-                  <a:schemeClr val="accent1"/>
-                </a:solidFill>
-                <a:latin typeface="Courier New" pitchFamily="34" charset="0"/>
-                <a:ea typeface="Courier New" pitchFamily="34" charset="-122"/>
-                <a:cs typeface="Courier New" pitchFamily="34" charset="-120"/>
-              </a:rPr>
-              <a:t>    max-attempts: </a:t>
-            </a:r>
-            <a:pPr indent="0" marL="0">
-              <a:buNone/>
-            </a:pPr>
-            <a:r>
-              <a:rPr lang="en-US" sz="1500" dirty="0">
-                <a:solidFill>
-                  <a:schemeClr val="bg2"/>
-                </a:solidFill>
-                <a:latin typeface="Courier New" pitchFamily="34" charset="0"/>
-                <a:ea typeface="Courier New" pitchFamily="34" charset="-122"/>
-                <a:cs typeface="Courier New" pitchFamily="34" charset="-120"/>
-              </a:rPr>
-              <a:t>4</a:t>
-            </a:r>
-            <a:endParaRPr lang="en-US" sz="1500" dirty="0"/>
-          </a:p>
-          <a:p>
-            <a:pPr indent="0" marL="0">
-              <a:buNone/>
-            </a:pPr>
-            <a:r>
-              <a:rPr lang="en-US" sz="1500" dirty="0">
-                <a:solidFill>
-                  <a:schemeClr val="accent1"/>
-                </a:solidFill>
-                <a:latin typeface="Courier New" pitchFamily="34" charset="0"/>
-                <a:ea typeface="Courier New" pitchFamily="34" charset="-122"/>
-                <a:cs typeface="Courier New" pitchFamily="34" charset="-120"/>
-              </a:rPr>
-              <a:t>    initial-interval: </a:t>
-            </a:r>
-            <a:pPr indent="0" marL="0">
-              <a:buNone/>
-            </a:pPr>
-            <a:r>
-              <a:rPr lang="en-US" sz="1500" dirty="0">
-                <a:solidFill>
-                  <a:schemeClr val="bg2"/>
-                </a:solidFill>
-                <a:latin typeface="Courier New" pitchFamily="34" charset="0"/>
-                <a:ea typeface="Courier New" pitchFamily="34" charset="-122"/>
-                <a:cs typeface="Courier New" pitchFamily="34" charset="-120"/>
-              </a:rPr>
-              <a:t>1s</a:t>
-            </a:r>
-            <a:endParaRPr lang="en-US" sz="1500" dirty="0"/>
-          </a:p>
-          <a:p>
-            <a:pPr indent="0" marL="0">
-              <a:buNone/>
-            </a:pPr>
-            <a:r>
-              <a:rPr lang="en-US" sz="1500" dirty="0">
-                <a:solidFill>
-                  <a:schemeClr val="accent1"/>
-                </a:solidFill>
-                <a:latin typeface="Courier New" pitchFamily="34" charset="0"/>
-                <a:ea typeface="Courier New" pitchFamily="34" charset="-122"/>
-                <a:cs typeface="Courier New" pitchFamily="34" charset="-120"/>
-              </a:rPr>
-              <a:t>    multiplier: </a:t>
-            </a:r>
-            <a:pPr indent="0" marL="0">
-              <a:buNone/>
-            </a:pPr>
-            <a:r>
-              <a:rPr lang="en-US" sz="1500" dirty="0">
-                <a:solidFill>
-                  <a:schemeClr val="bg2"/>
-                </a:solidFill>
-                <a:latin typeface="Courier New" pitchFamily="34" charset="0"/>
-                <a:ea typeface="Courier New" pitchFamily="34" charset="-122"/>
-                <a:cs typeface="Courier New" pitchFamily="34" charset="-120"/>
-              </a:rPr>
-              <a:t>2</a:t>
-            </a:r>
-            <a:endParaRPr lang="en-US" sz="1500" dirty="0"/>
-          </a:p>
-        </p:txBody>
-      </p:sp>
-      <p:sp>
-        <p:nvSpPr>
-          <p:cNvPr id="22" name="text-288"/>
-          <p:cNvSpPr txBox="1"/>
-          <p:nvPr/>
-        </p:nvSpPr>
-        <p:spPr>
-          <a:xfrm>
-            <a:off x="6035040" y="3017520"/>
-            <a:ext cx="5577840" cy="365760"/>
-          </a:xfrm>
-          <a:prstGeom prst="rect">
-            <a:avLst/>
-          </a:prstGeom>
-          <a:noFill/>
-          <a:ln/>
-        </p:spPr>
-        <p:txBody>
-          <a:bodyPr wrap="square" lIns="0" tIns="0" rIns="0" bIns="0" rtlCol="0" anchor="ctr"/>
-          <a:lstStyle/>
-          <a:p>
             <a:pPr algn="l" indent="0" marL="0">
               <a:buNone/>
             </a:pPr>
             <a:r>
-              <a:rPr lang="en-US" sz="1600" b="1" dirty="0">
+              <a:rPr lang="en-US" sz="1400" dirty="0">
                 <a:solidFill>
                   <a:schemeClr val="tx1"/>
                 </a:solidFill>
               </a:rPr>
-              <a:t>Backoff exponencial</a:t>
-            </a:r>
-            <a:endParaRPr lang="en-US" sz="1600" dirty="0"/>
-          </a:p>
-        </p:txBody>
-      </p:sp>
-      <p:sp>
-        <p:nvSpPr>
-          <p:cNvPr id="23" name="text-289"/>
-          <p:cNvSpPr txBox="1"/>
-          <p:nvPr/>
-        </p:nvSpPr>
-        <p:spPr>
-          <a:xfrm>
-            <a:off x="6035040" y="3383280"/>
-            <a:ext cx="5577840" cy="640080"/>
-          </a:xfrm>
-          <a:prstGeom prst="rect">
-            <a:avLst/>
-          </a:prstGeom>
-          <a:noFill/>
-          <a:ln/>
-        </p:spPr>
-        <p:txBody>
-          <a:bodyPr wrap="square" lIns="0" tIns="0" rIns="0" bIns="0" rtlCol="0" anchor="t"/>
-          <a:lstStyle/>
-          <a:p>
-            <a:pPr algn="l" indent="0" marL="0">
-              <a:buNone/>
-            </a:pPr>
-            <a:r>
-              <a:rPr lang="en-US" sz="1400" dirty="0">
-                <a:solidFill>
-                  <a:schemeClr val="tx1"/>
-                </a:solidFill>
-              </a:rPr>
-              <a:t>Los reintentos se hacen en memoria, en el mismo consumidor: un error pasajero (la BD se demora) se resuelve solo.</a:t>
-            </a:r>
-            <a:endParaRPr lang="en-US" sz="1400" dirty="0"/>
-          </a:p>
-        </p:txBody>
-      </p:sp>
-      <p:sp>
-        <p:nvSpPr>
-          <p:cNvPr id="24" name="text-290"/>
-          <p:cNvSpPr txBox="1"/>
-          <p:nvPr/>
-        </p:nvSpPr>
-        <p:spPr>
-          <a:xfrm>
-            <a:off x="6035040" y="4069080"/>
-            <a:ext cx="5577840" cy="365760"/>
-          </a:xfrm>
-          <a:prstGeom prst="rect">
-            <a:avLst/>
-          </a:prstGeom>
-          <a:noFill/>
-          <a:ln/>
-        </p:spPr>
-        <p:txBody>
-          <a:bodyPr wrap="square" lIns="0" tIns="0" rIns="0" bIns="0" rtlCol="0" anchor="ctr"/>
-          <a:lstStyle/>
-          <a:p>
-            <a:pPr algn="l" indent="0" marL="0">
-              <a:buNone/>
-            </a:pPr>
-            <a:r>
-              <a:rPr lang="en-US" sz="1600" b="1" dirty="0">
-                <a:solidFill>
-                  <a:schemeClr val="tx1"/>
-                </a:solidFill>
-              </a:rPr>
-              <a:t>Sin requeue</a:t>
-            </a:r>
-            <a:endParaRPr lang="en-US" sz="1600" dirty="0"/>
-          </a:p>
-        </p:txBody>
-      </p:sp>
-      <p:sp>
-        <p:nvSpPr>
-          <p:cNvPr id="25" name="text-291"/>
-          <p:cNvSpPr txBox="1"/>
-          <p:nvPr/>
-        </p:nvSpPr>
-        <p:spPr>
-          <a:xfrm>
-            <a:off x="6035040" y="4434840"/>
-            <a:ext cx="5577840" cy="640080"/>
-          </a:xfrm>
-          <a:prstGeom prst="rect">
-            <a:avLst/>
-          </a:prstGeom>
-          <a:noFill/>
-          <a:ln/>
-        </p:spPr>
-        <p:txBody>
-          <a:bodyPr wrap="square" lIns="0" tIns="0" rIns="0" bIns="0" rtlCol="0" anchor="t"/>
-          <a:lstStyle/>
-          <a:p>
-            <a:pPr algn="l" indent="0" marL="0">
-              <a:buNone/>
-            </a:pPr>
-            <a:r>
-              <a:rPr lang="en-US" sz="1400" dirty="0">
-                <a:solidFill>
-                  <a:schemeClr val="tx1"/>
-                </a:solidFill>
-              </a:rPr>
-              <a:t>Reencolar un mensaje que siempre falla crearía un loop infinito. Por eso se rechaza y RabbitMQ lo manda al DLX.</a:t>
-            </a:r>
-            <a:endParaRPr lang="en-US" sz="1400" dirty="0"/>
-          </a:p>
-        </p:txBody>
-      </p:sp>
-      <p:sp>
-        <p:nvSpPr>
-          <p:cNvPr id="26" name="text-292"/>
-          <p:cNvSpPr txBox="1"/>
-          <p:nvPr/>
-        </p:nvSpPr>
-        <p:spPr>
-          <a:xfrm>
-            <a:off x="6035040" y="5120640"/>
-            <a:ext cx="5577840" cy="365760"/>
-          </a:xfrm>
-          <a:prstGeom prst="rect">
-            <a:avLst/>
-          </a:prstGeom>
-          <a:noFill/>
-          <a:ln/>
-        </p:spPr>
-        <p:txBody>
-          <a:bodyPr wrap="square" lIns="0" tIns="0" rIns="0" bIns="0" rtlCol="0" anchor="ctr"/>
-          <a:lstStyle/>
-          <a:p>
-            <a:pPr algn="l" indent="0" marL="0">
-              <a:buNone/>
-            </a:pPr>
-            <a:r>
-              <a:rPr lang="en-US" sz="1600" b="1" dirty="0">
-                <a:solidFill>
-                  <a:schemeClr val="tx1"/>
-                </a:solidFill>
-              </a:rPr>
-              <a:t>La DLQ no tiene consumidor</a:t>
-            </a:r>
-            <a:endParaRPr lang="en-US" sz="1600" dirty="0"/>
-          </a:p>
-        </p:txBody>
-      </p:sp>
-      <p:sp>
-        <p:nvSpPr>
-          <p:cNvPr id="27" name="text-293"/>
-          <p:cNvSpPr txBox="1"/>
-          <p:nvPr/>
-        </p:nvSpPr>
-        <p:spPr>
-          <a:xfrm>
-            <a:off x="6035040" y="5486400"/>
-            <a:ext cx="5577840" cy="640080"/>
-          </a:xfrm>
-          <a:prstGeom prst="rect">
-            <a:avLst/>
-          </a:prstGeom>
-          <a:noFill/>
-          <a:ln/>
-        </p:spPr>
-        <p:txBody>
-          <a:bodyPr wrap="square" lIns="0" tIns="0" rIns="0" bIns="0" rtlCol="0" anchor="t"/>
-          <a:lstStyle/>
-          <a:p>
-            <a:pPr algn="l" indent="0" marL="0">
-              <a:buNone/>
-            </a:pPr>
-            <a:r>
-              <a:rPr lang="en-US" sz="1400" dirty="0">
-                <a:solidFill>
-                  <a:schemeClr val="tx1"/>
-                </a:solidFill>
-              </a:rPr>
-              <a:t>El mensaje queda guardado para revisarlo o reenviarlo desde el panel de RabbitMQ (puerto 15672).</a:t>
+              <a:t>El mensaje llega un momento después de la reserva, por eso la campana espera 1,5 s antes de recargar.</a:t>
             </a:r>
             <a:endParaRPr lang="en-US" sz="1400" dirty="0"/>
           </a:p>
@@ -6029,7 +5966,7 @@
                   <a:schemeClr val="tx1"/>
                 </a:solidFill>
               </a:rPr>
-              <a:t>Cómo llega la notificación al frontend</a:t>
+              <a:t>Despliegue y orden de arranque</a:t>
             </a:r>
             <a:endParaRPr lang="en-US" sz="3200" dirty="0"/>
           </a:p>
@@ -6037,40 +5974,347 @@
       </p:sp>
       <p:sp>
         <p:nvSpPr>
-          <p:cNvPr id="3" name="timeline-294"/>
-          <p:cNvSpPr/>
-          <p:nvPr/>
-        </p:nvSpPr>
-        <p:spPr>
-          <a:xfrm>
-            <a:off x="685800" y="2148840"/>
-            <a:ext cx="10927080" cy="0"/>
+          <p:cNvPr id="3" name="box-319"/>
+          <p:cNvSpPr/>
+          <p:nvPr/>
+        </p:nvSpPr>
+        <p:spPr>
+          <a:xfrm>
+            <a:off x="548640" y="1280160"/>
+            <a:ext cx="5120640" cy="640080"/>
+          </a:xfrm>
+          <a:prstGeom prst="roundRect">
+            <a:avLst>
+              <a:gd name="adj" fmla="val 17143"/>
+            </a:avLst>
+          </a:prstGeom>
+          <a:solidFill>
+            <a:schemeClr val="tx2"/>
+          </a:solidFill>
+          <a:ln/>
+        </p:spPr>
+      </p:sp>
+      <p:sp>
+        <p:nvSpPr>
+          <p:cNvPr id="4" name="label-320"/>
+          <p:cNvSpPr txBox="1"/>
+          <p:nvPr/>
+        </p:nvSpPr>
+        <p:spPr>
+          <a:xfrm>
+            <a:off x="548640" y="1280160"/>
+            <a:ext cx="5120640" cy="640080"/>
+          </a:xfrm>
+          <a:prstGeom prst="rect">
+            <a:avLst/>
+          </a:prstGeom>
+          <a:noFill/>
+          <a:ln/>
+        </p:spPr>
+        <p:txBody>
+          <a:bodyPr wrap="square" lIns="762" tIns="762" rIns="762" bIns="762" rtlCol="0" anchor="ctr"/>
+          <a:lstStyle/>
+          <a:p>
+            <a:pPr algn="ctr" indent="0" marL="0">
+              <a:buNone/>
+            </a:pPr>
+            <a:r>
+              <a:rPr lang="en-US" sz="1500" b="1" dirty="0">
+                <a:solidFill>
+                  <a:schemeClr val="bg1"/>
+                </a:solidFill>
+              </a:rPr>
+              <a:t>mysql · rabbitmq</a:t>
+            </a:r>
+            <a:endParaRPr lang="en-US" sz="1500" dirty="0"/>
+          </a:p>
+        </p:txBody>
+      </p:sp>
+      <p:sp>
+        <p:nvSpPr>
+          <p:cNvPr id="5" name="arrow-321"/>
+          <p:cNvSpPr/>
+          <p:nvPr/>
+        </p:nvSpPr>
+        <p:spPr>
+          <a:xfrm>
+            <a:off x="3108960" y="1920240"/>
+            <a:ext cx="914" cy="274320"/>
           </a:xfrm>
           <a:prstGeom prst="line">
             <a:avLst/>
           </a:prstGeom>
           <a:noFill/>
-          <a:ln w="25400">
+          <a:ln w="19050">
             <a:solidFill>
               <a:schemeClr val="accent6"/>
             </a:solidFill>
             <a:prstDash val="solid"/>
+            <a:tailEnd type="triangle"/>
           </a:ln>
         </p:spPr>
       </p:sp>
       <p:sp>
         <p:nvSpPr>
-          <p:cNvPr id="4" name="mark-295"/>
-          <p:cNvSpPr/>
-          <p:nvPr/>
-        </p:nvSpPr>
-        <p:spPr>
-          <a:xfrm>
-            <a:off x="557784" y="2020824"/>
-            <a:ext cx="256032" cy="256032"/>
-          </a:xfrm>
-          <a:prstGeom prst="ellipse">
-            <a:avLst/>
+          <p:cNvPr id="6" name="box-322"/>
+          <p:cNvSpPr/>
+          <p:nvPr/>
+        </p:nvSpPr>
+        <p:spPr>
+          <a:xfrm>
+            <a:off x="548640" y="2194560"/>
+            <a:ext cx="5120640" cy="640080"/>
+          </a:xfrm>
+          <a:prstGeom prst="roundRect">
+            <a:avLst>
+              <a:gd name="adj" fmla="val 17143"/>
+            </a:avLst>
+          </a:prstGeom>
+          <a:solidFill>
+            <a:schemeClr val="accent2"/>
+          </a:solidFill>
+          <a:ln/>
+        </p:spPr>
+      </p:sp>
+      <p:sp>
+        <p:nvSpPr>
+          <p:cNvPr id="7" name="label-323"/>
+          <p:cNvSpPr txBox="1"/>
+          <p:nvPr/>
+        </p:nvSpPr>
+        <p:spPr>
+          <a:xfrm>
+            <a:off x="548640" y="2194560"/>
+            <a:ext cx="5120640" cy="640080"/>
+          </a:xfrm>
+          <a:prstGeom prst="rect">
+            <a:avLst/>
+          </a:prstGeom>
+          <a:noFill/>
+          <a:ln/>
+        </p:spPr>
+        <p:txBody>
+          <a:bodyPr wrap="square" lIns="762" tIns="762" rIns="762" bIns="762" rtlCol="0" anchor="ctr"/>
+          <a:lstStyle/>
+          <a:p>
+            <a:pPr algn="ctr" indent="0" marL="0">
+              <a:buNone/>
+            </a:pPr>
+            <a:r>
+              <a:rPr lang="en-US" sz="1500" b="1" dirty="0">
+                <a:solidFill>
+                  <a:schemeClr val="bg1"/>
+                </a:solidFill>
+              </a:rPr>
+              <a:t>ms-gimnasios · ms-notificaciones · ms-usuarios</a:t>
+            </a:r>
+            <a:endParaRPr lang="en-US" sz="1500" dirty="0"/>
+          </a:p>
+        </p:txBody>
+      </p:sp>
+      <p:sp>
+        <p:nvSpPr>
+          <p:cNvPr id="8" name="arrow-324"/>
+          <p:cNvSpPr/>
+          <p:nvPr/>
+        </p:nvSpPr>
+        <p:spPr>
+          <a:xfrm>
+            <a:off x="3108960" y="2834640"/>
+            <a:ext cx="914" cy="274320"/>
+          </a:xfrm>
+          <a:prstGeom prst="line">
+            <a:avLst/>
+          </a:prstGeom>
+          <a:noFill/>
+          <a:ln w="19050">
+            <a:solidFill>
+              <a:schemeClr val="accent6"/>
+            </a:solidFill>
+            <a:prstDash val="solid"/>
+            <a:tailEnd type="triangle"/>
+          </a:ln>
+        </p:spPr>
+      </p:sp>
+      <p:sp>
+        <p:nvSpPr>
+          <p:cNvPr id="9" name="box-325"/>
+          <p:cNvSpPr/>
+          <p:nvPr/>
+        </p:nvSpPr>
+        <p:spPr>
+          <a:xfrm>
+            <a:off x="548640" y="3108960"/>
+            <a:ext cx="5120640" cy="640080"/>
+          </a:xfrm>
+          <a:prstGeom prst="roundRect">
+            <a:avLst>
+              <a:gd name="adj" fmla="val 17143"/>
+            </a:avLst>
+          </a:prstGeom>
+          <a:solidFill>
+            <a:schemeClr val="accent1"/>
+          </a:solidFill>
+          <a:ln/>
+        </p:spPr>
+      </p:sp>
+      <p:sp>
+        <p:nvSpPr>
+          <p:cNvPr id="10" name="label-326"/>
+          <p:cNvSpPr txBox="1"/>
+          <p:nvPr/>
+        </p:nvSpPr>
+        <p:spPr>
+          <a:xfrm>
+            <a:off x="548640" y="3108960"/>
+            <a:ext cx="5120640" cy="640080"/>
+          </a:xfrm>
+          <a:prstGeom prst="rect">
+            <a:avLst/>
+          </a:prstGeom>
+          <a:noFill/>
+          <a:ln/>
+        </p:spPr>
+        <p:txBody>
+          <a:bodyPr wrap="square" lIns="762" tIns="762" rIns="762" bIns="762" rtlCol="0" anchor="ctr"/>
+          <a:lstStyle/>
+          <a:p>
+            <a:pPr algn="ctr" indent="0" marL="0">
+              <a:buNone/>
+            </a:pPr>
+            <a:r>
+              <a:rPr lang="en-US" sz="1500" b="1" dirty="0">
+                <a:solidFill>
+                  <a:schemeClr val="bg1"/>
+                </a:solidFill>
+              </a:rPr>
+              <a:t>ms-reservas</a:t>
+            </a:r>
+            <a:endParaRPr lang="en-US" sz="1500" dirty="0"/>
+          </a:p>
+        </p:txBody>
+      </p:sp>
+      <p:sp>
+        <p:nvSpPr>
+          <p:cNvPr id="11" name="arrow-327"/>
+          <p:cNvSpPr/>
+          <p:nvPr/>
+        </p:nvSpPr>
+        <p:spPr>
+          <a:xfrm>
+            <a:off x="3108960" y="3749040"/>
+            <a:ext cx="914" cy="274320"/>
+          </a:xfrm>
+          <a:prstGeom prst="line">
+            <a:avLst/>
+          </a:prstGeom>
+          <a:noFill/>
+          <a:ln w="19050">
+            <a:solidFill>
+              <a:schemeClr val="accent6"/>
+            </a:solidFill>
+            <a:prstDash val="solid"/>
+            <a:tailEnd type="triangle"/>
+          </a:ln>
+        </p:spPr>
+      </p:sp>
+      <p:sp>
+        <p:nvSpPr>
+          <p:cNvPr id="12" name="box-328"/>
+          <p:cNvSpPr/>
+          <p:nvPr/>
+        </p:nvSpPr>
+        <p:spPr>
+          <a:xfrm>
+            <a:off x="548640" y="4023360"/>
+            <a:ext cx="5120640" cy="640080"/>
+          </a:xfrm>
+          <a:prstGeom prst="roundRect">
+            <a:avLst>
+              <a:gd name="adj" fmla="val 17143"/>
+            </a:avLst>
+          </a:prstGeom>
+          <a:solidFill>
+            <a:schemeClr val="accent6"/>
+          </a:solidFill>
+          <a:ln/>
+        </p:spPr>
+      </p:sp>
+      <p:sp>
+        <p:nvSpPr>
+          <p:cNvPr id="13" name="label-329"/>
+          <p:cNvSpPr txBox="1"/>
+          <p:nvPr/>
+        </p:nvSpPr>
+        <p:spPr>
+          <a:xfrm>
+            <a:off x="548640" y="4023360"/>
+            <a:ext cx="5120640" cy="640080"/>
+          </a:xfrm>
+          <a:prstGeom prst="rect">
+            <a:avLst/>
+          </a:prstGeom>
+          <a:noFill/>
+          <a:ln/>
+        </p:spPr>
+        <p:txBody>
+          <a:bodyPr wrap="square" lIns="762" tIns="762" rIns="762" bIns="762" rtlCol="0" anchor="ctr"/>
+          <a:lstStyle/>
+          <a:p>
+            <a:pPr algn="ctr" indent="0" marL="0">
+              <a:buNone/>
+            </a:pPr>
+            <a:r>
+              <a:rPr lang="en-US" sz="1500" b="1" dirty="0">
+                <a:solidFill>
+                  <a:schemeClr val="bg1"/>
+                </a:solidFill>
+              </a:rPr>
+              <a:t>api-gateway</a:t>
+            </a:r>
+            <a:endParaRPr lang="en-US" sz="1500" dirty="0"/>
+          </a:p>
+        </p:txBody>
+      </p:sp>
+      <p:sp>
+        <p:nvSpPr>
+          <p:cNvPr id="14" name="arrow-330"/>
+          <p:cNvSpPr/>
+          <p:nvPr/>
+        </p:nvSpPr>
+        <p:spPr>
+          <a:xfrm>
+            <a:off x="3108960" y="4663440"/>
+            <a:ext cx="914" cy="274320"/>
+          </a:xfrm>
+          <a:prstGeom prst="line">
+            <a:avLst/>
+          </a:prstGeom>
+          <a:noFill/>
+          <a:ln w="19050">
+            <a:solidFill>
+              <a:schemeClr val="accent6"/>
+            </a:solidFill>
+            <a:prstDash val="solid"/>
+            <a:tailEnd type="triangle"/>
+          </a:ln>
+        </p:spPr>
+      </p:sp>
+      <p:sp>
+        <p:nvSpPr>
+          <p:cNvPr id="15" name="box-331"/>
+          <p:cNvSpPr/>
+          <p:nvPr/>
+        </p:nvSpPr>
+        <p:spPr>
+          <a:xfrm>
+            <a:off x="548640" y="4937760"/>
+            <a:ext cx="5120640" cy="640080"/>
+          </a:xfrm>
+          <a:prstGeom prst="roundRect">
+            <a:avLst>
+              <a:gd name="adj" fmla="val 17143"/>
+            </a:avLst>
           </a:prstGeom>
           <a:solidFill>
             <a:schemeClr val="accent5"/>
@@ -6080,397 +6324,99 @@
       </p:sp>
       <p:sp>
         <p:nvSpPr>
-          <p:cNvPr id="5" name="text-296"/>
-          <p:cNvSpPr txBox="1"/>
-          <p:nvPr/>
-        </p:nvSpPr>
-        <p:spPr>
-          <a:xfrm>
-            <a:off x="548640" y="1417320"/>
-            <a:ext cx="2377440" cy="457200"/>
-          </a:xfrm>
-          <a:prstGeom prst="rect">
-            <a:avLst/>
-          </a:prstGeom>
-          <a:noFill/>
-          <a:ln/>
-        </p:spPr>
-        <p:txBody>
-          <a:bodyPr wrap="square" lIns="0" tIns="0" rIns="0" bIns="0" rtlCol="0" anchor="ctr"/>
+          <p:cNvPr id="16" name="label-332"/>
+          <p:cNvSpPr txBox="1"/>
+          <p:nvPr/>
+        </p:nvSpPr>
+        <p:spPr>
+          <a:xfrm>
+            <a:off x="548640" y="4937760"/>
+            <a:ext cx="5120640" cy="640080"/>
+          </a:xfrm>
+          <a:prstGeom prst="rect">
+            <a:avLst/>
+          </a:prstGeom>
+          <a:noFill/>
+          <a:ln/>
+        </p:spPr>
+        <p:txBody>
+          <a:bodyPr wrap="square" lIns="762" tIns="762" rIns="762" bIns="762" rtlCol="0" anchor="ctr"/>
+          <a:lstStyle/>
+          <a:p>
+            <a:pPr algn="ctr" indent="0" marL="0">
+              <a:buNone/>
+            </a:pPr>
+            <a:r>
+              <a:rPr lang="en-US" sz="1500" b="1" dirty="0">
+                <a:solidFill>
+                  <a:schemeClr val="bg1"/>
+                </a:solidFill>
+              </a:rPr>
+              <a:t>frontend (nginx)</a:t>
+            </a:r>
+            <a:endParaRPr lang="en-US" sz="1500" dirty="0"/>
+          </a:p>
+        </p:txBody>
+      </p:sp>
+      <p:sp>
+        <p:nvSpPr>
+          <p:cNvPr id="17" name="text-333"/>
+          <p:cNvSpPr txBox="1"/>
+          <p:nvPr/>
+        </p:nvSpPr>
+        <p:spPr>
+          <a:xfrm>
+            <a:off x="548640" y="5715000"/>
+            <a:ext cx="5120640" cy="457200"/>
+          </a:xfrm>
+          <a:prstGeom prst="rect">
+            <a:avLst/>
+          </a:prstGeom>
+          <a:noFill/>
+          <a:ln/>
+        </p:spPr>
+        <p:txBody>
+          <a:bodyPr wrap="square" lIns="0" tIns="0" rIns="0" bIns="0" rtlCol="0" anchor="t"/>
           <a:lstStyle/>
           <a:p>
             <a:pPr algn="l" indent="0" marL="0">
               <a:buNone/>
             </a:pPr>
             <a:r>
-              <a:rPr lang="en-US" sz="1600" b="1" dirty="0">
-                <a:solidFill>
-                  <a:schemeClr val="tx1"/>
-                </a:solidFill>
-              </a:rPr>
-              <a:t>0 s</a:t>
-            </a:r>
-            <a:endParaRPr lang="en-US" sz="1600" dirty="0"/>
-          </a:p>
-        </p:txBody>
-      </p:sp>
-      <p:sp>
-        <p:nvSpPr>
-          <p:cNvPr id="6" name="text-297"/>
-          <p:cNvSpPr txBox="1"/>
-          <p:nvPr/>
-        </p:nvSpPr>
-        <p:spPr>
-          <a:xfrm>
-            <a:off x="548640" y="2423160"/>
-            <a:ext cx="2651760" cy="731520"/>
-          </a:xfrm>
-          <a:prstGeom prst="rect">
-            <a:avLst/>
-          </a:prstGeom>
-          <a:noFill/>
-          <a:ln/>
-        </p:spPr>
-        <p:txBody>
-          <a:bodyPr wrap="square" lIns="0" tIns="0" rIns="0" bIns="0" rtlCol="0" anchor="t"/>
-          <a:lstStyle/>
-          <a:p>
-            <a:pPr algn="l" indent="0" marL="0">
-              <a:buNone/>
-            </a:pPr>
-            <a:r>
-              <a:rPr lang="en-US" sz="1300" dirty="0">
-                <a:solidFill>
-                  <a:schemeClr val="tx1"/>
-                </a:solidFill>
-              </a:rPr>
-              <a:t>El usuario reserva y recibe 201</a:t>
-            </a:r>
-            <a:endParaRPr lang="en-US" sz="1300" dirty="0"/>
-          </a:p>
-        </p:txBody>
-      </p:sp>
-      <p:sp>
-        <p:nvSpPr>
-          <p:cNvPr id="7" name="mark-298"/>
-          <p:cNvSpPr/>
-          <p:nvPr/>
-        </p:nvSpPr>
-        <p:spPr>
-          <a:xfrm>
-            <a:off x="3392424" y="2020824"/>
-            <a:ext cx="256032" cy="256032"/>
+              <a:rPr lang="en-US" sz="1200" dirty="0">
+                <a:solidFill>
+                  <a:schemeClr val="accent6"/>
+                </a:solidFill>
+              </a:rPr>
+              <a:t>Con docker compose, cada servicio espera a que el anterior esté listo</a:t>
+            </a:r>
+            <a:endParaRPr lang="en-US" sz="1200" dirty="0"/>
+          </a:p>
+        </p:txBody>
+      </p:sp>
+      <p:sp>
+        <p:nvSpPr>
+          <p:cNvPr id="18" name="circle-334"/>
+          <p:cNvSpPr/>
+          <p:nvPr/>
+        </p:nvSpPr>
+        <p:spPr>
+          <a:xfrm>
+            <a:off x="6172200" y="1325880"/>
+            <a:ext cx="548640" cy="548640"/>
           </a:xfrm>
           <a:prstGeom prst="ellipse">
             <a:avLst/>
           </a:prstGeom>
           <a:solidFill>
-            <a:schemeClr val="accent1"/>
-          </a:solidFill>
-          <a:ln/>
-        </p:spPr>
-      </p:sp>
-      <p:sp>
-        <p:nvSpPr>
-          <p:cNvPr id="8" name="text-299"/>
-          <p:cNvSpPr txBox="1"/>
-          <p:nvPr/>
-        </p:nvSpPr>
-        <p:spPr>
-          <a:xfrm>
-            <a:off x="3383280" y="1417320"/>
-            <a:ext cx="2377440" cy="457200"/>
-          </a:xfrm>
-          <a:prstGeom prst="rect">
-            <a:avLst/>
-          </a:prstGeom>
-          <a:noFill/>
-          <a:ln/>
-        </p:spPr>
-        <p:txBody>
-          <a:bodyPr wrap="square" lIns="0" tIns="0" rIns="0" bIns="0" rtlCol="0" anchor="ctr"/>
-          <a:lstStyle/>
-          <a:p>
-            <a:pPr algn="l" indent="0" marL="0">
-              <a:buNone/>
-            </a:pPr>
-            <a:r>
-              <a:rPr lang="en-US" sz="1600" b="1" dirty="0">
-                <a:solidFill>
-                  <a:schemeClr val="tx1"/>
-                </a:solidFill>
-              </a:rPr>
-              <a:t>milisegundos</a:t>
-            </a:r>
-            <a:endParaRPr lang="en-US" sz="1600" dirty="0"/>
-          </a:p>
-        </p:txBody>
-      </p:sp>
-      <p:sp>
-        <p:nvSpPr>
-          <p:cNvPr id="9" name="text-300"/>
-          <p:cNvSpPr txBox="1"/>
-          <p:nvPr/>
-        </p:nvSpPr>
-        <p:spPr>
-          <a:xfrm>
-            <a:off x="3383280" y="2423160"/>
-            <a:ext cx="2651760" cy="731520"/>
-          </a:xfrm>
-          <a:prstGeom prst="rect">
-            <a:avLst/>
-          </a:prstGeom>
-          <a:noFill/>
-          <a:ln/>
-        </p:spPr>
-        <p:txBody>
-          <a:bodyPr wrap="square" lIns="0" tIns="0" rIns="0" bIns="0" rtlCol="0" anchor="t"/>
-          <a:lstStyle/>
-          <a:p>
-            <a:pPr algn="l" indent="0" marL="0">
-              <a:buNone/>
-            </a:pPr>
-            <a:r>
-              <a:rPr lang="en-US" sz="1300" dirty="0">
-                <a:solidFill>
-                  <a:schemeClr val="tx1"/>
-                </a:solidFill>
-              </a:rPr>
-              <a:t>RabbitMQ entrega a ms-notificaciones</a:t>
-            </a:r>
-            <a:endParaRPr lang="en-US" sz="1300" dirty="0"/>
-          </a:p>
-        </p:txBody>
-      </p:sp>
-      <p:sp>
-        <p:nvSpPr>
-          <p:cNvPr id="10" name="mark-301"/>
-          <p:cNvSpPr/>
-          <p:nvPr/>
-        </p:nvSpPr>
-        <p:spPr>
-          <a:xfrm>
-            <a:off x="6227064" y="2020824"/>
-            <a:ext cx="256032" cy="256032"/>
-          </a:xfrm>
-          <a:prstGeom prst="ellipse">
-            <a:avLst/>
-          </a:prstGeom>
-          <a:solidFill>
-            <a:schemeClr val="accent5"/>
-          </a:solidFill>
-          <a:ln/>
-        </p:spPr>
-      </p:sp>
-      <p:sp>
-        <p:nvSpPr>
-          <p:cNvPr id="11" name="text-302"/>
-          <p:cNvSpPr txBox="1"/>
-          <p:nvPr/>
-        </p:nvSpPr>
-        <p:spPr>
-          <a:xfrm>
-            <a:off x="6217920" y="1417320"/>
-            <a:ext cx="2377440" cy="457200"/>
-          </a:xfrm>
-          <a:prstGeom prst="rect">
-            <a:avLst/>
-          </a:prstGeom>
-          <a:noFill/>
-          <a:ln/>
-        </p:spPr>
-        <p:txBody>
-          <a:bodyPr wrap="square" lIns="0" tIns="0" rIns="0" bIns="0" rtlCol="0" anchor="ctr"/>
-          <a:lstStyle/>
-          <a:p>
-            <a:pPr algn="l" indent="0" marL="0">
-              <a:buNone/>
-            </a:pPr>
-            <a:r>
-              <a:rPr lang="en-US" sz="1600" b="1" dirty="0">
-                <a:solidFill>
-                  <a:schemeClr val="tx1"/>
-                </a:solidFill>
-              </a:rPr>
-              <a:t>1,5 s</a:t>
-            </a:r>
-            <a:endParaRPr lang="en-US" sz="1600" dirty="0"/>
-          </a:p>
-        </p:txBody>
-      </p:sp>
-      <p:sp>
-        <p:nvSpPr>
-          <p:cNvPr id="12" name="text-303"/>
-          <p:cNvSpPr txBox="1"/>
-          <p:nvPr/>
-        </p:nvSpPr>
-        <p:spPr>
-          <a:xfrm>
-            <a:off x="6217920" y="2423160"/>
-            <a:ext cx="2651760" cy="731520"/>
-          </a:xfrm>
-          <a:prstGeom prst="rect">
-            <a:avLst/>
-          </a:prstGeom>
-          <a:noFill/>
-          <a:ln/>
-        </p:spPr>
-        <p:txBody>
-          <a:bodyPr wrap="square" lIns="0" tIns="0" rIns="0" bIns="0" rtlCol="0" anchor="t"/>
-          <a:lstStyle/>
-          <a:p>
-            <a:pPr algn="l" indent="0" marL="0">
-              <a:buNone/>
-            </a:pPr>
-            <a:r>
-              <a:rPr lang="en-US" sz="1300" dirty="0">
-                <a:solidFill>
-                  <a:schemeClr val="tx1"/>
-                </a:solidFill>
-              </a:rPr>
-              <a:t>requestNotificationsRefresh() recarga la campana</a:t>
-            </a:r>
-            <a:endParaRPr lang="en-US" sz="1300" dirty="0"/>
-          </a:p>
-        </p:txBody>
-      </p:sp>
-      <p:sp>
-        <p:nvSpPr>
-          <p:cNvPr id="13" name="mark-304"/>
-          <p:cNvSpPr/>
-          <p:nvPr/>
-        </p:nvSpPr>
-        <p:spPr>
-          <a:xfrm>
-            <a:off x="9061704" y="2020824"/>
-            <a:ext cx="256032" cy="256032"/>
-          </a:xfrm>
-          <a:prstGeom prst="ellipse">
-            <a:avLst/>
-          </a:prstGeom>
-          <a:solidFill>
-            <a:schemeClr val="accent5"/>
-          </a:solidFill>
-          <a:ln/>
-        </p:spPr>
-      </p:sp>
-      <p:sp>
-        <p:nvSpPr>
-          <p:cNvPr id="14" name="text-305"/>
-          <p:cNvSpPr txBox="1"/>
-          <p:nvPr/>
-        </p:nvSpPr>
-        <p:spPr>
-          <a:xfrm>
-            <a:off x="9052560" y="1417320"/>
-            <a:ext cx="2377440" cy="457200"/>
-          </a:xfrm>
-          <a:prstGeom prst="rect">
-            <a:avLst/>
-          </a:prstGeom>
-          <a:noFill/>
-          <a:ln/>
-        </p:spPr>
-        <p:txBody>
-          <a:bodyPr wrap="square" lIns="0" tIns="0" rIns="0" bIns="0" rtlCol="0" anchor="ctr"/>
-          <a:lstStyle/>
-          <a:p>
-            <a:pPr algn="l" indent="0" marL="0">
-              <a:buNone/>
-            </a:pPr>
-            <a:r>
-              <a:rPr lang="en-US" sz="1600" b="1" dirty="0">
-                <a:solidFill>
-                  <a:schemeClr val="tx1"/>
-                </a:solidFill>
-              </a:rPr>
-              <a:t>cada 30 s</a:t>
-            </a:r>
-            <a:endParaRPr lang="en-US" sz="1600" dirty="0"/>
-          </a:p>
-        </p:txBody>
-      </p:sp>
-      <p:sp>
-        <p:nvSpPr>
-          <p:cNvPr id="15" name="text-306"/>
-          <p:cNvSpPr txBox="1"/>
-          <p:nvPr/>
-        </p:nvSpPr>
-        <p:spPr>
-          <a:xfrm>
-            <a:off x="9052560" y="2423160"/>
-            <a:ext cx="2651760" cy="731520"/>
-          </a:xfrm>
-          <a:prstGeom prst="rect">
-            <a:avLst/>
-          </a:prstGeom>
-          <a:noFill/>
-          <a:ln/>
-        </p:spPr>
-        <p:txBody>
-          <a:bodyPr wrap="square" lIns="0" tIns="0" rIns="0" bIns="0" rtlCol="0" anchor="t"/>
-          <a:lstStyle/>
-          <a:p>
-            <a:pPr algn="l" indent="0" marL="0">
-              <a:buNone/>
-            </a:pPr>
-            <a:r>
-              <a:rPr lang="en-US" sz="1300" dirty="0">
-                <a:solidFill>
-                  <a:schemeClr val="tx1"/>
-                </a:solidFill>
-              </a:rPr>
-              <a:t>Polling de GET /api/notificaciones</a:t>
-            </a:r>
-            <a:endParaRPr lang="en-US" sz="1300" dirty="0"/>
-          </a:p>
-        </p:txBody>
-      </p:sp>
-      <p:sp>
-        <p:nvSpPr>
-          <p:cNvPr id="16" name="box-307"/>
-          <p:cNvSpPr/>
-          <p:nvPr/>
-        </p:nvSpPr>
-        <p:spPr>
-          <a:xfrm>
-            <a:off x="548640" y="3429000"/>
-            <a:ext cx="3520440" cy="2377440"/>
-          </a:xfrm>
-          <a:prstGeom prst="roundRect">
-            <a:avLst>
-              <a:gd name="adj" fmla="val 4615"/>
-            </a:avLst>
-          </a:prstGeom>
-          <a:solidFill>
-            <a:schemeClr val="bg2"/>
-          </a:solidFill>
-          <a:ln/>
-        </p:spPr>
-      </p:sp>
-      <p:sp>
-        <p:nvSpPr>
-          <p:cNvPr id="17" name="circle-308"/>
-          <p:cNvSpPr/>
-          <p:nvPr/>
-        </p:nvSpPr>
-        <p:spPr>
-          <a:xfrm>
-            <a:off x="822960" y="3657600"/>
-            <a:ext cx="548640" cy="548640"/>
-          </a:xfrm>
-          <a:prstGeom prst="ellipse">
-            <a:avLst/>
-          </a:prstGeom>
-          <a:solidFill>
-            <a:schemeClr val="accent5"/>
+            <a:schemeClr val="accent2"/>
           </a:solidFill>
           <a:ln/>
         </p:spPr>
       </p:sp>
       <p:pic>
         <p:nvPicPr>
-          <p:cNvPr id="18" name="icon-309" descr="preencoded.png">    </p:cNvPr>
+          <p:cNvPr id="19" name="icon-335" descr="preencoded.png">    </p:cNvPr>
           <p:cNvPicPr>
             <a:picLocks noChangeAspect="1"/>
           </p:cNvPicPr>
@@ -6484,7 +6430,7 @@
         </p:blipFill>
         <p:spPr>
           <a:xfrm>
-            <a:off x="960120" y="3794760"/>
+            <a:off x="6309360" y="1463040"/>
             <a:ext cx="274320" cy="274320"/>
           </a:xfrm>
           <a:prstGeom prst="rect">
@@ -6494,14 +6440,14 @@
       </p:pic>
       <p:sp>
         <p:nvSpPr>
-          <p:cNvPr id="19" name="text-310"/>
-          <p:cNvSpPr txBox="1"/>
-          <p:nvPr/>
-        </p:nvSpPr>
-        <p:spPr>
-          <a:xfrm>
-            <a:off x="1508760" y="3657600"/>
-            <a:ext cx="2423160" cy="548640"/>
+          <p:cNvPr id="20" name="text-336"/>
+          <p:cNvSpPr txBox="1"/>
+          <p:nvPr/>
+        </p:nvSpPr>
+        <p:spPr>
+          <a:xfrm>
+            <a:off x="6903720" y="1280160"/>
+            <a:ext cx="4709160" cy="411480"/>
           </a:xfrm>
           <a:prstGeom prst="rect">
             <a:avLst/>
@@ -6517,27 +6463,27 @@
               <a:buNone/>
             </a:pPr>
             <a:r>
-              <a:rPr lang="en-US" sz="1600" b="1" dirty="0">
+              <a:rPr lang="en-US" sz="1700" b="1" dirty="0">
                 <a:solidFill>
                   <a:schemeClr val="tx1"/>
                 </a:solidFill>
               </a:rPr>
-              <a:t>NotificationBell</a:t>
-            </a:r>
-            <a:endParaRPr lang="en-US" sz="1600" dirty="0"/>
-          </a:p>
-        </p:txBody>
-      </p:sp>
-      <p:sp>
-        <p:nvSpPr>
-          <p:cNvPr id="20" name="text-311"/>
-          <p:cNvSpPr txBox="1"/>
-          <p:nvPr/>
-        </p:nvSpPr>
-        <p:spPr>
-          <a:xfrm>
-            <a:off x="822960" y="4389120"/>
-            <a:ext cx="3017520" cy="1645920"/>
+              <a:t>Los que reciben parten primero</a:t>
+            </a:r>
+            <a:endParaRPr lang="en-US" sz="1700" dirty="0"/>
+          </a:p>
+        </p:txBody>
+      </p:sp>
+      <p:sp>
+        <p:nvSpPr>
+          <p:cNvPr id="21" name="text-337"/>
+          <p:cNvSpPr txBox="1"/>
+          <p:nvPr/>
+        </p:nvSpPr>
+        <p:spPr>
+          <a:xfrm>
+            <a:off x="6903720" y="1737360"/>
+            <a:ext cx="4709160" cy="868680"/>
           </a:xfrm>
           <a:prstGeom prst="rect">
             <a:avLst/>
@@ -6553,62 +6499,40 @@
               <a:buNone/>
             </a:pPr>
             <a:r>
-              <a:rPr lang="en-US" sz="1400" dirty="0">
+              <a:rPr lang="en-US" sz="1500" dirty="0">
                 <a:solidFill>
                   <a:schemeClr val="tx1"/>
                 </a:solidFill>
               </a:rPr>
-              <a:t>Componente en AppNav. Muestra el contador de no leídas y permite marcarlas con PUT /{id}/leida o PUT /leidas.</a:t>
-            </a:r>
-            <a:endParaRPr lang="en-US" sz="1400" dirty="0"/>
-          </a:p>
-        </p:txBody>
-      </p:sp>
-      <p:sp>
-        <p:nvSpPr>
-          <p:cNvPr id="21" name="box-312"/>
-          <p:cNvSpPr/>
-          <p:nvPr/>
-        </p:nvSpPr>
-        <p:spPr>
-          <a:xfrm>
-            <a:off x="4320540" y="3429000"/>
-            <a:ext cx="3520440" cy="2377440"/>
-          </a:xfrm>
-          <a:prstGeom prst="roundRect">
-            <a:avLst>
-              <a:gd name="adj" fmla="val 4615"/>
-            </a:avLst>
+              <a:t>Ellos crean sus colas. Si ms-reservas partiera antes, sus mensajes no tendrían dónde llegar.</a:t>
+            </a:r>
+            <a:endParaRPr lang="en-US" sz="1500" dirty="0"/>
+          </a:p>
+        </p:txBody>
+      </p:sp>
+      <p:sp>
+        <p:nvSpPr>
+          <p:cNvPr id="22" name="circle-338"/>
+          <p:cNvSpPr/>
+          <p:nvPr/>
+        </p:nvSpPr>
+        <p:spPr>
+          <a:xfrm>
+            <a:off x="6172200" y="2834640"/>
+            <a:ext cx="548640" cy="548640"/>
+          </a:xfrm>
+          <a:prstGeom prst="ellipse">
+            <a:avLst/>
           </a:prstGeom>
           <a:solidFill>
-            <a:schemeClr val="bg2"/>
-          </a:solidFill>
-          <a:ln/>
-        </p:spPr>
-      </p:sp>
-      <p:sp>
-        <p:nvSpPr>
-          <p:cNvPr id="22" name="circle-313"/>
-          <p:cNvSpPr/>
-          <p:nvPr/>
-        </p:nvSpPr>
-        <p:spPr>
-          <a:xfrm>
-            <a:off x="4594860" y="3657600"/>
-            <a:ext cx="548640" cy="548640"/>
-          </a:xfrm>
-          <a:prstGeom prst="ellipse">
-            <a:avLst/>
-          </a:prstGeom>
-          <a:solidFill>
-            <a:schemeClr val="accent5"/>
+            <a:schemeClr val="accent1"/>
           </a:solidFill>
           <a:ln/>
         </p:spPr>
       </p:sp>
       <p:pic>
         <p:nvPicPr>
-          <p:cNvPr id="23" name="icon-314" descr="preencoded.png">    </p:cNvPr>
+          <p:cNvPr id="23" name="icon-339" descr="preencoded.png">    </p:cNvPr>
           <p:cNvPicPr>
             <a:picLocks noChangeAspect="1"/>
           </p:cNvPicPr>
@@ -6622,7 +6546,7 @@
         </p:blipFill>
         <p:spPr>
           <a:xfrm>
-            <a:off x="4732020" y="3794760"/>
+            <a:off x="6309360" y="2971800"/>
             <a:ext cx="274320" cy="274320"/>
           </a:xfrm>
           <a:prstGeom prst="rect">
@@ -6632,14 +6556,14 @@
       </p:pic>
       <p:sp>
         <p:nvSpPr>
-          <p:cNvPr id="24" name="text-315"/>
-          <p:cNvSpPr txBox="1"/>
-          <p:nvPr/>
-        </p:nvSpPr>
-        <p:spPr>
-          <a:xfrm>
-            <a:off x="5280660" y="3657600"/>
-            <a:ext cx="2423160" cy="548640"/>
+          <p:cNvPr id="24" name="text-340"/>
+          <p:cNvSpPr txBox="1"/>
+          <p:nvPr/>
+        </p:nvSpPr>
+        <p:spPr>
+          <a:xfrm>
+            <a:off x="6903720" y="2788920"/>
+            <a:ext cx="4709160" cy="411480"/>
           </a:xfrm>
           <a:prstGeom prst="rect">
             <a:avLst/>
@@ -6655,27 +6579,27 @@
               <a:buNone/>
             </a:pPr>
             <a:r>
-              <a:rPr lang="en-US" sz="1600" b="1" dirty="0">
+              <a:rPr lang="en-US" sz="1700" b="1" dirty="0">
                 <a:solidFill>
                   <a:schemeClr val="tx1"/>
                 </a:solidFill>
               </a:rPr>
-              <a:t>Pestaña oculta = sin polling</a:t>
-            </a:r>
-            <a:endParaRPr lang="en-US" sz="1600" dirty="0"/>
-          </a:p>
-        </p:txBody>
-      </p:sp>
-      <p:sp>
-        <p:nvSpPr>
-          <p:cNvPr id="25" name="text-316"/>
-          <p:cNvSpPr txBox="1"/>
-          <p:nvPr/>
-        </p:nvSpPr>
-        <p:spPr>
-          <a:xfrm>
-            <a:off x="4594860" y="4389120"/>
-            <a:ext cx="3017520" cy="1645920"/>
+              <a:t>Nada se pierde al reiniciar</a:t>
+            </a:r>
+            <a:endParaRPr lang="en-US" sz="1700" dirty="0"/>
+          </a:p>
+        </p:txBody>
+      </p:sp>
+      <p:sp>
+        <p:nvSpPr>
+          <p:cNvPr id="25" name="text-341"/>
+          <p:cNvSpPr txBox="1"/>
+          <p:nvPr/>
+        </p:nvSpPr>
+        <p:spPr>
+          <a:xfrm>
+            <a:off x="6903720" y="3246120"/>
+            <a:ext cx="4709160" cy="868680"/>
           </a:xfrm>
           <a:prstGeom prst="rect">
             <a:avLst/>
@@ -6691,62 +6615,40 @@
               <a:buNone/>
             </a:pPr>
             <a:r>
-              <a:rPr lang="en-US" sz="1400" dirty="0">
+              <a:rPr lang="en-US" sz="1500" dirty="0">
                 <a:solidFill>
                   <a:schemeClr val="tx1"/>
                 </a:solidFill>
               </a:rPr>
-              <a:t>Se salta las consultas con la pestaña en segundo plano y recarga al volver (visibilitychange).</a:t>
-            </a:r>
-            <a:endParaRPr lang="en-US" sz="1400" dirty="0"/>
-          </a:p>
-        </p:txBody>
-      </p:sp>
-      <p:sp>
-        <p:nvSpPr>
-          <p:cNvPr id="26" name="box-317"/>
-          <p:cNvSpPr/>
-          <p:nvPr/>
-        </p:nvSpPr>
-        <p:spPr>
-          <a:xfrm>
-            <a:off x="8092440" y="3429000"/>
-            <a:ext cx="3520440" cy="2377440"/>
-          </a:xfrm>
-          <a:prstGeom prst="roundRect">
-            <a:avLst>
-              <a:gd name="adj" fmla="val 4615"/>
-            </a:avLst>
+              <a:t>MySQL y RabbitMQ guardan sus datos en disco: las colas y sus mensajes siguen ahí después de apagar todo.</a:t>
+            </a:r>
+            <a:endParaRPr lang="en-US" sz="1500" dirty="0"/>
+          </a:p>
+        </p:txBody>
+      </p:sp>
+      <p:sp>
+        <p:nvSpPr>
+          <p:cNvPr id="26" name="circle-342"/>
+          <p:cNvSpPr/>
+          <p:nvPr/>
+        </p:nvSpPr>
+        <p:spPr>
+          <a:xfrm>
+            <a:off x="6172200" y="4343400"/>
+            <a:ext cx="548640" cy="548640"/>
+          </a:xfrm>
+          <a:prstGeom prst="ellipse">
+            <a:avLst/>
           </a:prstGeom>
           <a:solidFill>
-            <a:schemeClr val="bg2"/>
-          </a:solidFill>
-          <a:ln/>
-        </p:spPr>
-      </p:sp>
-      <p:sp>
-        <p:nvSpPr>
-          <p:cNvPr id="27" name="circle-318"/>
-          <p:cNvSpPr/>
-          <p:nvPr/>
-        </p:nvSpPr>
-        <p:spPr>
-          <a:xfrm>
-            <a:off x="8366760" y="3657600"/>
-            <a:ext cx="548640" cy="548640"/>
-          </a:xfrm>
-          <a:prstGeom prst="ellipse">
-            <a:avLst/>
-          </a:prstGeom>
-          <a:solidFill>
-            <a:schemeClr val="accent1"/>
+            <a:schemeClr val="accent3"/>
           </a:solidFill>
           <a:ln/>
         </p:spPr>
       </p:sp>
       <p:pic>
         <p:nvPicPr>
-          <p:cNvPr id="28" name="icon-319" descr="preencoded.png">    </p:cNvPr>
+          <p:cNvPr id="27" name="icon-343" descr="preencoded.png">    </p:cNvPr>
           <p:cNvPicPr>
             <a:picLocks noChangeAspect="1"/>
           </p:cNvPicPr>
@@ -6760,7 +6662,7 @@
         </p:blipFill>
         <p:spPr>
           <a:xfrm>
-            <a:off x="8503920" y="3794760"/>
+            <a:off x="6309360" y="4480560"/>
             <a:ext cx="274320" cy="274320"/>
           </a:xfrm>
           <a:prstGeom prst="rect">
@@ -6770,14 +6672,14 @@
       </p:pic>
       <p:sp>
         <p:nvSpPr>
-          <p:cNvPr id="29" name="text-320"/>
-          <p:cNvSpPr txBox="1"/>
-          <p:nvPr/>
-        </p:nvSpPr>
-        <p:spPr>
-          <a:xfrm>
-            <a:off x="9052560" y="3657600"/>
-            <a:ext cx="2423160" cy="548640"/>
+          <p:cNvPr id="28" name="text-344"/>
+          <p:cNvSpPr txBox="1"/>
+          <p:nvPr/>
+        </p:nvSpPr>
+        <p:spPr>
+          <a:xfrm>
+            <a:off x="6903720" y="4297680"/>
+            <a:ext cx="4709160" cy="411480"/>
           </a:xfrm>
           <a:prstGeom prst="rect">
             <a:avLst/>
@@ -6793,27 +6695,27 @@
               <a:buNone/>
             </a:pPr>
             <a:r>
-              <a:rPr lang="en-US" sz="1600" b="1" dirty="0">
+              <a:rPr lang="en-US" sz="1700" b="1" dirty="0">
                 <a:solidFill>
                   <a:schemeClr val="tx1"/>
                 </a:solidFill>
               </a:rPr>
-              <a:t>Consistencia eventual</a:t>
-            </a:r>
-            <a:endParaRPr lang="en-US" sz="1600" dirty="0"/>
-          </a:p>
-        </p:txBody>
-      </p:sp>
-      <p:sp>
-        <p:nvSpPr>
-          <p:cNvPr id="30" name="text-321"/>
-          <p:cNvSpPr txBox="1"/>
-          <p:nvPr/>
-        </p:nvSpPr>
-        <p:spPr>
-          <a:xfrm>
-            <a:off x="8366760" y="4389120"/>
-            <a:ext cx="3017520" cy="1645920"/>
+              <a:t>Se puede ver qué pasa</a:t>
+            </a:r>
+            <a:endParaRPr lang="en-US" sz="1700" dirty="0"/>
+          </a:p>
+        </p:txBody>
+      </p:sp>
+      <p:sp>
+        <p:nvSpPr>
+          <p:cNvPr id="29" name="text-345"/>
+          <p:cNvSpPr txBox="1"/>
+          <p:nvPr/>
+        </p:nvSpPr>
+        <p:spPr>
+          <a:xfrm>
+            <a:off x="6903720" y="4754880"/>
+            <a:ext cx="4709160" cy="868680"/>
           </a:xfrm>
           <a:prstGeom prst="rect">
             <a:avLst/>
@@ -6829,14 +6731,14 @@
               <a:buNone/>
             </a:pPr>
             <a:r>
-              <a:rPr lang="en-US" sz="1400" dirty="0">
+              <a:rPr lang="en-US" sz="1500" dirty="0">
                 <a:solidFill>
                   <a:schemeClr val="tx1"/>
                 </a:solidFill>
               </a:rPr>
-              <a:t>El mensaje llega un momento después del 201, por eso la campana espera 1,5 s antes de recargar.</a:t>
-            </a:r>
-            <a:endParaRPr lang="en-US" sz="1400" dirty="0"/>
+              <a:t>El panel web de RabbitMQ (localhost:15672) muestra las colas y los mensajes, y cada servicio deja un log.</a:t>
+            </a:r>
+            <a:endParaRPr lang="en-US" sz="1500" dirty="0"/>
           </a:p>
         </p:txBody>
       </p:sp>
@@ -6939,10 +6841,10 @@
             <a:r>
               <a:rPr lang="en-US" sz="3200" b="1" dirty="0">
                 <a:solidFill>
-                  <a:schemeClr val="tx1"/>
-                </a:solidFill>
-              </a:rPr>
-              <a:t>Despliegue y orden de arranque</a:t>
+                  <a:schemeClr val="bg1"/>
+                </a:solidFill>
+              </a:rPr>
+              <a:t>Lo que hay que llevarse</a:t>
             </a:r>
             <a:endParaRPr lang="en-US" sz="3200" dirty="0"/>
           </a:p>
@@ -6950,183 +6852,17 @@
       </p:sp>
       <p:sp>
         <p:nvSpPr>
-          <p:cNvPr id="3" name="box-322"/>
-          <p:cNvSpPr/>
-          <p:nvPr/>
-        </p:nvSpPr>
-        <p:spPr>
-          <a:xfrm>
-            <a:off x="548640" y="1280160"/>
-            <a:ext cx="5120640" cy="640080"/>
-          </a:xfrm>
-          <a:prstGeom prst="roundRect">
-            <a:avLst>
-              <a:gd name="adj" fmla="val 17143"/>
-            </a:avLst>
-          </a:prstGeom>
-          <a:solidFill>
-            <a:schemeClr val="tx2"/>
-          </a:solidFill>
-          <a:ln/>
-        </p:spPr>
-      </p:sp>
-      <p:sp>
-        <p:nvSpPr>
-          <p:cNvPr id="4" name="label-323"/>
-          <p:cNvSpPr txBox="1"/>
-          <p:nvPr/>
-        </p:nvSpPr>
-        <p:spPr>
-          <a:xfrm>
-            <a:off x="548640" y="1280160"/>
-            <a:ext cx="5120640" cy="640080"/>
-          </a:xfrm>
-          <a:prstGeom prst="rect">
-            <a:avLst/>
-          </a:prstGeom>
-          <a:noFill/>
-          <a:ln/>
-        </p:spPr>
-        <p:txBody>
-          <a:bodyPr wrap="square" lIns="762" tIns="762" rIns="762" bIns="762" rtlCol="0" anchor="ctr"/>
-          <a:lstStyle/>
-          <a:p>
-            <a:pPr algn="ctr" indent="0" marL="0">
-              <a:buNone/>
-            </a:pPr>
-            <a:r>
-              <a:rPr lang="en-US" sz="1500" b="1" dirty="0">
-                <a:solidFill>
-                  <a:schemeClr val="bg1"/>
-                </a:solidFill>
-              </a:rPr>
-              <a:t>mysql · rabbitmq</a:t>
-            </a:r>
-            <a:endParaRPr lang="en-US" sz="1500" dirty="0"/>
-          </a:p>
-        </p:txBody>
-      </p:sp>
-      <p:sp>
-        <p:nvSpPr>
-          <p:cNvPr id="5" name="arrow-324"/>
-          <p:cNvSpPr/>
-          <p:nvPr/>
-        </p:nvSpPr>
-        <p:spPr>
-          <a:xfrm>
-            <a:off x="3108960" y="1920240"/>
-            <a:ext cx="914" cy="274320"/>
-          </a:xfrm>
-          <a:prstGeom prst="line">
-            <a:avLst/>
-          </a:prstGeom>
-          <a:noFill/>
-          <a:ln w="19050">
-            <a:solidFill>
-              <a:schemeClr val="accent6"/>
-            </a:solidFill>
-            <a:prstDash val="solid"/>
-            <a:tailEnd type="triangle"/>
-          </a:ln>
-        </p:spPr>
-      </p:sp>
-      <p:sp>
-        <p:nvSpPr>
-          <p:cNvPr id="6" name="box-325"/>
-          <p:cNvSpPr/>
-          <p:nvPr/>
-        </p:nvSpPr>
-        <p:spPr>
-          <a:xfrm>
-            <a:off x="548640" y="2194560"/>
-            <a:ext cx="5120640" cy="640080"/>
-          </a:xfrm>
-          <a:prstGeom prst="roundRect">
-            <a:avLst>
-              <a:gd name="adj" fmla="val 17143"/>
-            </a:avLst>
-          </a:prstGeom>
-          <a:solidFill>
-            <a:schemeClr val="accent2"/>
-          </a:solidFill>
-          <a:ln/>
-        </p:spPr>
-      </p:sp>
-      <p:sp>
-        <p:nvSpPr>
-          <p:cNvPr id="7" name="label-326"/>
-          <p:cNvSpPr txBox="1"/>
-          <p:nvPr/>
-        </p:nvSpPr>
-        <p:spPr>
-          <a:xfrm>
-            <a:off x="548640" y="2194560"/>
-            <a:ext cx="5120640" cy="640080"/>
-          </a:xfrm>
-          <a:prstGeom prst="rect">
-            <a:avLst/>
-          </a:prstGeom>
-          <a:noFill/>
-          <a:ln/>
-        </p:spPr>
-        <p:txBody>
-          <a:bodyPr wrap="square" lIns="762" tIns="762" rIns="762" bIns="762" rtlCol="0" anchor="ctr"/>
-          <a:lstStyle/>
-          <a:p>
-            <a:pPr algn="ctr" indent="0" marL="0">
-              <a:buNone/>
-            </a:pPr>
-            <a:r>
-              <a:rPr lang="en-US" sz="1500" b="1" dirty="0">
-                <a:solidFill>
-                  <a:schemeClr val="bg1"/>
-                </a:solidFill>
-              </a:rPr>
-              <a:t>ms-gimnasios · ms-notificaciones · ms-usuarios</a:t>
-            </a:r>
-            <a:endParaRPr lang="en-US" sz="1500" dirty="0"/>
-          </a:p>
-        </p:txBody>
-      </p:sp>
-      <p:sp>
-        <p:nvSpPr>
-          <p:cNvPr id="8" name="arrow-327"/>
-          <p:cNvSpPr/>
-          <p:nvPr/>
-        </p:nvSpPr>
-        <p:spPr>
-          <a:xfrm>
-            <a:off x="3108960" y="2834640"/>
-            <a:ext cx="914" cy="274320"/>
-          </a:xfrm>
-          <a:prstGeom prst="line">
-            <a:avLst/>
-          </a:prstGeom>
-          <a:noFill/>
-          <a:ln w="19050">
-            <a:solidFill>
-              <a:schemeClr val="accent6"/>
-            </a:solidFill>
-            <a:prstDash val="solid"/>
-            <a:tailEnd type="triangle"/>
-          </a:ln>
-        </p:spPr>
-      </p:sp>
-      <p:sp>
-        <p:nvSpPr>
-          <p:cNvPr id="9" name="box-328"/>
-          <p:cNvSpPr/>
-          <p:nvPr/>
-        </p:nvSpPr>
-        <p:spPr>
-          <a:xfrm>
-            <a:off x="548640" y="3108960"/>
-            <a:ext cx="5120640" cy="640080"/>
-          </a:xfrm>
-          <a:prstGeom prst="roundRect">
-            <a:avLst>
-              <a:gd name="adj" fmla="val 17143"/>
-            </a:avLst>
+          <p:cNvPr id="3" name="circle-346"/>
+          <p:cNvSpPr/>
+          <p:nvPr/>
+        </p:nvSpPr>
+        <p:spPr>
+          <a:xfrm>
+            <a:off x="548640" y="1371600"/>
+            <a:ext cx="685800" cy="685800"/>
+          </a:xfrm>
+          <a:prstGeom prst="ellipse">
+            <a:avLst/>
           </a:prstGeom>
           <a:solidFill>
             <a:schemeClr val="accent1"/>
@@ -7134,265 +6870,9 @@
           <a:ln/>
         </p:spPr>
       </p:sp>
-      <p:sp>
-        <p:nvSpPr>
-          <p:cNvPr id="10" name="label-329"/>
-          <p:cNvSpPr txBox="1"/>
-          <p:nvPr/>
-        </p:nvSpPr>
-        <p:spPr>
-          <a:xfrm>
-            <a:off x="548640" y="3108960"/>
-            <a:ext cx="5120640" cy="640080"/>
-          </a:xfrm>
-          <a:prstGeom prst="rect">
-            <a:avLst/>
-          </a:prstGeom>
-          <a:noFill/>
-          <a:ln/>
-        </p:spPr>
-        <p:txBody>
-          <a:bodyPr wrap="square" lIns="762" tIns="762" rIns="762" bIns="762" rtlCol="0" anchor="ctr"/>
-          <a:lstStyle/>
-          <a:p>
-            <a:pPr algn="ctr" indent="0" marL="0">
-              <a:buNone/>
-            </a:pPr>
-            <a:r>
-              <a:rPr lang="en-US" sz="1500" b="1" dirty="0">
-                <a:solidFill>
-                  <a:schemeClr val="bg1"/>
-                </a:solidFill>
-              </a:rPr>
-              <a:t>ms-reservas</a:t>
-            </a:r>
-            <a:endParaRPr lang="en-US" sz="1500" dirty="0"/>
-          </a:p>
-        </p:txBody>
-      </p:sp>
-      <p:sp>
-        <p:nvSpPr>
-          <p:cNvPr id="11" name="arrow-330"/>
-          <p:cNvSpPr/>
-          <p:nvPr/>
-        </p:nvSpPr>
-        <p:spPr>
-          <a:xfrm>
-            <a:off x="3108960" y="3749040"/>
-            <a:ext cx="914" cy="274320"/>
-          </a:xfrm>
-          <a:prstGeom prst="line">
-            <a:avLst/>
-          </a:prstGeom>
-          <a:noFill/>
-          <a:ln w="19050">
-            <a:solidFill>
-              <a:schemeClr val="accent6"/>
-            </a:solidFill>
-            <a:prstDash val="solid"/>
-            <a:tailEnd type="triangle"/>
-          </a:ln>
-        </p:spPr>
-      </p:sp>
-      <p:sp>
-        <p:nvSpPr>
-          <p:cNvPr id="12" name="box-331"/>
-          <p:cNvSpPr/>
-          <p:nvPr/>
-        </p:nvSpPr>
-        <p:spPr>
-          <a:xfrm>
-            <a:off x="548640" y="4023360"/>
-            <a:ext cx="5120640" cy="640080"/>
-          </a:xfrm>
-          <a:prstGeom prst="roundRect">
-            <a:avLst>
-              <a:gd name="adj" fmla="val 17143"/>
-            </a:avLst>
-          </a:prstGeom>
-          <a:solidFill>
-            <a:schemeClr val="accent6"/>
-          </a:solidFill>
-          <a:ln/>
-        </p:spPr>
-      </p:sp>
-      <p:sp>
-        <p:nvSpPr>
-          <p:cNvPr id="13" name="label-332"/>
-          <p:cNvSpPr txBox="1"/>
-          <p:nvPr/>
-        </p:nvSpPr>
-        <p:spPr>
-          <a:xfrm>
-            <a:off x="548640" y="4023360"/>
-            <a:ext cx="5120640" cy="640080"/>
-          </a:xfrm>
-          <a:prstGeom prst="rect">
-            <a:avLst/>
-          </a:prstGeom>
-          <a:noFill/>
-          <a:ln/>
-        </p:spPr>
-        <p:txBody>
-          <a:bodyPr wrap="square" lIns="762" tIns="762" rIns="762" bIns="762" rtlCol="0" anchor="ctr"/>
-          <a:lstStyle/>
-          <a:p>
-            <a:pPr algn="ctr" indent="0" marL="0">
-              <a:buNone/>
-            </a:pPr>
-            <a:r>
-              <a:rPr lang="en-US" sz="1500" b="1" dirty="0">
-                <a:solidFill>
-                  <a:schemeClr val="bg1"/>
-                </a:solidFill>
-              </a:rPr>
-              <a:t>api-gateway</a:t>
-            </a:r>
-            <a:endParaRPr lang="en-US" sz="1500" dirty="0"/>
-          </a:p>
-        </p:txBody>
-      </p:sp>
-      <p:sp>
-        <p:nvSpPr>
-          <p:cNvPr id="14" name="arrow-333"/>
-          <p:cNvSpPr/>
-          <p:nvPr/>
-        </p:nvSpPr>
-        <p:spPr>
-          <a:xfrm>
-            <a:off x="3108960" y="4663440"/>
-            <a:ext cx="914" cy="274320"/>
-          </a:xfrm>
-          <a:prstGeom prst="line">
-            <a:avLst/>
-          </a:prstGeom>
-          <a:noFill/>
-          <a:ln w="19050">
-            <a:solidFill>
-              <a:schemeClr val="accent6"/>
-            </a:solidFill>
-            <a:prstDash val="solid"/>
-            <a:tailEnd type="triangle"/>
-          </a:ln>
-        </p:spPr>
-      </p:sp>
-      <p:sp>
-        <p:nvSpPr>
-          <p:cNvPr id="15" name="box-334"/>
-          <p:cNvSpPr/>
-          <p:nvPr/>
-        </p:nvSpPr>
-        <p:spPr>
-          <a:xfrm>
-            <a:off x="548640" y="4937760"/>
-            <a:ext cx="5120640" cy="640080"/>
-          </a:xfrm>
-          <a:prstGeom prst="roundRect">
-            <a:avLst>
-              <a:gd name="adj" fmla="val 17143"/>
-            </a:avLst>
-          </a:prstGeom>
-          <a:solidFill>
-            <a:schemeClr val="accent5"/>
-          </a:solidFill>
-          <a:ln/>
-        </p:spPr>
-      </p:sp>
-      <p:sp>
-        <p:nvSpPr>
-          <p:cNvPr id="16" name="label-335"/>
-          <p:cNvSpPr txBox="1"/>
-          <p:nvPr/>
-        </p:nvSpPr>
-        <p:spPr>
-          <a:xfrm>
-            <a:off x="548640" y="4937760"/>
-            <a:ext cx="5120640" cy="640080"/>
-          </a:xfrm>
-          <a:prstGeom prst="rect">
-            <a:avLst/>
-          </a:prstGeom>
-          <a:noFill/>
-          <a:ln/>
-        </p:spPr>
-        <p:txBody>
-          <a:bodyPr wrap="square" lIns="762" tIns="762" rIns="762" bIns="762" rtlCol="0" anchor="ctr"/>
-          <a:lstStyle/>
-          <a:p>
-            <a:pPr algn="ctr" indent="0" marL="0">
-              <a:buNone/>
-            </a:pPr>
-            <a:r>
-              <a:rPr lang="en-US" sz="1500" b="1" dirty="0">
-                <a:solidFill>
-                  <a:schemeClr val="bg1"/>
-                </a:solidFill>
-              </a:rPr>
-              <a:t>frontend (nginx)</a:t>
-            </a:r>
-            <a:endParaRPr lang="en-US" sz="1500" dirty="0"/>
-          </a:p>
-        </p:txBody>
-      </p:sp>
-      <p:sp>
-        <p:nvSpPr>
-          <p:cNvPr id="17" name="text-336"/>
-          <p:cNvSpPr txBox="1"/>
-          <p:nvPr/>
-        </p:nvSpPr>
-        <p:spPr>
-          <a:xfrm>
-            <a:off x="548640" y="5715000"/>
-            <a:ext cx="5120640" cy="457200"/>
-          </a:xfrm>
-          <a:prstGeom prst="rect">
-            <a:avLst/>
-          </a:prstGeom>
-          <a:noFill/>
-          <a:ln/>
-        </p:spPr>
-        <p:txBody>
-          <a:bodyPr wrap="square" lIns="0" tIns="0" rIns="0" bIns="0" rtlCol="0" anchor="t"/>
-          <a:lstStyle/>
-          <a:p>
-            <a:pPr algn="l" indent="0" marL="0">
-              <a:buNone/>
-            </a:pPr>
-            <a:r>
-              <a:rPr lang="en-US" sz="1100" dirty="0">
-                <a:solidFill>
-                  <a:schemeClr val="accent6"/>
-                </a:solidFill>
-              </a:rPr>
-              <a:t>docker compose: cada servicio espera a que el anterior esté healthy (depends_on + healthcheck)</a:t>
-            </a:r>
-            <a:endParaRPr lang="en-US" sz="1100" dirty="0"/>
-          </a:p>
-        </p:txBody>
-      </p:sp>
-      <p:sp>
-        <p:nvSpPr>
-          <p:cNvPr id="18" name="circle-337"/>
-          <p:cNvSpPr/>
-          <p:nvPr/>
-        </p:nvSpPr>
-        <p:spPr>
-          <a:xfrm>
-            <a:off x="6172200" y="1325880"/>
-            <a:ext cx="548640" cy="548640"/>
-          </a:xfrm>
-          <a:prstGeom prst="ellipse">
-            <a:avLst/>
-          </a:prstGeom>
-          <a:solidFill>
-            <a:schemeClr val="accent2"/>
-          </a:solidFill>
-          <a:ln/>
-        </p:spPr>
-      </p:sp>
       <p:pic>
         <p:nvPicPr>
-          <p:cNvPr id="19" name="icon-338" descr="preencoded.png">    </p:cNvPr>
+          <p:cNvPr id="4" name="icon-347" descr="preencoded.png">    </p:cNvPr>
           <p:cNvPicPr>
             <a:picLocks noChangeAspect="1"/>
           </p:cNvPicPr>
@@ -7406,8 +6886,8 @@
         </p:blipFill>
         <p:spPr>
           <a:xfrm>
-            <a:off x="6309360" y="1463040"/>
-            <a:ext cx="274320" cy="274320"/>
+            <a:off x="720090" y="1543050"/>
+            <a:ext cx="342900" cy="342900"/>
           </a:xfrm>
           <a:prstGeom prst="rect">
             <a:avLst/>
@@ -7416,14 +6896,14 @@
       </p:pic>
       <p:sp>
         <p:nvSpPr>
-          <p:cNvPr id="20" name="text-339"/>
-          <p:cNvSpPr txBox="1"/>
-          <p:nvPr/>
-        </p:nvSpPr>
-        <p:spPr>
-          <a:xfrm>
-            <a:off x="6903720" y="1280160"/>
-            <a:ext cx="4709160" cy="411480"/>
+          <p:cNvPr id="5" name="text-348"/>
+          <p:cNvSpPr txBox="1"/>
+          <p:nvPr/>
+        </p:nvSpPr>
+        <p:spPr>
+          <a:xfrm>
+            <a:off x="1463040" y="1353312"/>
+            <a:ext cx="4480560" cy="457200"/>
           </a:xfrm>
           <a:prstGeom prst="rect">
             <a:avLst/>
@@ -7439,27 +6919,27 @@
               <a:buNone/>
             </a:pPr>
             <a:r>
-              <a:rPr lang="en-US" sz="1600" b="1" dirty="0">
-                <a:solidFill>
-                  <a:schemeClr val="tx1"/>
-                </a:solidFill>
-              </a:rPr>
-              <a:t>Los consumidores primero</a:t>
-            </a:r>
-            <a:endParaRPr lang="en-US" sz="1600" dirty="0"/>
-          </a:p>
-        </p:txBody>
-      </p:sp>
-      <p:sp>
-        <p:nvSpPr>
-          <p:cNvPr id="21" name="text-340"/>
-          <p:cNvSpPr txBox="1"/>
-          <p:nvPr/>
-        </p:nvSpPr>
-        <p:spPr>
-          <a:xfrm>
-            <a:off x="6903720" y="1691640"/>
-            <a:ext cx="4709160" cy="777240"/>
+              <a:rPr lang="en-US" sz="1900" b="1" dirty="0">
+                <a:solidFill>
+                  <a:schemeClr val="bg1"/>
+                </a:solidFill>
+              </a:rPr>
+              <a:t>Servicios independientes</a:t>
+            </a:r>
+            <a:endParaRPr lang="en-US" sz="1900" dirty="0"/>
+          </a:p>
+        </p:txBody>
+      </p:sp>
+      <p:sp>
+        <p:nvSpPr>
+          <p:cNvPr id="6" name="text-349"/>
+          <p:cNvSpPr txBox="1"/>
+          <p:nvPr/>
+        </p:nvSpPr>
+        <p:spPr>
+          <a:xfrm>
+            <a:off x="1463040" y="1828800"/>
+            <a:ext cx="4480560" cy="777240"/>
           </a:xfrm>
           <a:prstGeom prst="rect">
             <a:avLst/>
@@ -7475,40 +6955,40 @@
               <a:buNone/>
             </a:pPr>
             <a:r>
-              <a:rPr lang="en-US" sz="1400" dirty="0">
-                <a:solidFill>
-                  <a:schemeClr val="tx1"/>
-                </a:solidFill>
-              </a:rPr>
-              <a:t>Ellos declaran sus colas. Si ms-reservas publica antes, el mensaje no tiene cola y solo queda el log.warn.</a:t>
-            </a:r>
-            <a:endParaRPr lang="en-US" sz="1400" dirty="0"/>
-          </a:p>
-        </p:txBody>
-      </p:sp>
-      <p:sp>
-        <p:nvSpPr>
-          <p:cNvPr id="22" name="circle-341"/>
-          <p:cNvSpPr/>
-          <p:nvPr/>
-        </p:nvSpPr>
-        <p:spPr>
-          <a:xfrm>
-            <a:off x="6172200" y="2532888"/>
-            <a:ext cx="548640" cy="548640"/>
+              <a:rPr lang="en-US" sz="1500" dirty="0">
+                <a:solidFill>
+                  <a:schemeClr val="bg2"/>
+                </a:solidFill>
+              </a:rPr>
+              <a:t>ms-reservas avisa lo que pasó y no necesita saber quién escucha.</a:t>
+            </a:r>
+            <a:endParaRPr lang="en-US" sz="1500" dirty="0"/>
+          </a:p>
+        </p:txBody>
+      </p:sp>
+      <p:sp>
+        <p:nvSpPr>
+          <p:cNvPr id="7" name="circle-350"/>
+          <p:cNvSpPr/>
+          <p:nvPr/>
+        </p:nvSpPr>
+        <p:spPr>
+          <a:xfrm>
+            <a:off x="6172200" y="1371600"/>
+            <a:ext cx="685800" cy="685800"/>
           </a:xfrm>
           <a:prstGeom prst="ellipse">
             <a:avLst/>
           </a:prstGeom>
           <a:solidFill>
-            <a:schemeClr val="accent4"/>
+            <a:schemeClr val="accent1"/>
           </a:solidFill>
           <a:ln/>
         </p:spPr>
       </p:sp>
       <p:pic>
         <p:nvPicPr>
-          <p:cNvPr id="23" name="icon-342" descr="preencoded.png">    </p:cNvPr>
+          <p:cNvPr id="8" name="icon-351" descr="preencoded.png">    </p:cNvPr>
           <p:cNvPicPr>
             <a:picLocks noChangeAspect="1"/>
           </p:cNvPicPr>
@@ -7522,8 +7002,8 @@
         </p:blipFill>
         <p:spPr>
           <a:xfrm>
-            <a:off x="6309360" y="2670048"/>
-            <a:ext cx="274320" cy="274320"/>
+            <a:off x="6343650" y="1543050"/>
+            <a:ext cx="342900" cy="342900"/>
           </a:xfrm>
           <a:prstGeom prst="rect">
             <a:avLst/>
@@ -7532,14 +7012,14 @@
       </p:pic>
       <p:sp>
         <p:nvSpPr>
-          <p:cNvPr id="24" name="text-343"/>
-          <p:cNvSpPr txBox="1"/>
-          <p:nvPr/>
-        </p:nvSpPr>
-        <p:spPr>
-          <a:xfrm>
-            <a:off x="6903720" y="2487168"/>
-            <a:ext cx="4709160" cy="411480"/>
+          <p:cNvPr id="9" name="text-352"/>
+          <p:cNvSpPr txBox="1"/>
+          <p:nvPr/>
+        </p:nvSpPr>
+        <p:spPr>
+          <a:xfrm>
+            <a:off x="7086600" y="1353312"/>
+            <a:ext cx="4480560" cy="457200"/>
           </a:xfrm>
           <a:prstGeom prst="rect">
             <a:avLst/>
@@ -7555,27 +7035,27 @@
               <a:buNone/>
             </a:pPr>
             <a:r>
-              <a:rPr lang="en-US" sz="1600" b="1" dirty="0">
-                <a:solidFill>
-                  <a:schemeClr val="tx1"/>
-                </a:solidFill>
-              </a:rPr>
-              <a:t>Cambiar argumentos de una cola</a:t>
-            </a:r>
-            <a:endParaRPr lang="en-US" sz="1600" dirty="0"/>
-          </a:p>
-        </p:txBody>
-      </p:sp>
-      <p:sp>
-        <p:nvSpPr>
-          <p:cNvPr id="25" name="text-344"/>
-          <p:cNvSpPr txBox="1"/>
-          <p:nvPr/>
-        </p:nvSpPr>
-        <p:spPr>
-          <a:xfrm>
-            <a:off x="6903720" y="2898648"/>
-            <a:ext cx="4709160" cy="777240"/>
+              <a:rPr lang="en-US" sz="1900" b="1" dirty="0">
+                <a:solidFill>
+                  <a:schemeClr val="bg1"/>
+                </a:solidFill>
+              </a:rPr>
+              <a:t>Una cola por servicio</a:t>
+            </a:r>
+            <a:endParaRPr lang="en-US" sz="1900" dirty="0"/>
+          </a:p>
+        </p:txBody>
+      </p:sp>
+      <p:sp>
+        <p:nvSpPr>
+          <p:cNvPr id="10" name="text-353"/>
+          <p:cNvSpPr txBox="1"/>
+          <p:nvPr/>
+        </p:nvSpPr>
+        <p:spPr>
+          <a:xfrm>
+            <a:off x="7086600" y="1828800"/>
+            <a:ext cx="4480560" cy="777240"/>
           </a:xfrm>
           <a:prstGeom prst="rect">
             <a:avLst/>
@@ -7591,27 +7071,27 @@
               <a:buNone/>
             </a:pPr>
             <a:r>
-              <a:rPr lang="en-US" sz="1400" dirty="0">
-                <a:solidFill>
-                  <a:schemeClr val="tx1"/>
-                </a:solidFill>
-              </a:rPr>
-              <a:t>RabbitMQ rechaza redeclararla (PRECONDITION_FAILED). Hay que borrarla en el panel o usar docker compose down -v.</a:t>
-            </a:r>
-            <a:endParaRPr lang="en-US" sz="1400" dirty="0"/>
-          </a:p>
-        </p:txBody>
-      </p:sp>
-      <p:sp>
-        <p:nvSpPr>
-          <p:cNvPr id="26" name="circle-345"/>
-          <p:cNvSpPr/>
-          <p:nvPr/>
-        </p:nvSpPr>
-        <p:spPr>
-          <a:xfrm>
-            <a:off x="6172200" y="3739896"/>
-            <a:ext cx="548640" cy="548640"/>
+              <a:rPr lang="en-US" sz="1500" dirty="0">
+                <a:solidFill>
+                  <a:schemeClr val="bg2"/>
+                </a:solidFill>
+              </a:rPr>
+              <a:t>Cada servicio que escucha recibe su propia copia del mensaje.</a:t>
+            </a:r>
+            <a:endParaRPr lang="en-US" sz="1500" dirty="0"/>
+          </a:p>
+        </p:txBody>
+      </p:sp>
+      <p:sp>
+        <p:nvSpPr>
+          <p:cNvPr id="11" name="circle-354"/>
+          <p:cNvSpPr/>
+          <p:nvPr/>
+        </p:nvSpPr>
+        <p:spPr>
+          <a:xfrm>
+            <a:off x="548640" y="2971800"/>
+            <a:ext cx="685800" cy="685800"/>
           </a:xfrm>
           <a:prstGeom prst="ellipse">
             <a:avLst/>
@@ -7624,7 +7104,7 @@
       </p:sp>
       <p:pic>
         <p:nvPicPr>
-          <p:cNvPr id="27" name="icon-346" descr="preencoded.png">    </p:cNvPr>
+          <p:cNvPr id="12" name="icon-355" descr="preencoded.png">    </p:cNvPr>
           <p:cNvPicPr>
             <a:picLocks noChangeAspect="1"/>
           </p:cNvPicPr>
@@ -7638,8 +7118,8 @@
         </p:blipFill>
         <p:spPr>
           <a:xfrm>
-            <a:off x="6309360" y="3877056"/>
-            <a:ext cx="274320" cy="274320"/>
+            <a:off x="720090" y="3143250"/>
+            <a:ext cx="342900" cy="342900"/>
           </a:xfrm>
           <a:prstGeom prst="rect">
             <a:avLst/>
@@ -7648,14 +7128,14 @@
       </p:pic>
       <p:sp>
         <p:nvSpPr>
-          <p:cNvPr id="28" name="text-347"/>
-          <p:cNvSpPr txBox="1"/>
-          <p:nvPr/>
-        </p:nvSpPr>
-        <p:spPr>
-          <a:xfrm>
-            <a:off x="6903720" y="3694176"/>
-            <a:ext cx="4709160" cy="411480"/>
+          <p:cNvPr id="13" name="text-356"/>
+          <p:cNvSpPr txBox="1"/>
+          <p:nvPr/>
+        </p:nvSpPr>
+        <p:spPr>
+          <a:xfrm>
+            <a:off x="1463040" y="2953512"/>
+            <a:ext cx="4480560" cy="457200"/>
           </a:xfrm>
           <a:prstGeom prst="rect">
             <a:avLst/>
@@ -7671,27 +7151,27 @@
               <a:buNone/>
             </a:pPr>
             <a:r>
-              <a:rPr lang="en-US" sz="1600" b="1" dirty="0">
-                <a:solidFill>
-                  <a:schemeClr val="tx1"/>
-                </a:solidFill>
-              </a:rPr>
-              <a:t>Datos persistentes</a:t>
-            </a:r>
-            <a:endParaRPr lang="en-US" sz="1600" dirty="0"/>
-          </a:p>
-        </p:txBody>
-      </p:sp>
-      <p:sp>
-        <p:nvSpPr>
-          <p:cNvPr id="29" name="text-348"/>
-          <p:cNvSpPr txBox="1"/>
-          <p:nvPr/>
-        </p:nvSpPr>
-        <p:spPr>
-          <a:xfrm>
-            <a:off x="6903720" y="4105656"/>
-            <a:ext cx="4709160" cy="777240"/>
+              <a:rPr lang="en-US" sz="1900" b="1" dirty="0">
+                <a:solidFill>
+                  <a:schemeClr val="bg1"/>
+                </a:solidFill>
+              </a:rPr>
+              <a:t>Sin avisos falsos</a:t>
+            </a:r>
+            <a:endParaRPr lang="en-US" sz="1900" dirty="0"/>
+          </a:p>
+        </p:txBody>
+      </p:sp>
+      <p:sp>
+        <p:nvSpPr>
+          <p:cNvPr id="14" name="text-357"/>
+          <p:cNvSpPr txBox="1"/>
+          <p:nvPr/>
+        </p:nvSpPr>
+        <p:spPr>
+          <a:xfrm>
+            <a:off x="1463040" y="3429000"/>
+            <a:ext cx="4480560" cy="777240"/>
           </a:xfrm>
           <a:prstGeom prst="rect">
             <a:avLst/>
@@ -7707,40 +7187,40 @@
               <a:buNone/>
             </a:pPr>
             <a:r>
-              <a:rPr lang="en-US" sz="1400" dirty="0">
-                <a:solidFill>
-                  <a:schemeClr val="tx1"/>
-                </a:solidFill>
-              </a:rPr>
-              <a:t>Volúmenes mysql-data y rabbitmq-data: los mensajes y las DLQ sobreviven a docker compose down.</a:t>
-            </a:r>
-            <a:endParaRPr lang="en-US" sz="1400" dirty="0"/>
-          </a:p>
-        </p:txBody>
-      </p:sp>
-      <p:sp>
-        <p:nvSpPr>
-          <p:cNvPr id="30" name="circle-349"/>
-          <p:cNvSpPr/>
-          <p:nvPr/>
-        </p:nvSpPr>
-        <p:spPr>
-          <a:xfrm>
-            <a:off x="6172200" y="4946904"/>
-            <a:ext cx="548640" cy="548640"/>
+              <a:rPr lang="en-US" sz="1500" dirty="0">
+                <a:solidFill>
+                  <a:schemeClr val="bg2"/>
+                </a:solidFill>
+              </a:rPr>
+              <a:t>El mensaje solo sale si la reserva quedó guardada.</a:t>
+            </a:r>
+            <a:endParaRPr lang="en-US" sz="1500" dirty="0"/>
+          </a:p>
+        </p:txBody>
+      </p:sp>
+      <p:sp>
+        <p:nvSpPr>
+          <p:cNvPr id="15" name="circle-358"/>
+          <p:cNvSpPr/>
+          <p:nvPr/>
+        </p:nvSpPr>
+        <p:spPr>
+          <a:xfrm>
+            <a:off x="6172200" y="2971800"/>
+            <a:ext cx="685800" cy="685800"/>
           </a:xfrm>
           <a:prstGeom prst="ellipse">
             <a:avLst/>
           </a:prstGeom>
           <a:solidFill>
-            <a:schemeClr val="accent3"/>
+            <a:schemeClr val="accent1"/>
           </a:solidFill>
           <a:ln/>
         </p:spPr>
       </p:sp>
       <p:pic>
         <p:nvPicPr>
-          <p:cNvPr id="31" name="icon-350" descr="preencoded.png">    </p:cNvPr>
+          <p:cNvPr id="16" name="icon-359" descr="preencoded.png">    </p:cNvPr>
           <p:cNvPicPr>
             <a:picLocks noChangeAspect="1"/>
           </p:cNvPicPr>
@@ -7754,8 +7234,8 @@
         </p:blipFill>
         <p:spPr>
           <a:xfrm>
-            <a:off x="6309360" y="5084064"/>
-            <a:ext cx="274320" cy="274320"/>
+            <a:off x="6343650" y="3143250"/>
+            <a:ext cx="342900" cy="342900"/>
           </a:xfrm>
           <a:prstGeom prst="rect">
             <a:avLst/>
@@ -7764,14 +7244,14 @@
       </p:pic>
       <p:sp>
         <p:nvSpPr>
-          <p:cNvPr id="32" name="text-351"/>
-          <p:cNvSpPr txBox="1"/>
-          <p:nvPr/>
-        </p:nvSpPr>
-        <p:spPr>
-          <a:xfrm>
-            <a:off x="6903720" y="4901184"/>
-            <a:ext cx="4709160" cy="411480"/>
+          <p:cNvPr id="17" name="text-360"/>
+          <p:cNvSpPr txBox="1"/>
+          <p:nvPr/>
+        </p:nvSpPr>
+        <p:spPr>
+          <a:xfrm>
+            <a:off x="7086600" y="2953512"/>
+            <a:ext cx="4480560" cy="457200"/>
           </a:xfrm>
           <a:prstGeom prst="rect">
             <a:avLst/>
@@ -7787,27 +7267,27 @@
               <a:buNone/>
             </a:pPr>
             <a:r>
-              <a:rPr lang="en-US" sz="1600" b="1" dirty="0">
-                <a:solidFill>
-                  <a:schemeClr val="tx1"/>
-                </a:solidFill>
-              </a:rPr>
-              <a:t>Observabilidad</a:t>
-            </a:r>
-            <a:endParaRPr lang="en-US" sz="1600" dirty="0"/>
-          </a:p>
-        </p:txBody>
-      </p:sp>
-      <p:sp>
-        <p:nvSpPr>
-          <p:cNvPr id="33" name="text-352"/>
-          <p:cNvSpPr txBox="1"/>
-          <p:nvPr/>
-        </p:nvSpPr>
-        <p:spPr>
-          <a:xfrm>
-            <a:off x="6903720" y="5312664"/>
-            <a:ext cx="4709160" cy="777240"/>
+              <a:rPr lang="en-US" sz="1900" b="1" dirty="0">
+                <a:solidFill>
+                  <a:schemeClr val="bg1"/>
+                </a:solidFill>
+              </a:rPr>
+              <a:t>Sin duplicados</a:t>
+            </a:r>
+            <a:endParaRPr lang="en-US" sz="1900" dirty="0"/>
+          </a:p>
+        </p:txBody>
+      </p:sp>
+      <p:sp>
+        <p:nvSpPr>
+          <p:cNvPr id="18" name="text-361"/>
+          <p:cNvSpPr txBox="1"/>
+          <p:nvPr/>
+        </p:nvSpPr>
+        <p:spPr>
+          <a:xfrm>
+            <a:off x="7086600" y="3429000"/>
+            <a:ext cx="4480560" cy="777240"/>
           </a:xfrm>
           <a:prstGeom prst="rect">
             <a:avLst/>
@@ -7823,14 +7303,246 @@
               <a:buNone/>
             </a:pPr>
             <a:r>
-              <a:rPr lang="en-US" sz="1400" dirty="0">
-                <a:solidFill>
-                  <a:schemeClr val="tx1"/>
-                </a:solidFill>
-              </a:rPr>
-              <a:t>Panel en localhost:15672 y logs en logs/&lt;servicio&gt;.log con cada publicación, entrega y fallo.</a:t>
-            </a:r>
-            <a:endParaRPr lang="en-US" sz="1400" dirty="0"/>
+              <a:rPr lang="en-US" sz="1500" dirty="0">
+                <a:solidFill>
+                  <a:schemeClr val="bg2"/>
+                </a:solidFill>
+              </a:rPr>
+              <a:t>Un mensaje repetido no crea registros ni avisos dobles.</a:t>
+            </a:r>
+            <a:endParaRPr lang="en-US" sz="1500" dirty="0"/>
+          </a:p>
+        </p:txBody>
+      </p:sp>
+      <p:sp>
+        <p:nvSpPr>
+          <p:cNvPr id="19" name="circle-362"/>
+          <p:cNvSpPr/>
+          <p:nvPr/>
+        </p:nvSpPr>
+        <p:spPr>
+          <a:xfrm>
+            <a:off x="548640" y="4572000"/>
+            <a:ext cx="685800" cy="685800"/>
+          </a:xfrm>
+          <a:prstGeom prst="ellipse">
+            <a:avLst/>
+          </a:prstGeom>
+          <a:solidFill>
+            <a:schemeClr val="accent1"/>
+          </a:solidFill>
+          <a:ln/>
+        </p:spPr>
+      </p:sp>
+      <p:pic>
+        <p:nvPicPr>
+          <p:cNvPr id="20" name="icon-363" descr="preencoded.png">    </p:cNvPr>
+          <p:cNvPicPr>
+            <a:picLocks noChangeAspect="1"/>
+          </p:cNvPicPr>
+          <p:nvPr/>
+        </p:nvPicPr>
+        <p:blipFill>
+          <a:blip r:embed="rId5"/>
+          <a:stretch>
+            <a:fillRect/>
+          </a:stretch>
+        </p:blipFill>
+        <p:spPr>
+          <a:xfrm>
+            <a:off x="720090" y="4743450"/>
+            <a:ext cx="342900" cy="342900"/>
+          </a:xfrm>
+          <a:prstGeom prst="rect">
+            <a:avLst/>
+          </a:prstGeom>
+        </p:spPr>
+      </p:pic>
+      <p:sp>
+        <p:nvSpPr>
+          <p:cNvPr id="21" name="text-364"/>
+          <p:cNvSpPr txBox="1"/>
+          <p:nvPr/>
+        </p:nvSpPr>
+        <p:spPr>
+          <a:xfrm>
+            <a:off x="1463040" y="4553712"/>
+            <a:ext cx="4480560" cy="457200"/>
+          </a:xfrm>
+          <a:prstGeom prst="rect">
+            <a:avLst/>
+          </a:prstGeom>
+          <a:noFill/>
+          <a:ln/>
+        </p:spPr>
+        <p:txBody>
+          <a:bodyPr wrap="square" lIns="0" tIns="0" rIns="0" bIns="0" rtlCol="0" anchor="ctr"/>
+          <a:lstStyle/>
+          <a:p>
+            <a:pPr algn="l" indent="0" marL="0">
+              <a:buNone/>
+            </a:pPr>
+            <a:r>
+              <a:rPr lang="en-US" sz="1900" b="1" dirty="0">
+                <a:solidFill>
+                  <a:schemeClr val="bg1"/>
+                </a:solidFill>
+              </a:rPr>
+              <a:t>Errores controlados</a:t>
+            </a:r>
+            <a:endParaRPr lang="en-US" sz="1900" dirty="0"/>
+          </a:p>
+        </p:txBody>
+      </p:sp>
+      <p:sp>
+        <p:nvSpPr>
+          <p:cNvPr id="22" name="text-365"/>
+          <p:cNvSpPr txBox="1"/>
+          <p:nvPr/>
+        </p:nvSpPr>
+        <p:spPr>
+          <a:xfrm>
+            <a:off x="1463040" y="5029200"/>
+            <a:ext cx="4480560" cy="777240"/>
+          </a:xfrm>
+          <a:prstGeom prst="rect">
+            <a:avLst/>
+          </a:prstGeom>
+          <a:noFill/>
+          <a:ln/>
+        </p:spPr>
+        <p:txBody>
+          <a:bodyPr wrap="square" lIns="0" tIns="0" rIns="0" bIns="0" rtlCol="0" anchor="t"/>
+          <a:lstStyle/>
+          <a:p>
+            <a:pPr algn="l" indent="0" marL="0">
+              <a:buNone/>
+            </a:pPr>
+            <a:r>
+              <a:rPr lang="en-US" sz="1500" dirty="0">
+                <a:solidFill>
+                  <a:schemeClr val="bg2"/>
+                </a:solidFill>
+              </a:rPr>
+              <a:t>Se reintenta y, si sigue fallando, queda en la cola de errores.</a:t>
+            </a:r>
+            <a:endParaRPr lang="en-US" sz="1500" dirty="0"/>
+          </a:p>
+        </p:txBody>
+      </p:sp>
+      <p:sp>
+        <p:nvSpPr>
+          <p:cNvPr id="23" name="circle-366"/>
+          <p:cNvSpPr/>
+          <p:nvPr/>
+        </p:nvSpPr>
+        <p:spPr>
+          <a:xfrm>
+            <a:off x="6172200" y="4572000"/>
+            <a:ext cx="685800" cy="685800"/>
+          </a:xfrm>
+          <a:prstGeom prst="ellipse">
+            <a:avLst/>
+          </a:prstGeom>
+          <a:solidFill>
+            <a:schemeClr val="accent1"/>
+          </a:solidFill>
+          <a:ln/>
+        </p:spPr>
+      </p:sp>
+      <p:pic>
+        <p:nvPicPr>
+          <p:cNvPr id="24" name="icon-367" descr="preencoded.png">    </p:cNvPr>
+          <p:cNvPicPr>
+            <a:picLocks noChangeAspect="1"/>
+          </p:cNvPicPr>
+          <p:nvPr/>
+        </p:nvPicPr>
+        <p:blipFill>
+          <a:blip r:embed="rId6"/>
+          <a:stretch>
+            <a:fillRect/>
+          </a:stretch>
+        </p:blipFill>
+        <p:spPr>
+          <a:xfrm>
+            <a:off x="6343650" y="4743450"/>
+            <a:ext cx="342900" cy="342900"/>
+          </a:xfrm>
+          <a:prstGeom prst="rect">
+            <a:avLst/>
+          </a:prstGeom>
+        </p:spPr>
+      </p:pic>
+      <p:sp>
+        <p:nvSpPr>
+          <p:cNvPr id="25" name="text-368"/>
+          <p:cNvSpPr txBox="1"/>
+          <p:nvPr/>
+        </p:nvSpPr>
+        <p:spPr>
+          <a:xfrm>
+            <a:off x="7086600" y="4553712"/>
+            <a:ext cx="4480560" cy="457200"/>
+          </a:xfrm>
+          <a:prstGeom prst="rect">
+            <a:avLst/>
+          </a:prstGeom>
+          <a:noFill/>
+          <a:ln/>
+        </p:spPr>
+        <p:txBody>
+          <a:bodyPr wrap="square" lIns="0" tIns="0" rIns="0" bIns="0" rtlCol="0" anchor="ctr"/>
+          <a:lstStyle/>
+          <a:p>
+            <a:pPr algn="l" indent="0" marL="0">
+              <a:buNone/>
+            </a:pPr>
+            <a:r>
+              <a:rPr lang="en-US" sz="1900" b="1" dirty="0">
+                <a:solidFill>
+                  <a:schemeClr val="bg1"/>
+                </a:solidFill>
+              </a:rPr>
+              <a:t>El usuario lo ve</a:t>
+            </a:r>
+            <a:endParaRPr lang="en-US" sz="1900" dirty="0"/>
+          </a:p>
+        </p:txBody>
+      </p:sp>
+      <p:sp>
+        <p:nvSpPr>
+          <p:cNvPr id="26" name="text-369"/>
+          <p:cNvSpPr txBox="1"/>
+          <p:nvPr/>
+        </p:nvSpPr>
+        <p:spPr>
+          <a:xfrm>
+            <a:off x="7086600" y="5029200"/>
+            <a:ext cx="4480560" cy="777240"/>
+          </a:xfrm>
+          <a:prstGeom prst="rect">
+            <a:avLst/>
+          </a:prstGeom>
+          <a:noFill/>
+          <a:ln/>
+        </p:spPr>
+        <p:txBody>
+          <a:bodyPr wrap="square" lIns="0" tIns="0" rIns="0" bIns="0" rtlCol="0" anchor="t"/>
+          <a:lstStyle/>
+          <a:p>
+            <a:pPr algn="l" indent="0" marL="0">
+              <a:buNone/>
+            </a:pPr>
+            <a:r>
+              <a:rPr lang="en-US" sz="1500" dirty="0">
+                <a:solidFill>
+                  <a:schemeClr val="bg2"/>
+                </a:solidFill>
+              </a:rPr>
+              <a:t>La campana del frontend muestra el aviso un momento después.</a:t>
+            </a:r>
+            <a:endParaRPr lang="en-US" sz="1500" dirty="0"/>
           </a:p>
         </p:txBody>
       </p:sp>
@@ -7874,810 +7586,6 @@
             <a:fld id="{F7021451-1387-4CA6-816F-3879F97B5CBC}" type="slidenum">
               <a:rPr b="0" lang="en-US"/>
               <a:t>15</a:t>
-            </a:fld>
-            <a:endParaRPr lang="en-US"/>
-          </a:p>
-        </p:txBody>
-      </p:sp>
-    </p:spTree>
-  </p:cSld>
-  <p:clrMapOvr>
-    <a:masterClrMapping/>
-  </p:clrMapOvr>
-</p:sld>
-</file>
-
-<file path=ppt/slides/slide16.xml><?xml version="1.0" encoding="utf-8"?>
-<p:sld xmlns:a="http://schemas.openxmlformats.org/drawingml/2006/main" xmlns:r="http://schemas.openxmlformats.org/officeDocument/2006/relationships" xmlns:p="http://schemas.openxmlformats.org/presentationml/2006/main">
-  <p:cSld name="Slide 16">
-    <p:spTree>
-      <p:nvGrpSpPr>
-        <p:cNvPr id="1" name=""/>
-        <p:cNvGrpSpPr/>
-        <p:nvPr/>
-      </p:nvGrpSpPr>
-      <p:grpSpPr>
-        <a:xfrm>
-          <a:off x="0" y="0"/>
-          <a:ext cx="0" cy="0"/>
-          <a:chOff x="0" y="0"/>
-          <a:chExt cx="0" cy="0"/>
-        </a:xfrm>
-      </p:grpSpPr>
-      <p:sp>
-        <p:nvSpPr>
-          <p:cNvPr id="2" name="Text 0"/>
-          <p:cNvSpPr/>
-          <p:nvPr>
-            <p:ph idx="100" type="title" hasCustomPrompt="1"/>
-          </p:nvPr>
-        </p:nvSpPr>
-        <p:spPr>
-          <a:xfrm>
-            <a:off x="548640" y="320040"/>
-            <a:ext cx="11064240" cy="777240"/>
-          </a:xfrm>
-          <a:prstGeom prst="rect">
-            <a:avLst/>
-          </a:prstGeom>
-          <a:noFill/>
-          <a:ln/>
-        </p:spPr>
-        <p:txBody>
-          <a:bodyPr wrap="square" lIns="0" tIns="0" rIns="0" bIns="0" rtlCol="0" anchor="ctr"/>
-          <a:lstStyle/>
-          <a:p>
-            <a:pPr algn="l" indent="0" marL="0">
-              <a:buNone/>
-            </a:pPr>
-            <a:r>
-              <a:rPr lang="en-US" sz="3200" b="1" dirty="0">
-                <a:solidFill>
-                  <a:schemeClr val="bg1"/>
-                </a:solidFill>
-              </a:rPr>
-              <a:t>Lo que hay que llevarse</a:t>
-            </a:r>
-            <a:endParaRPr lang="en-US" sz="3200" dirty="0"/>
-          </a:p>
-        </p:txBody>
-      </p:sp>
-      <p:sp>
-        <p:nvSpPr>
-          <p:cNvPr id="3" name="circle-353"/>
-          <p:cNvSpPr/>
-          <p:nvPr/>
-        </p:nvSpPr>
-        <p:spPr>
-          <a:xfrm>
-            <a:off x="548640" y="1371600"/>
-            <a:ext cx="685800" cy="685800"/>
-          </a:xfrm>
-          <a:prstGeom prst="ellipse">
-            <a:avLst/>
-          </a:prstGeom>
-          <a:solidFill>
-            <a:schemeClr val="accent1"/>
-          </a:solidFill>
-          <a:ln/>
-        </p:spPr>
-      </p:sp>
-      <p:pic>
-        <p:nvPicPr>
-          <p:cNvPr id="4" name="icon-354" descr="preencoded.png">    </p:cNvPr>
-          <p:cNvPicPr>
-            <a:picLocks noChangeAspect="1"/>
-          </p:cNvPicPr>
-          <p:nvPr/>
-        </p:nvPicPr>
-        <p:blipFill>
-          <a:blip r:embed="rId1"/>
-          <a:stretch>
-            <a:fillRect/>
-          </a:stretch>
-        </p:blipFill>
-        <p:spPr>
-          <a:xfrm>
-            <a:off x="720090" y="1543050"/>
-            <a:ext cx="342900" cy="342900"/>
-          </a:xfrm>
-          <a:prstGeom prst="rect">
-            <a:avLst/>
-          </a:prstGeom>
-        </p:spPr>
-      </p:pic>
-      <p:sp>
-        <p:nvSpPr>
-          <p:cNvPr id="5" name="text-355"/>
-          <p:cNvSpPr txBox="1"/>
-          <p:nvPr/>
-        </p:nvSpPr>
-        <p:spPr>
-          <a:xfrm>
-            <a:off x="1463040" y="1353312"/>
-            <a:ext cx="4480560" cy="457200"/>
-          </a:xfrm>
-          <a:prstGeom prst="rect">
-            <a:avLst/>
-          </a:prstGeom>
-          <a:noFill/>
-          <a:ln/>
-        </p:spPr>
-        <p:txBody>
-          <a:bodyPr wrap="square" lIns="0" tIns="0" rIns="0" bIns="0" rtlCol="0" anchor="ctr"/>
-          <a:lstStyle/>
-          <a:p>
-            <a:pPr algn="l" indent="0" marL="0">
-              <a:buNone/>
-            </a:pPr>
-            <a:r>
-              <a:rPr lang="en-US" sz="1900" b="1" dirty="0">
-                <a:solidFill>
-                  <a:schemeClr val="bg1"/>
-                </a:solidFill>
-              </a:rPr>
-              <a:t>Desacoplamiento</a:t>
-            </a:r>
-            <a:endParaRPr lang="en-US" sz="1900" dirty="0"/>
-          </a:p>
-        </p:txBody>
-      </p:sp>
-      <p:sp>
-        <p:nvSpPr>
-          <p:cNvPr id="6" name="text-356"/>
-          <p:cNvSpPr txBox="1"/>
-          <p:nvPr/>
-        </p:nvSpPr>
-        <p:spPr>
-          <a:xfrm>
-            <a:off x="1463040" y="1828800"/>
-            <a:ext cx="4480560" cy="777240"/>
-          </a:xfrm>
-          <a:prstGeom prst="rect">
-            <a:avLst/>
-          </a:prstGeom>
-          <a:noFill/>
-          <a:ln/>
-        </p:spPr>
-        <p:txBody>
-          <a:bodyPr wrap="square" lIns="0" tIns="0" rIns="0" bIns="0" rtlCol="0" anchor="t"/>
-          <a:lstStyle/>
-          <a:p>
-            <a:pPr algn="l" indent="0" marL="0">
-              <a:buNone/>
-            </a:pPr>
-            <a:r>
-              <a:rPr lang="en-US" sz="1500" dirty="0">
-                <a:solidFill>
-                  <a:schemeClr val="bg2"/>
-                </a:solidFill>
-              </a:rPr>
-              <a:t>ms-reservas publica en un exchange topic y no conoce a sus consumidores.</a:t>
-            </a:r>
-            <a:endParaRPr lang="en-US" sz="1500" dirty="0"/>
-          </a:p>
-        </p:txBody>
-      </p:sp>
-      <p:sp>
-        <p:nvSpPr>
-          <p:cNvPr id="7" name="circle-357"/>
-          <p:cNvSpPr/>
-          <p:nvPr/>
-        </p:nvSpPr>
-        <p:spPr>
-          <a:xfrm>
-            <a:off x="6172200" y="1371600"/>
-            <a:ext cx="685800" cy="685800"/>
-          </a:xfrm>
-          <a:prstGeom prst="ellipse">
-            <a:avLst/>
-          </a:prstGeom>
-          <a:solidFill>
-            <a:schemeClr val="accent1"/>
-          </a:solidFill>
-          <a:ln/>
-        </p:spPr>
-      </p:sp>
-      <p:pic>
-        <p:nvPicPr>
-          <p:cNvPr id="8" name="icon-358" descr="preencoded.png">    </p:cNvPr>
-          <p:cNvPicPr>
-            <a:picLocks noChangeAspect="1"/>
-          </p:cNvPicPr>
-          <p:nvPr/>
-        </p:nvPicPr>
-        <p:blipFill>
-          <a:blip r:embed="rId2"/>
-          <a:stretch>
-            <a:fillRect/>
-          </a:stretch>
-        </p:blipFill>
-        <p:spPr>
-          <a:xfrm>
-            <a:off x="6343650" y="1543050"/>
-            <a:ext cx="342900" cy="342900"/>
-          </a:xfrm>
-          <a:prstGeom prst="rect">
-            <a:avLst/>
-          </a:prstGeom>
-        </p:spPr>
-      </p:pic>
-      <p:sp>
-        <p:nvSpPr>
-          <p:cNvPr id="9" name="text-359"/>
-          <p:cNvSpPr txBox="1"/>
-          <p:nvPr/>
-        </p:nvSpPr>
-        <p:spPr>
-          <a:xfrm>
-            <a:off x="7086600" y="1353312"/>
-            <a:ext cx="4480560" cy="457200"/>
-          </a:xfrm>
-          <a:prstGeom prst="rect">
-            <a:avLst/>
-          </a:prstGeom>
-          <a:noFill/>
-          <a:ln/>
-        </p:spPr>
-        <p:txBody>
-          <a:bodyPr wrap="square" lIns="0" tIns="0" rIns="0" bIns="0" rtlCol="0" anchor="ctr"/>
-          <a:lstStyle/>
-          <a:p>
-            <a:pPr algn="l" indent="0" marL="0">
-              <a:buNone/>
-            </a:pPr>
-            <a:r>
-              <a:rPr lang="en-US" sz="1900" b="1" dirty="0">
-                <a:solidFill>
-                  <a:schemeClr val="bg1"/>
-                </a:solidFill>
-              </a:rPr>
-              <a:t>Una cola por consumidor</a:t>
-            </a:r>
-            <a:endParaRPr lang="en-US" sz="1900" dirty="0"/>
-          </a:p>
-        </p:txBody>
-      </p:sp>
-      <p:sp>
-        <p:nvSpPr>
-          <p:cNvPr id="10" name="text-360"/>
-          <p:cNvSpPr txBox="1"/>
-          <p:nvPr/>
-        </p:nvSpPr>
-        <p:spPr>
-          <a:xfrm>
-            <a:off x="7086600" y="1828800"/>
-            <a:ext cx="4480560" cy="777240"/>
-          </a:xfrm>
-          <a:prstGeom prst="rect">
-            <a:avLst/>
-          </a:prstGeom>
-          <a:noFill/>
-          <a:ln/>
-        </p:spPr>
-        <p:txBody>
-          <a:bodyPr wrap="square" lIns="0" tIns="0" rIns="0" bIns="0" rtlCol="0" anchor="t"/>
-          <a:lstStyle/>
-          <a:p>
-            <a:pPr algn="l" indent="0" marL="0">
-              <a:buNone/>
-            </a:pPr>
-            <a:r>
-              <a:rPr lang="en-US" sz="1500" dirty="0">
-                <a:solidFill>
-                  <a:schemeClr val="bg2"/>
-                </a:solidFill>
-              </a:rPr>
-              <a:t>Cada servicio declara su cola y recibe su propia copia (pub/sub).</a:t>
-            </a:r>
-            <a:endParaRPr lang="en-US" sz="1500" dirty="0"/>
-          </a:p>
-        </p:txBody>
-      </p:sp>
-      <p:sp>
-        <p:nvSpPr>
-          <p:cNvPr id="11" name="circle-361"/>
-          <p:cNvSpPr/>
-          <p:nvPr/>
-        </p:nvSpPr>
-        <p:spPr>
-          <a:xfrm>
-            <a:off x="548640" y="2971800"/>
-            <a:ext cx="685800" cy="685800"/>
-          </a:xfrm>
-          <a:prstGeom prst="ellipse">
-            <a:avLst/>
-          </a:prstGeom>
-          <a:solidFill>
-            <a:schemeClr val="accent1"/>
-          </a:solidFill>
-          <a:ln/>
-        </p:spPr>
-      </p:sp>
-      <p:pic>
-        <p:nvPicPr>
-          <p:cNvPr id="12" name="icon-362" descr="preencoded.png">    </p:cNvPr>
-          <p:cNvPicPr>
-            <a:picLocks noChangeAspect="1"/>
-          </p:cNvPicPr>
-          <p:nvPr/>
-        </p:nvPicPr>
-        <p:blipFill>
-          <a:blip r:embed="rId3"/>
-          <a:stretch>
-            <a:fillRect/>
-          </a:stretch>
-        </p:blipFill>
-        <p:spPr>
-          <a:xfrm>
-            <a:off x="720090" y="3143250"/>
-            <a:ext cx="342900" cy="342900"/>
-          </a:xfrm>
-          <a:prstGeom prst="rect">
-            <a:avLst/>
-          </a:prstGeom>
-        </p:spPr>
-      </p:pic>
-      <p:sp>
-        <p:nvSpPr>
-          <p:cNvPr id="13" name="text-363"/>
-          <p:cNvSpPr txBox="1"/>
-          <p:nvPr/>
-        </p:nvSpPr>
-        <p:spPr>
-          <a:xfrm>
-            <a:off x="1463040" y="2953512"/>
-            <a:ext cx="4480560" cy="457200"/>
-          </a:xfrm>
-          <a:prstGeom prst="rect">
-            <a:avLst/>
-          </a:prstGeom>
-          <a:noFill/>
-          <a:ln/>
-        </p:spPr>
-        <p:txBody>
-          <a:bodyPr wrap="square" lIns="0" tIns="0" rIns="0" bIns="0" rtlCol="0" anchor="ctr"/>
-          <a:lstStyle/>
-          <a:p>
-            <a:pPr algn="l" indent="0" marL="0">
-              <a:buNone/>
-            </a:pPr>
-            <a:r>
-              <a:rPr lang="en-US" sz="1900" b="1" dirty="0">
-                <a:solidFill>
-                  <a:schemeClr val="bg1"/>
-                </a:solidFill>
-              </a:rPr>
-              <a:t>Mensajes seguros</a:t>
-            </a:r>
-            <a:endParaRPr lang="en-US" sz="1900" dirty="0"/>
-          </a:p>
-        </p:txBody>
-      </p:sp>
-      <p:sp>
-        <p:nvSpPr>
-          <p:cNvPr id="14" name="text-364"/>
-          <p:cNvSpPr txBox="1"/>
-          <p:nvPr/>
-        </p:nvSpPr>
-        <p:spPr>
-          <a:xfrm>
-            <a:off x="1463040" y="3429000"/>
-            <a:ext cx="4480560" cy="777240"/>
-          </a:xfrm>
-          <a:prstGeom prst="rect">
-            <a:avLst/>
-          </a:prstGeom>
-          <a:noFill/>
-          <a:ln/>
-        </p:spPr>
-        <p:txBody>
-          <a:bodyPr wrap="square" lIns="0" tIns="0" rIns="0" bIns="0" rtlCol="0" anchor="t"/>
-          <a:lstStyle/>
-          <a:p>
-            <a:pPr algn="l" indent="0" marL="0">
-              <a:buNone/>
-            </a:pPr>
-            <a:r>
-              <a:rPr lang="en-US" sz="1500" dirty="0">
-                <a:solidFill>
-                  <a:schemeClr val="bg2"/>
-                </a:solidFill>
-              </a:rPr>
-              <a:t>Se publica tras el commit; confirms y returns avisan si algo no llegó.</a:t>
-            </a:r>
-            <a:endParaRPr lang="en-US" sz="1500" dirty="0"/>
-          </a:p>
-        </p:txBody>
-      </p:sp>
-      <p:sp>
-        <p:nvSpPr>
-          <p:cNvPr id="15" name="circle-365"/>
-          <p:cNvSpPr/>
-          <p:nvPr/>
-        </p:nvSpPr>
-        <p:spPr>
-          <a:xfrm>
-            <a:off x="6172200" y="2971800"/>
-            <a:ext cx="685800" cy="685800"/>
-          </a:xfrm>
-          <a:prstGeom prst="ellipse">
-            <a:avLst/>
-          </a:prstGeom>
-          <a:solidFill>
-            <a:schemeClr val="accent1"/>
-          </a:solidFill>
-          <a:ln/>
-        </p:spPr>
-      </p:sp>
-      <p:pic>
-        <p:nvPicPr>
-          <p:cNvPr id="16" name="icon-366" descr="preencoded.png">    </p:cNvPr>
-          <p:cNvPicPr>
-            <a:picLocks noChangeAspect="1"/>
-          </p:cNvPicPr>
-          <p:nvPr/>
-        </p:nvPicPr>
-        <p:blipFill>
-          <a:blip r:embed="rId4"/>
-          <a:stretch>
-            <a:fillRect/>
-          </a:stretch>
-        </p:blipFill>
-        <p:spPr>
-          <a:xfrm>
-            <a:off x="6343650" y="3143250"/>
-            <a:ext cx="342900" cy="342900"/>
-          </a:xfrm>
-          <a:prstGeom prst="rect">
-            <a:avLst/>
-          </a:prstGeom>
-        </p:spPr>
-      </p:pic>
-      <p:sp>
-        <p:nvSpPr>
-          <p:cNvPr id="17" name="text-367"/>
-          <p:cNvSpPr txBox="1"/>
-          <p:nvPr/>
-        </p:nvSpPr>
-        <p:spPr>
-          <a:xfrm>
-            <a:off x="7086600" y="2953512"/>
-            <a:ext cx="4480560" cy="457200"/>
-          </a:xfrm>
-          <a:prstGeom prst="rect">
-            <a:avLst/>
-          </a:prstGeom>
-          <a:noFill/>
-          <a:ln/>
-        </p:spPr>
-        <p:txBody>
-          <a:bodyPr wrap="square" lIns="0" tIns="0" rIns="0" bIns="0" rtlCol="0" anchor="ctr"/>
-          <a:lstStyle/>
-          <a:p>
-            <a:pPr algn="l" indent="0" marL="0">
-              <a:buNone/>
-            </a:pPr>
-            <a:r>
-              <a:rPr lang="en-US" sz="1900" b="1" dirty="0">
-                <a:solidFill>
-                  <a:schemeClr val="bg1"/>
-                </a:solidFill>
-              </a:rPr>
-              <a:t>Consumidores idempotentes</a:t>
-            </a:r>
-            <a:endParaRPr lang="en-US" sz="1900" dirty="0"/>
-          </a:p>
-        </p:txBody>
-      </p:sp>
-      <p:sp>
-        <p:nvSpPr>
-          <p:cNvPr id="18" name="text-368"/>
-          <p:cNvSpPr txBox="1"/>
-          <p:nvPr/>
-        </p:nvSpPr>
-        <p:spPr>
-          <a:xfrm>
-            <a:off x="7086600" y="3429000"/>
-            <a:ext cx="4480560" cy="777240"/>
-          </a:xfrm>
-          <a:prstGeom prst="rect">
-            <a:avLst/>
-          </a:prstGeom>
-          <a:noFill/>
-          <a:ln/>
-        </p:spPr>
-        <p:txBody>
-          <a:bodyPr wrap="square" lIns="0" tIns="0" rIns="0" bIns="0" rtlCol="0" anchor="t"/>
-          <a:lstStyle/>
-          <a:p>
-            <a:pPr algn="l" indent="0" marL="0">
-              <a:buNone/>
-            </a:pPr>
-            <a:r>
-              <a:rPr lang="en-US" sz="1500" dirty="0">
-                <a:solidFill>
-                  <a:schemeClr val="bg2"/>
-                </a:solidFill>
-              </a:rPr>
-              <a:t>Upsert por id y UNIQUE(reserva_id, tipo) toleran duplicados.</a:t>
-            </a:r>
-            <a:endParaRPr lang="en-US" sz="1500" dirty="0"/>
-          </a:p>
-        </p:txBody>
-      </p:sp>
-      <p:sp>
-        <p:nvSpPr>
-          <p:cNvPr id="19" name="circle-369"/>
-          <p:cNvSpPr/>
-          <p:nvPr/>
-        </p:nvSpPr>
-        <p:spPr>
-          <a:xfrm>
-            <a:off x="548640" y="4572000"/>
-            <a:ext cx="685800" cy="685800"/>
-          </a:xfrm>
-          <a:prstGeom prst="ellipse">
-            <a:avLst/>
-          </a:prstGeom>
-          <a:solidFill>
-            <a:schemeClr val="accent1"/>
-          </a:solidFill>
-          <a:ln/>
-        </p:spPr>
-      </p:sp>
-      <p:pic>
-        <p:nvPicPr>
-          <p:cNvPr id="20" name="icon-370" descr="preencoded.png">    </p:cNvPr>
-          <p:cNvPicPr>
-            <a:picLocks noChangeAspect="1"/>
-          </p:cNvPicPr>
-          <p:nvPr/>
-        </p:nvPicPr>
-        <p:blipFill>
-          <a:blip r:embed="rId5"/>
-          <a:stretch>
-            <a:fillRect/>
-          </a:stretch>
-        </p:blipFill>
-        <p:spPr>
-          <a:xfrm>
-            <a:off x="720090" y="4743450"/>
-            <a:ext cx="342900" cy="342900"/>
-          </a:xfrm>
-          <a:prstGeom prst="rect">
-            <a:avLst/>
-          </a:prstGeom>
-        </p:spPr>
-      </p:pic>
-      <p:sp>
-        <p:nvSpPr>
-          <p:cNvPr id="21" name="text-371"/>
-          <p:cNvSpPr txBox="1"/>
-          <p:nvPr/>
-        </p:nvSpPr>
-        <p:spPr>
-          <a:xfrm>
-            <a:off x="1463040" y="4553712"/>
-            <a:ext cx="4480560" cy="457200"/>
-          </a:xfrm>
-          <a:prstGeom prst="rect">
-            <a:avLst/>
-          </a:prstGeom>
-          <a:noFill/>
-          <a:ln/>
-        </p:spPr>
-        <p:txBody>
-          <a:bodyPr wrap="square" lIns="0" tIns="0" rIns="0" bIns="0" rtlCol="0" anchor="ctr"/>
-          <a:lstStyle/>
-          <a:p>
-            <a:pPr algn="l" indent="0" marL="0">
-              <a:buNone/>
-            </a:pPr>
-            <a:r>
-              <a:rPr lang="en-US" sz="1900" b="1" dirty="0">
-                <a:solidFill>
-                  <a:schemeClr val="bg1"/>
-                </a:solidFill>
-              </a:rPr>
-              <a:t>Fallos controlados</a:t>
-            </a:r>
-            <a:endParaRPr lang="en-US" sz="1900" dirty="0"/>
-          </a:p>
-        </p:txBody>
-      </p:sp>
-      <p:sp>
-        <p:nvSpPr>
-          <p:cNvPr id="22" name="text-372"/>
-          <p:cNvSpPr txBox="1"/>
-          <p:nvPr/>
-        </p:nvSpPr>
-        <p:spPr>
-          <a:xfrm>
-            <a:off x="1463040" y="5029200"/>
-            <a:ext cx="4480560" cy="777240"/>
-          </a:xfrm>
-          <a:prstGeom prst="rect">
-            <a:avLst/>
-          </a:prstGeom>
-          <a:noFill/>
-          <a:ln/>
-        </p:spPr>
-        <p:txBody>
-          <a:bodyPr wrap="square" lIns="0" tIns="0" rIns="0" bIns="0" rtlCol="0" anchor="t"/>
-          <a:lstStyle/>
-          <a:p>
-            <a:pPr algn="l" indent="0" marL="0">
-              <a:buNone/>
-            </a:pPr>
-            <a:r>
-              <a:rPr lang="en-US" sz="1500" dirty="0">
-                <a:solidFill>
-                  <a:schemeClr val="bg2"/>
-                </a:solidFill>
-              </a:rPr>
-              <a:t>4 intentos con backoff, luego DLX y DLQ para revisar a mano.</a:t>
-            </a:r>
-            <a:endParaRPr lang="en-US" sz="1500" dirty="0"/>
-          </a:p>
-        </p:txBody>
-      </p:sp>
-      <p:sp>
-        <p:nvSpPr>
-          <p:cNvPr id="23" name="circle-373"/>
-          <p:cNvSpPr/>
-          <p:nvPr/>
-        </p:nvSpPr>
-        <p:spPr>
-          <a:xfrm>
-            <a:off x="6172200" y="4572000"/>
-            <a:ext cx="685800" cy="685800"/>
-          </a:xfrm>
-          <a:prstGeom prst="ellipse">
-            <a:avLst/>
-          </a:prstGeom>
-          <a:solidFill>
-            <a:schemeClr val="accent1"/>
-          </a:solidFill>
-          <a:ln/>
-        </p:spPr>
-      </p:sp>
-      <p:pic>
-        <p:nvPicPr>
-          <p:cNvPr id="24" name="icon-374" descr="preencoded.png">    </p:cNvPr>
-          <p:cNvPicPr>
-            <a:picLocks noChangeAspect="1"/>
-          </p:cNvPicPr>
-          <p:nvPr/>
-        </p:nvPicPr>
-        <p:blipFill>
-          <a:blip r:embed="rId6"/>
-          <a:stretch>
-            <a:fillRect/>
-          </a:stretch>
-        </p:blipFill>
-        <p:spPr>
-          <a:xfrm>
-            <a:off x="6343650" y="4743450"/>
-            <a:ext cx="342900" cy="342900"/>
-          </a:xfrm>
-          <a:prstGeom prst="rect">
-            <a:avLst/>
-          </a:prstGeom>
-        </p:spPr>
-      </p:pic>
-      <p:sp>
-        <p:nvSpPr>
-          <p:cNvPr id="25" name="text-375"/>
-          <p:cNvSpPr txBox="1"/>
-          <p:nvPr/>
-        </p:nvSpPr>
-        <p:spPr>
-          <a:xfrm>
-            <a:off x="7086600" y="4553712"/>
-            <a:ext cx="4480560" cy="457200"/>
-          </a:xfrm>
-          <a:prstGeom prst="rect">
-            <a:avLst/>
-          </a:prstGeom>
-          <a:noFill/>
-          <a:ln/>
-        </p:spPr>
-        <p:txBody>
-          <a:bodyPr wrap="square" lIns="0" tIns="0" rIns="0" bIns="0" rtlCol="0" anchor="ctr"/>
-          <a:lstStyle/>
-          <a:p>
-            <a:pPr algn="l" indent="0" marL="0">
-              <a:buNone/>
-            </a:pPr>
-            <a:r>
-              <a:rPr lang="en-US" sz="1900" b="1" dirty="0">
-                <a:solidFill>
-                  <a:schemeClr val="bg1"/>
-                </a:solidFill>
-              </a:rPr>
-              <a:t>Consistencia eventual</a:t>
-            </a:r>
-            <a:endParaRPr lang="en-US" sz="1900" dirty="0"/>
-          </a:p>
-        </p:txBody>
-      </p:sp>
-      <p:sp>
-        <p:nvSpPr>
-          <p:cNvPr id="26" name="text-376"/>
-          <p:cNvSpPr txBox="1"/>
-          <p:nvPr/>
-        </p:nvSpPr>
-        <p:spPr>
-          <a:xfrm>
-            <a:off x="7086600" y="5029200"/>
-            <a:ext cx="4480560" cy="777240"/>
-          </a:xfrm>
-          <a:prstGeom prst="rect">
-            <a:avLst/>
-          </a:prstGeom>
-          <a:noFill/>
-          <a:ln/>
-        </p:spPr>
-        <p:txBody>
-          <a:bodyPr wrap="square" lIns="0" tIns="0" rIns="0" bIns="0" rtlCol="0" anchor="t"/>
-          <a:lstStyle/>
-          <a:p>
-            <a:pPr algn="l" indent="0" marL="0">
-              <a:buNone/>
-            </a:pPr>
-            <a:r>
-              <a:rPr lang="en-US" sz="1500" dirty="0">
-                <a:solidFill>
-                  <a:schemeClr val="bg2"/>
-                </a:solidFill>
-              </a:rPr>
-              <a:t>El frontend muestra el aviso un momento después, por polling.</a:t>
-            </a:r>
-            <a:endParaRPr lang="en-US" sz="1500" dirty="0"/>
-          </a:p>
-        </p:txBody>
-      </p:sp>
-      <p:sp>
-        <p:nvSpPr>
-          <p:cNvPr id="25" name="Slide Number Placeholder 0"/>
-          <p:cNvSpPr>
-            <a:spLocks noGrp="1"/>
-          </p:cNvSpPr>
-          <p:nvPr>
-            <p:ph type="sldNum" sz="quarter" idx="4294967295"/>
-          </p:nvPr>
-        </p:nvSpPr>
-        <p:spPr>
-          <a:xfrm>
-            <a:off x="11155680" y="6400800"/>
-            <a:ext cx="457200" cy="274320"/>
-          </a:xfrm>
-          <a:prstGeom prst="rect">
-            <a:avLst/>
-          </a:prstGeom>
-          <a:extLst>
-            <a:ext uri="{C572A759-6A51-4108-AA02-DFA0A04FC94B}">
-              <ma14:wrappingTextBoxFlag xmlns:ma14="http://schemas.microsoft.com/office/mac/drawingml/2011/main" val="0"/>
-            </a:ext>
-          </a:extLst>
-        </p:spPr>
-        <p:txBody>
-          <a:bodyPr/>
-          <a:lstStyle>
-            <a:lvl1pPr>
-              <a:defRPr sz="1000">
-                <a:solidFill>
-                  <a:schemeClr val="accent6"/>
-                </a:solidFill>
-              </a:defRPr>
-            </a:lvl1pPr>
-          </a:lstStyle>
-          <a:p>
-            <a:pPr algn="r"/>
-            <a:fld id="{F7021451-1387-4CA6-816F-3879F97B5CBC}" type="slidenum">
-              <a:rPr b="0" lang="en-US"/>
-              <a:t>16</a:t>
             </a:fld>
             <a:endParaRPr lang="en-US"/>
           </a:p>
@@ -9857,7 +8765,7 @@
                   <a:schemeClr val="tx1"/>
                 </a:solidFill>
               </a:rPr>
-              <a:t>El usuario espera a que respondan todos</a:t>
+              <a:t>El usuario tiene que esperar a que respondan todos</a:t>
             </a:r>
             <a:endParaRPr lang="en-US" sz="1600" dirty="0"/>
           </a:p>
@@ -10029,7 +8937,7 @@
                   <a:schemeClr val="tx1"/>
                 </a:solidFill>
               </a:rPr>
-              <a:t>El usuario recibe su 201 apenas se guarda la reserva</a:t>
+              <a:t>El usuario ve su confirmación apenas se guarda la reserva</a:t>
             </a:r>
             <a:endParaRPr lang="en-US" sz="1600" dirty="0"/>
           </a:p>
@@ -10293,7 +9201,7 @@
                   <a:schemeClr val="tx1"/>
                 </a:solidFill>
               </a:rPr>
-              <a:t>El productor publica en un exchange, nunca directo a una cola. El consumidor lee de una cola.</a:t>
+              <a:t>Quien envía el mensaje y quien lo recibe. No necesitan conocerse.</a:t>
             </a:r>
             <a:endParaRPr lang="en-US" sz="1400" dirty="0"/>
           </a:p>
@@ -10329,7 +9237,7 @@
                   <a:schemeClr val="accent6"/>
                 </a:solidFill>
               </a:rPr>
-              <a:t>ms-reservas publica; ms-gimnasios y ms-notificaciones consumen</a:t>
+              <a:t>ms-reservas envía; ms-gimnasios y ms-notificaciones reciben</a:t>
             </a:r>
             <a:endParaRPr lang="en-US" sz="1200" dirty="0"/>
           </a:p>
@@ -10467,7 +9375,7 @@
                   <a:schemeClr val="tx1"/>
                 </a:solidFill>
               </a:rPr>
-              <a:t>Recibe los mensajes y decide a qué colas copiarlos según su tipo y los bindings.</a:t>
+              <a:t>El "cartero": recibe cada mensaje y decide a qué colas entregarlo.</a:t>
             </a:r>
             <a:endParaRPr lang="en-US" sz="1400" dirty="0"/>
           </a:p>
@@ -10503,7 +9411,7 @@
                   <a:schemeClr val="accent6"/>
                 </a:solidFill>
               </a:rPr>
-              <a:t>reservafit.events (topic)</a:t>
+              <a:t>reservafit.events</a:t>
             </a:r>
             <a:endParaRPr lang="en-US" sz="1200" dirty="0"/>
           </a:p>
@@ -10641,7 +9549,7 @@
                   <a:schemeClr val="tx1"/>
                 </a:solidFill>
               </a:rPr>
-              <a:t>El mensaje trae una routing key; el binding une una cola a un exchange con un patrón.</a:t>
+              <a:t>Una etiqueta en el mensaje y una regla en la cola que dice qué etiquetas acepta.</a:t>
             </a:r>
             <a:endParaRPr lang="en-US" sz="1400" dirty="0"/>
           </a:p>
@@ -10677,7 +9585,7 @@
                   <a:schemeClr val="accent6"/>
                 </a:solidFill>
               </a:rPr>
-              <a:t>key booking.created, binding booking.*</a:t>
+              <a:t>etiqueta booking.created, regla booking.*</a:t>
             </a:r>
             <a:endParaRPr lang="en-US" sz="1200" dirty="0"/>
           </a:p>
@@ -10779,7 +9687,7 @@
                   <a:schemeClr val="tx1"/>
                 </a:solidFill>
               </a:rPr>
-              <a:t>Cola durable</a:t>
+              <a:t>Cola</a:t>
             </a:r>
             <a:endParaRPr lang="en-US" sz="1700" dirty="0"/>
           </a:p>
@@ -10815,7 +9723,7 @@
                   <a:schemeClr val="tx1"/>
                 </a:solidFill>
               </a:rPr>
-              <a:t>Guarda los mensajes hasta que alguien los procesa. Durable: sobrevive a un reinicio del broker.</a:t>
+              <a:t>Una fila de espera: guarda los mensajes hasta que el servicio los procesa, aunque esté apagado.</a:t>
             </a:r>
             <a:endParaRPr lang="en-US" sz="1400" dirty="0"/>
           </a:p>
@@ -10851,7 +9759,7 @@
                   <a:schemeClr val="accent6"/>
                 </a:solidFill>
               </a:rPr>
-              <a:t>gimnasios.bookings, notificaciones.bookings</a:t>
+              <a:t>una cola por servicio que escucha</a:t>
             </a:r>
             <a:endParaRPr lang="en-US" sz="1200" dirty="0"/>
           </a:p>
@@ -10953,7 +9861,7 @@
                   <a:schemeClr val="tx1"/>
                 </a:solidFill>
               </a:rPr>
-              <a:t>Ack / Nack</a:t>
+              <a:t>Mensaje</a:t>
             </a:r>
             <a:endParaRPr lang="en-US" sz="1700" dirty="0"/>
           </a:p>
@@ -10989,7 +9897,7 @@
                   <a:schemeClr val="tx1"/>
                 </a:solidFill>
               </a:rPr>
-              <a:t>El consumidor confirma (ack) o rechaza (nack). Sin ack, RabbitMQ no borra el mensaje.</a:t>
+              <a:t>Los datos de lo que pasó, en JSON: qué reserva, de quién, dónde y cuándo.</a:t>
             </a:r>
             <a:endParaRPr lang="en-US" sz="1400" dirty="0"/>
           </a:p>
@@ -11025,7 +9933,7 @@
                   <a:schemeClr val="accent6"/>
                 </a:solidFill>
               </a:rPr>
-              <a:t>Spring hace ack si el listener termina sin excepción</a:t>
+              <a:t>BookingEvent</a:t>
             </a:r>
             <a:endParaRPr lang="en-US" sz="1200" dirty="0"/>
           </a:p>
@@ -11127,7 +10035,7 @@
                   <a:schemeClr val="tx1"/>
                 </a:solidFill>
               </a:rPr>
-              <a:t>DLX y DLQ</a:t>
+              <a:t>Cola de errores (DLQ)</a:t>
             </a:r>
             <a:endParaRPr lang="en-US" sz="1700" dirty="0"/>
           </a:p>
@@ -11163,7 +10071,7 @@
                   <a:schemeClr val="tx1"/>
                 </a:solidFill>
               </a:rPr>
-              <a:t>Un mensaje rechazado sin reencolar va al dead letter exchange, que lo deja en una DLQ.</a:t>
+              <a:t>Donde terminan los mensajes que no se pudieron procesar, para revisarlos después.</a:t>
             </a:r>
             <a:endParaRPr lang="en-US" sz="1400" dirty="0"/>
           </a:p>
@@ -11199,7 +10107,7 @@
                   <a:schemeClr val="accent6"/>
                 </a:solidFill>
               </a:rPr>
-              <a:t>reservafit.dlx y *.bookings.dlq</a:t>
+              <a:t>una por servicio</a:t>
             </a:r>
             <a:endParaRPr lang="en-US" sz="1200" dirty="0"/>
           </a:p>
@@ -11401,7 +10309,7 @@
                   <a:schemeClr val="tx1"/>
                 </a:solidFill>
               </a:rPr>
-              <a:t>La routing key debe ser igual al binding.</a:t>
+              <a:t>Entrega solo si la etiqueta es exactamente igual a la regla.</a:t>
             </a:r>
             <a:endParaRPr lang="en-US" sz="1500" dirty="0"/>
           </a:p>
@@ -11437,7 +10345,7 @@
                   <a:schemeClr val="tx1"/>
                 </a:solidFill>
               </a:rPr>
-              <a:t>Lo usamos en reservafit.dlx: cada DLQ se enlaza con su propio nombre.</a:t>
+              <a:t>Lo usamos para llevar cada mensaje con error a su cola de errores.</a:t>
             </a:r>
             <a:endParaRPr lang="en-US" sz="1400" dirty="0"/>
           </a:p>
@@ -11531,7 +10439,7 @@
                   <a:schemeClr val="bg1"/>
                 </a:solidFill>
               </a:rPr>
-              <a:t>El binding es un patrón con comodines: * (una palabra) y # (cero o más).</a:t>
+              <a:t>La regla es un patrón: booking.* acepta cualquier etiqueta que empiece con booking.</a:t>
             </a:r>
             <a:endParaRPr lang="en-US" sz="1500" dirty="0"/>
           </a:p>
@@ -11567,7 +10475,7 @@
                   <a:schemeClr val="bg1"/>
                 </a:solidFill>
               </a:rPr>
-              <a:t>reservafit.events: booking.* recibe booking.created y booking.cancelled.</a:t>
+              <a:t>Lo usamos para las reservas: creadas y canceladas.</a:t>
             </a:r>
             <a:endParaRPr lang="en-US" sz="1400" dirty="0"/>
           </a:p>
@@ -11661,7 +10569,7 @@
                   <a:schemeClr val="tx1"/>
                 </a:solidFill>
               </a:rPr>
-              <a:t>Ignora la routing key y copia a todas las colas enlazadas.</a:t>
+              <a:t>Entrega a todas las colas, sin mirar la etiqueta.</a:t>
             </a:r>
             <a:endParaRPr lang="en-US" sz="1500" dirty="0"/>
           </a:p>
@@ -11697,7 +10605,7 @@
                   <a:schemeClr val="tx1"/>
                 </a:solidFill>
               </a:rPr>
-              <a:t>No lo usamos: topic permite filtrar si mañana hay eventos que no sean de reservas.</a:t>
+              <a:t>No lo usamos: topic nos deja filtrar si más adelante hay otros tipos de mensajes.</a:t>
             </a:r>
             <a:endParaRPr lang="en-US" sz="1400" dirty="0"/>
           </a:p>
@@ -12597,7 +11505,7 @@
                   <a:schemeClr val="tx1"/>
                 </a:solidFill>
               </a:rPr>
-              <a:t>Mismo binding booking.*, dos colas: el mensaje se copia a ambas</a:t>
+              <a:t>Dos colas con la misma regla: el mensaje se copia a ambas</a:t>
             </a:r>
             <a:endParaRPr lang="en-US" sz="1400" dirty="0"/>
           </a:p>
@@ -13087,7 +11995,7 @@
                   <a:schemeClr val="tx1"/>
                 </a:solidFill>
               </a:rPr>
-              <a:t>Varias instancias de un mismo servicio se reparten los mensajes de su cola</a:t>
+              <a:t>Varias copias de un mismo servicio se reparten los mensajes de una cola</a:t>
             </a:r>
             <a:endParaRPr lang="en-US" sz="1400" dirty="0"/>
           </a:p>
@@ -13123,7 +12031,7 @@
                   <a:schemeClr val="accent1"/>
                 </a:solidFill>
               </a:rPr>
-              <a:t>Por eso la cola la declara el servicio que la consume: cada consumidor nuevo trae su cola y su binding, sin tocar al productor.</a:t>
+              <a:t>Por eso cada servicio crea su propia cola: para sumar uno nuevo no hay que tocar ms-reservas.</a:t>
             </a:r>
             <a:endParaRPr lang="en-US" sz="1500" dirty="0"/>
           </a:p>
@@ -13938,7 +12846,7 @@
                   <a:schemeClr val="tx1"/>
                 </a:solidFill>
               </a:rPr>
-              <a:t>Dead letters: cada cola se declara con dos argumentos</a:t>
+              <a:t>Si un mensaje falla, cada cola lo deriva a su cola de errores</a:t>
             </a:r>
             <a:endParaRPr lang="en-US" sz="1500" dirty="0"/>
           </a:p>
@@ -13952,8 +12860,8 @@
         </p:nvSpPr>
         <p:spPr>
           <a:xfrm>
-            <a:off x="822960" y="4754880"/>
-            <a:ext cx="3931920" cy="822960"/>
+            <a:off x="822960" y="4846320"/>
+            <a:ext cx="3657600" cy="731520"/>
           </a:xfrm>
           <a:prstGeom prst="rect">
             <a:avLst/>
@@ -13969,34 +12877,14 @@
               <a:buNone/>
             </a:pPr>
             <a:r>
-              <a:rPr lang="en-US" sz="1200" dirty="0">
+              <a:rPr lang="en-US" sz="1500" dirty="0">
                 <a:solidFill>
                   <a:schemeClr val="tx1"/>
                 </a:solidFill>
-                <a:latin typeface="Courier New" pitchFamily="34" charset="0"/>
-                <a:ea typeface="Courier New" pitchFamily="34" charset="-122"/>
-                <a:cs typeface="Courier New" pitchFamily="34" charset="-120"/>
-              </a:rPr>
-              <a:t>x-dead-letter-exchange = reservafit.dlx</a:t>
-            </a:r>
-            <a:endParaRPr lang="en-US" sz="1200" dirty="0"/>
-          </a:p>
-          <a:p>
-            <a:pPr algn="l" indent="0" marL="0">
-              <a:buNone/>
-            </a:pPr>
-            <a:r>
-              <a:rPr lang="en-US" sz="1200" dirty="0">
-                <a:solidFill>
-                  <a:schemeClr val="tx1"/>
-                </a:solidFill>
-                <a:latin typeface="Courier New" pitchFamily="34" charset="0"/>
-                <a:ea typeface="Courier New" pitchFamily="34" charset="-122"/>
-                <a:cs typeface="Courier New" pitchFamily="34" charset="-120"/>
-              </a:rPr>
-              <a:t>x-dead-letter-routing-key = &lt;cola&gt;.dlq</a:t>
-            </a:r>
-            <a:endParaRPr lang="en-US" sz="1200" dirty="0"/>
+              </a:rPr>
+              <a:t>Mensaje que no se pudo procesar</a:t>
+            </a:r>
+            <a:endParaRPr lang="en-US" sz="1500" dirty="0"/>
           </a:p>
         </p:txBody>
       </p:sp>
@@ -14069,7 +12957,7 @@
                   <a:schemeClr val="bg1"/>
                 </a:solidFill>
               </a:rPr>
-              <a:t>exchange direct</a:t>
+              <a:t>exchange de errores</a:t>
             </a:r>
             <a:endParaRPr lang="en-US" sz="1200" dirty="0"/>
           </a:p>
@@ -14278,42 +13166,6 @@
             <a:tailEnd type="triangle"/>
           </a:ln>
         </p:spPr>
-      </p:sp>
-      <p:sp>
-        <p:nvSpPr>
-          <p:cNvPr id="34" name="text-163"/>
-          <p:cNvSpPr txBox="1"/>
-          <p:nvPr/>
-        </p:nvSpPr>
-        <p:spPr>
-          <a:xfrm>
-            <a:off x="4343400" y="5577840"/>
-            <a:ext cx="914400" cy="320040"/>
-          </a:xfrm>
-          <a:prstGeom prst="rect">
-            <a:avLst/>
-          </a:prstGeom>
-          <a:noFill/>
-          <a:ln/>
-        </p:spPr>
-        <p:txBody>
-          <a:bodyPr wrap="square" lIns="0" tIns="0" rIns="0" bIns="0" rtlCol="0" anchor="ctr"/>
-          <a:lstStyle/>
-          <a:p>
-            <a:pPr algn="ctr" indent="0" marL="0">
-              <a:buNone/>
-            </a:pPr>
-            <a:r>
-              <a:rPr lang="en-US" sz="1100" dirty="0">
-                <a:solidFill>
-                  <a:schemeClr val="accent4"/>
-                </a:solidFill>
-              </a:rPr>
-              <a:t>rechazado</a:t>
-            </a:r>
-            <a:endParaRPr lang="en-US" sz="1100" dirty="0"/>
-          </a:p>
-        </p:txBody>
       </p:sp>
       <p:sp>
         <p:nvSpPr>
@@ -14417,7 +13269,7 @@
                   <a:schemeClr val="tx1"/>
                 </a:solidFill>
               </a:rPr>
-              <a:t>El mensaje: BookingEvent en JSON</a:t>
+              <a:t>El mensaje: una reserva en JSON</a:t>
             </a:r>
             <a:endParaRPr lang="en-US" sz="3200" dirty="0"/>
           </a:p>
@@ -14425,7 +13277,7 @@
       </p:sp>
       <p:sp>
         <p:nvSpPr>
-          <p:cNvPr id="3" name="box-164"/>
+          <p:cNvPr id="3" name="box-163"/>
           <p:cNvSpPr/>
           <p:nvPr/>
         </p:nvSpPr>
@@ -14447,7 +13299,7 @@
       </p:sp>
       <p:sp>
         <p:nvSpPr>
-          <p:cNvPr id="4" name="code-165"/>
+          <p:cNvPr id="4" name="code-164"/>
           <p:cNvSpPr txBox="1"/>
           <p:nvPr/>
         </p:nvSpPr>
@@ -14782,14 +13634,14 @@
       </p:sp>
       <p:sp>
         <p:nvSpPr>
-          <p:cNvPr id="5" name="text-166"/>
+          <p:cNvPr id="5" name="text-165"/>
           <p:cNvSpPr txBox="1"/>
           <p:nvPr/>
         </p:nvSpPr>
         <p:spPr>
           <a:xfrm>
             <a:off x="548640" y="5120640"/>
-            <a:ext cx="5486400" cy="548640"/>
+            <a:ext cx="5486400" cy="365760"/>
           </a:xfrm>
           <a:prstGeom prst="rect">
             <a:avLst/>
@@ -14805,23 +13657,20 @@
               <a:buNone/>
             </a:pPr>
             <a:r>
-              <a:rPr lang="en-US" sz="1200" dirty="0">
+              <a:rPr lang="en-US" sz="1300" dirty="0">
                 <a:solidFill>
                   <a:schemeClr val="accent6"/>
                 </a:solidFill>
-                <a:latin typeface="Courier New" pitchFamily="34" charset="0"/>
-                <a:ea typeface="Courier New" pitchFamily="34" charset="-122"/>
-                <a:cs typeface="Courier New" pitchFamily="34" charset="-120"/>
-              </a:rPr>
-              <a:t>routing key: booking.created · content-type: application/json</a:t>
-            </a:r>
-            <a:endParaRPr lang="en-US" sz="1200" dirty="0"/>
-          </a:p>
-        </p:txBody>
-      </p:sp>
-      <p:sp>
-        <p:nvSpPr>
-          <p:cNvPr id="6" name="circle-167"/>
+              </a:rPr>
+              <a:t>Etiqueta (routing key): booking.created</a:t>
+            </a:r>
+            <a:endParaRPr lang="en-US" sz="1300" dirty="0"/>
+          </a:p>
+        </p:txBody>
+      </p:sp>
+      <p:sp>
+        <p:nvSpPr>
+          <p:cNvPr id="6" name="circle-166"/>
           <p:cNvSpPr/>
           <p:nvPr/>
         </p:nvSpPr>
@@ -14841,7 +13690,7 @@
       </p:sp>
       <p:pic>
         <p:nvPicPr>
-          <p:cNvPr id="7" name="icon-168" descr="preencoded.png">    </p:cNvPr>
+          <p:cNvPr id="7" name="icon-167" descr="preencoded.png">    </p:cNvPr>
           <p:cNvPicPr>
             <a:picLocks noChangeAspect="1"/>
           </p:cNvPicPr>
@@ -14865,7 +13714,7 @@
       </p:pic>
       <p:sp>
         <p:nvSpPr>
-          <p:cNvPr id="8" name="text-169"/>
+          <p:cNvPr id="8" name="text-168"/>
           <p:cNvSpPr txBox="1"/>
           <p:nvPr/>
         </p:nvSpPr>
@@ -14893,7 +13742,7 @@
                   <a:schemeClr val="tx1"/>
                 </a:solidFill>
               </a:rPr>
-              <a:t>El contrato son los nombres JSON</a:t>
+              <a:t>Describe lo que pasó</a:t>
             </a:r>
             <a:endParaRPr lang="en-US" sz="1700" dirty="0"/>
           </a:p>
@@ -14901,7 +13750,7 @@
       </p:sp>
       <p:sp>
         <p:nvSpPr>
-          <p:cNvPr id="9" name="text-170"/>
+          <p:cNvPr id="9" name="text-169"/>
           <p:cNvSpPr txBox="1"/>
           <p:nvPr/>
         </p:nvSpPr>
@@ -14929,7 +13778,7 @@
                   <a:schemeClr val="tx1"/>
                 </a:solidFill>
               </a:rPr>
-              <a:t>No hay código compartido: la clase BookingEvent está copiada en los tres servicios. Un cambio de campo se hace en los tres.</a:t>
+              <a:t>Qué reserva, de qué usuario, en qué gimnasio, qué día y a qué hora, y si se creó o se canceló.</a:t>
             </a:r>
             <a:endParaRPr lang="en-US" sz="1400" dirty="0"/>
           </a:p>
@@ -14937,7 +13786,7 @@
       </p:sp>
       <p:sp>
         <p:nvSpPr>
-          <p:cNvPr id="10" name="circle-171"/>
+          <p:cNvPr id="10" name="circle-170"/>
           <p:cNvSpPr/>
           <p:nvPr/>
         </p:nvSpPr>
@@ -14957,7 +13806,7 @@
       </p:sp>
       <p:pic>
         <p:nvPicPr>
-          <p:cNvPr id="11" name="icon-172" descr="preencoded.png">    </p:cNvPr>
+          <p:cNvPr id="11" name="icon-171" descr="preencoded.png">    </p:cNvPr>
           <p:cNvPicPr>
             <a:picLocks noChangeAspect="1"/>
           </p:cNvPicPr>
@@ -14981,7 +13830,7 @@
       </p:pic>
       <p:sp>
         <p:nvSpPr>
-          <p:cNvPr id="12" name="text-173"/>
+          <p:cNvPr id="12" name="text-172"/>
           <p:cNvSpPr txBox="1"/>
           <p:nvPr/>
         </p:nvSpPr>
@@ -15009,7 +13858,7 @@
                   <a:schemeClr val="tx1"/>
                 </a:solidFill>
               </a:rPr>
-              <a:t>Se lee en la clase del consumidor</a:t>
+              <a:t>Cada servicio tiene su copia</a:t>
             </a:r>
             <a:endParaRPr lang="en-US" sz="1700" dirty="0"/>
           </a:p>
@@ -15017,7 +13866,7 @@
       </p:sp>
       <p:sp>
         <p:nvSpPr>
-          <p:cNvPr id="13" name="text-174"/>
+          <p:cNvPr id="13" name="text-173"/>
           <p:cNvSpPr txBox="1"/>
           <p:nvPr/>
         </p:nvSpPr>
@@ -15045,7 +13894,7 @@
                   <a:schemeClr val="tx1"/>
                 </a:solidFill>
               </a:rPr>
-              <a:t>setAlwaysConvertToInferredType(true): el JSON se convierte al tipo del parámetro del listener, aunque el productor use otro paquete.</a:t>
+              <a:t>Los servicios no comparten código: basta con que los nombres de los campos coincidan.</a:t>
             </a:r>
             <a:endParaRPr lang="en-US" sz="1400" dirty="0"/>
           </a:p>
@@ -15053,7 +13902,7 @@
       </p:sp>
       <p:sp>
         <p:nvSpPr>
-          <p:cNvPr id="14" name="circle-175"/>
+          <p:cNvPr id="14" name="circle-174"/>
           <p:cNvSpPr/>
           <p:nvPr/>
         </p:nvSpPr>
@@ -15073,7 +13922,7 @@
       </p:sp>
       <p:pic>
         <p:nvPicPr>
-          <p:cNvPr id="15" name="icon-176" descr="preencoded.png">    </p:cNvPr>
+          <p:cNvPr id="15" name="icon-175" descr="preencoded.png">    </p:cNvPr>
           <p:cNvPicPr>
             <a:picLocks noChangeAspect="1"/>
           </p:cNvPicPr>
@@ -15097,7 +13946,7 @@
       </p:pic>
       <p:sp>
         <p:nvSpPr>
-          <p:cNvPr id="16" name="text-177"/>
+          <p:cNvPr id="16" name="text-176"/>
           <p:cNvSpPr txBox="1"/>
           <p:nvPr/>
         </p:nvSpPr>
@@ -15133,7 +13982,7 @@
       </p:sp>
       <p:sp>
         <p:nvSpPr>
-          <p:cNvPr id="17" name="text-178"/>
+          <p:cNvPr id="17" name="text-177"/>
           <p:cNvSpPr txBox="1"/>
           <p:nvPr/>
         </p:nvSpPr>
@@ -15161,7 +14010,7 @@
                   <a:schemeClr val="tx1"/>
                 </a:solidFill>
               </a:rPr>
-              <a:t>gymName y horas viajan en el mensaje, así ningún consumidor tiene que llamar a ms-gimnasios.</a:t>
+              <a:t>El nombre del gimnasio y el horario van en el mensaje, así nadie tiene que preguntarle a ms-gimnasios.</a:t>
             </a:r>
             <a:endParaRPr lang="en-US" sz="1400" dirty="0"/>
           </a:p>
@@ -15277,7 +14126,7 @@
       </p:sp>
       <p:sp>
         <p:nvSpPr>
-          <p:cNvPr id="3" name="step-179"/>
+          <p:cNvPr id="3" name="step-178"/>
           <p:cNvSpPr/>
           <p:nvPr/>
         </p:nvSpPr>
@@ -15297,7 +14146,7 @@
       </p:sp>
       <p:sp>
         <p:nvSpPr>
-          <p:cNvPr id="4" name="text-180"/>
+          <p:cNvPr id="4" name="text-179"/>
           <p:cNvSpPr txBox="1"/>
           <p:nvPr/>
         </p:nvSpPr>
@@ -15333,7 +14182,7 @@
       </p:sp>
       <p:sp>
         <p:nvSpPr>
-          <p:cNvPr id="5" name="text-181"/>
+          <p:cNvPr id="5" name="text-180"/>
           <p:cNvSpPr txBox="1"/>
           <p:nvPr/>
         </p:nvSpPr>
@@ -15369,7 +14218,7 @@
       </p:sp>
       <p:sp>
         <p:nvSpPr>
-          <p:cNvPr id="6" name="text-182"/>
+          <p:cNvPr id="6" name="text-181"/>
           <p:cNvSpPr txBox="1"/>
           <p:nvPr/>
         </p:nvSpPr>
@@ -15397,7 +14246,7 @@
                   <a:schemeClr val="tx1"/>
                 </a:solidFill>
               </a:rPr>
-              <a:t>El usuario elige horario y pulsa Reservar: POST /api/reservas con su token</a:t>
+              <a:t>El usuario elige un horario y pulsa Reservar; la reserva se envía al backend</a:t>
             </a:r>
             <a:endParaRPr lang="en-US" sz="1400" dirty="0"/>
           </a:p>
@@ -15405,7 +14254,7 @@
       </p:sp>
       <p:sp>
         <p:nvSpPr>
-          <p:cNvPr id="7" name="conn-183"/>
+          <p:cNvPr id="7" name="conn-182"/>
           <p:cNvSpPr/>
           <p:nvPr/>
         </p:nvSpPr>
@@ -15428,7 +14277,7 @@
       </p:sp>
       <p:sp>
         <p:nvSpPr>
-          <p:cNvPr id="8" name="step-184"/>
+          <p:cNvPr id="8" name="step-183"/>
           <p:cNvSpPr/>
           <p:nvPr/>
         </p:nvSpPr>
@@ -15448,7 +14297,7 @@
       </p:sp>
       <p:sp>
         <p:nvSpPr>
-          <p:cNvPr id="9" name="text-185"/>
+          <p:cNvPr id="9" name="text-184"/>
           <p:cNvSpPr txBox="1"/>
           <p:nvPr/>
         </p:nvSpPr>
@@ -15484,7 +14333,7 @@
       </p:sp>
       <p:sp>
         <p:nvSpPr>
-          <p:cNvPr id="10" name="text-186"/>
+          <p:cNvPr id="10" name="text-185"/>
           <p:cNvSpPr txBox="1"/>
           <p:nvPr/>
         </p:nvSpPr>
@@ -15520,7 +14369,7 @@
       </p:sp>
       <p:sp>
         <p:nvSpPr>
-          <p:cNvPr id="11" name="text-187"/>
+          <p:cNvPr id="11" name="text-186"/>
           <p:cNvSpPr txBox="1"/>
           <p:nvPr/>
         </p:nvSpPr>
@@ -15548,7 +14397,7 @@
                   <a:schemeClr val="tx1"/>
                 </a:solidFill>
               </a:rPr>
-              <a:t>BookingService valida fecha y cupo, y guarda la reserva (saveAndFlush)</a:t>
+              <a:t>ms-reservas revisa la fecha y que el horario esté libre, y guarda la reserva</a:t>
             </a:r>
             <a:endParaRPr lang="en-US" sz="1400" dirty="0"/>
           </a:p>
@@ -15556,7 +14405,7 @@
       </p:sp>
       <p:sp>
         <p:nvSpPr>
-          <p:cNvPr id="12" name="conn-188"/>
+          <p:cNvPr id="12" name="conn-187"/>
           <p:cNvSpPr/>
           <p:nvPr/>
         </p:nvSpPr>
@@ -15579,7 +14428,7 @@
       </p:sp>
       <p:sp>
         <p:nvSpPr>
-          <p:cNvPr id="13" name="step-189"/>
+          <p:cNvPr id="13" name="step-188"/>
           <p:cNvSpPr/>
           <p:nvPr/>
         </p:nvSpPr>
@@ -15599,7 +14448,7 @@
       </p:sp>
       <p:sp>
         <p:nvSpPr>
-          <p:cNvPr id="14" name="text-190"/>
+          <p:cNvPr id="14" name="text-189"/>
           <p:cNvSpPr txBox="1"/>
           <p:nvPr/>
         </p:nvSpPr>
@@ -15635,7 +14484,7 @@
       </p:sp>
       <p:sp>
         <p:nvSpPr>
-          <p:cNvPr id="15" name="text-191"/>
+          <p:cNvPr id="15" name="text-190"/>
           <p:cNvSpPr txBox="1"/>
           <p:nvPr/>
         </p:nvSpPr>
@@ -15663,7 +14512,7 @@
                   <a:schemeClr val="tx1"/>
                 </a:solidFill>
               </a:rPr>
-              <a:t>Evento interno</a:t>
+              <a:t>Prepara el mensaje</a:t>
             </a:r>
             <a:endParaRPr lang="en-US" sz="1500" dirty="0"/>
           </a:p>
@@ -15671,7 +14520,7 @@
       </p:sp>
       <p:sp>
         <p:nvSpPr>
-          <p:cNvPr id="16" name="text-192"/>
+          <p:cNvPr id="16" name="text-191"/>
           <p:cNvSpPr txBox="1"/>
           <p:nvPr/>
         </p:nvSpPr>
@@ -15699,7 +14548,7 @@
                   <a:schemeClr val="tx1"/>
                 </a:solidFill>
               </a:rPr>
-              <a:t>publishEvent(BookingEvent): Spring lo retiene hasta el commit</a:t>
+              <a:t>Lo deja listo, pero espera a que la reserva quede guardada</a:t>
             </a:r>
             <a:endParaRPr lang="en-US" sz="1400" dirty="0"/>
           </a:p>
@@ -15707,7 +14556,7 @@
       </p:sp>
       <p:sp>
         <p:nvSpPr>
-          <p:cNvPr id="17" name="conn-193"/>
+          <p:cNvPr id="17" name="conn-192"/>
           <p:cNvSpPr/>
           <p:nvPr/>
         </p:nvSpPr>
@@ -15730,7 +14579,7 @@
       </p:sp>
       <p:sp>
         <p:nvSpPr>
-          <p:cNvPr id="18" name="step-194"/>
+          <p:cNvPr id="18" name="step-193"/>
           <p:cNvSpPr/>
           <p:nvPr/>
         </p:nvSpPr>
@@ -15750,7 +14599,7 @@
       </p:sp>
       <p:sp>
         <p:nvSpPr>
-          <p:cNvPr id="19" name="text-195"/>
+          <p:cNvPr id="19" name="text-194"/>
           <p:cNvSpPr txBox="1"/>
           <p:nvPr/>
         </p:nvSpPr>
@@ -15786,7 +14635,7 @@
       </p:sp>
       <p:sp>
         <p:nvSpPr>
-          <p:cNvPr id="20" name="text-196"/>
+          <p:cNvPr id="20" name="text-195"/>
           <p:cNvSpPr txBox="1"/>
           <p:nvPr/>
         </p:nvSpPr>
@@ -15814,7 +14663,7 @@
                   <a:schemeClr val="tx1"/>
                 </a:solidFill>
               </a:rPr>
-              <a:t>Commit y respuesta</a:t>
+              <a:t>Reserva confirmada</a:t>
             </a:r>
             <a:endParaRPr lang="en-US" sz="1500" dirty="0"/>
           </a:p>
@@ -15822,7 +14671,7 @@
       </p:sp>
       <p:sp>
         <p:nvSpPr>
-          <p:cNvPr id="21" name="text-197"/>
+          <p:cNvPr id="21" name="text-196"/>
           <p:cNvSpPr txBox="1"/>
           <p:nvPr/>
         </p:nvSpPr>
@@ -15850,7 +14699,7 @@
                   <a:schemeClr val="tx1"/>
                 </a:solidFill>
               </a:rPr>
-              <a:t>La transacción se confirma y el usuario recibe 201 Created</a:t>
+              <a:t>La reserva queda guardada y el usuario ve su confirmación</a:t>
             </a:r>
             <a:endParaRPr lang="en-US" sz="1400" dirty="0"/>
           </a:p>
@@ -15858,7 +14707,7 @@
       </p:sp>
       <p:sp>
         <p:nvSpPr>
-          <p:cNvPr id="22" name="conn-198"/>
+          <p:cNvPr id="22" name="conn-197"/>
           <p:cNvSpPr/>
           <p:nvPr/>
         </p:nvSpPr>
@@ -15881,7 +14730,7 @@
       </p:sp>
       <p:sp>
         <p:nvSpPr>
-          <p:cNvPr id="23" name="step-199"/>
+          <p:cNvPr id="23" name="step-198"/>
           <p:cNvSpPr/>
           <p:nvPr/>
         </p:nvSpPr>
@@ -15901,7 +14750,7 @@
       </p:sp>
       <p:sp>
         <p:nvSpPr>
-          <p:cNvPr id="24" name="text-200"/>
+          <p:cNvPr id="24" name="text-199"/>
           <p:cNvSpPr txBox="1"/>
           <p:nvPr/>
         </p:nvSpPr>
@@ -15937,7 +14786,7 @@
       </p:sp>
       <p:sp>
         <p:nvSpPr>
-          <p:cNvPr id="25" name="text-201"/>
+          <p:cNvPr id="25" name="text-200"/>
           <p:cNvSpPr txBox="1"/>
           <p:nvPr/>
         </p:nvSpPr>
@@ -15973,7 +14822,7 @@
       </p:sp>
       <p:sp>
         <p:nvSpPr>
-          <p:cNvPr id="26" name="text-202"/>
+          <p:cNvPr id="26" name="text-201"/>
           <p:cNvSpPr txBox="1"/>
           <p:nvPr/>
         </p:nvSpPr>
@@ -16001,7 +14850,7 @@
                   <a:schemeClr val="tx1"/>
                 </a:solidFill>
               </a:rPr>
-              <a:t>BookingEventPublisher envía a reservafit.events con booking.created</a:t>
+              <a:t>ms-reservas envía el mensaje con la etiqueta booking.created</a:t>
             </a:r>
             <a:endParaRPr lang="en-US" sz="1400" dirty="0"/>
           </a:p>
@@ -16009,7 +14858,7 @@
       </p:sp>
       <p:sp>
         <p:nvSpPr>
-          <p:cNvPr id="27" name="conn-203"/>
+          <p:cNvPr id="27" name="conn-202"/>
           <p:cNvSpPr/>
           <p:nvPr/>
         </p:nvSpPr>
@@ -16032,7 +14881,7 @@
       </p:sp>
       <p:sp>
         <p:nvSpPr>
-          <p:cNvPr id="28" name="step-204"/>
+          <p:cNvPr id="28" name="step-203"/>
           <p:cNvSpPr/>
           <p:nvPr/>
         </p:nvSpPr>
@@ -16052,7 +14901,7 @@
       </p:sp>
       <p:sp>
         <p:nvSpPr>
-          <p:cNvPr id="29" name="text-205"/>
+          <p:cNvPr id="29" name="text-204"/>
           <p:cNvSpPr txBox="1"/>
           <p:nvPr/>
         </p:nvSpPr>
@@ -16088,7 +14937,7 @@
       </p:sp>
       <p:sp>
         <p:nvSpPr>
-          <p:cNvPr id="30" name="text-206"/>
+          <p:cNvPr id="30" name="text-205"/>
           <p:cNvSpPr txBox="1"/>
           <p:nvPr/>
         </p:nvSpPr>
@@ -16124,7 +14973,7 @@
       </p:sp>
       <p:sp>
         <p:nvSpPr>
-          <p:cNvPr id="31" name="text-207"/>
+          <p:cNvPr id="31" name="text-206"/>
           <p:cNvSpPr txBox="1"/>
           <p:nvPr/>
         </p:nvSpPr>
@@ -16160,7 +15009,7 @@
       </p:sp>
       <p:sp>
         <p:nvSpPr>
-          <p:cNvPr id="32" name="conn-208"/>
+          <p:cNvPr id="32" name="conn-207"/>
           <p:cNvSpPr/>
           <p:nvPr/>
         </p:nvSpPr>
@@ -16183,7 +15032,7 @@
       </p:sp>
       <p:sp>
         <p:nvSpPr>
-          <p:cNvPr id="33" name="step-209"/>
+          <p:cNvPr id="33" name="step-208"/>
           <p:cNvSpPr/>
           <p:nvPr/>
         </p:nvSpPr>
@@ -16203,7 +15052,7 @@
       </p:sp>
       <p:sp>
         <p:nvSpPr>
-          <p:cNvPr id="34" name="text-210"/>
+          <p:cNvPr id="34" name="text-209"/>
           <p:cNvSpPr txBox="1"/>
           <p:nvPr/>
         </p:nvSpPr>
@@ -16239,7 +15088,7 @@
       </p:sp>
       <p:sp>
         <p:nvSpPr>
-          <p:cNvPr id="35" name="text-211"/>
+          <p:cNvPr id="35" name="text-210"/>
           <p:cNvSpPr txBox="1"/>
           <p:nvPr/>
         </p:nvSpPr>
@@ -16275,7 +15124,7 @@
       </p:sp>
       <p:sp>
         <p:nvSpPr>
-          <p:cNvPr id="36" name="text-212"/>
+          <p:cNvPr id="36" name="text-211"/>
           <p:cNvSpPr txBox="1"/>
           <p:nvPr/>
         </p:nvSpPr>
@@ -16311,7 +15160,7 @@
       </p:sp>
       <p:sp>
         <p:nvSpPr>
-          <p:cNvPr id="37" name="conn-213"/>
+          <p:cNvPr id="37" name="conn-212"/>
           <p:cNvSpPr/>
           <p:nvPr/>
         </p:nvSpPr>
@@ -16334,7 +15183,7 @@
       </p:sp>
       <p:sp>
         <p:nvSpPr>
-          <p:cNvPr id="38" name="step-214"/>
+          <p:cNvPr id="38" name="step-213"/>
           <p:cNvSpPr/>
           <p:nvPr/>
         </p:nvSpPr>
@@ -16354,7 +15203,7 @@
       </p:sp>
       <p:sp>
         <p:nvSpPr>
-          <p:cNvPr id="39" name="text-215"/>
+          <p:cNvPr id="39" name="text-214"/>
           <p:cNvSpPr txBox="1"/>
           <p:nvPr/>
         </p:nvSpPr>
@@ -16390,7 +15239,7 @@
       </p:sp>
       <p:sp>
         <p:nvSpPr>
-          <p:cNvPr id="40" name="text-216"/>
+          <p:cNvPr id="40" name="text-215"/>
           <p:cNvSpPr txBox="1"/>
           <p:nvPr/>
         </p:nvSpPr>
@@ -16426,7 +15275,7 @@
       </p:sp>
       <p:sp>
         <p:nvSpPr>
-          <p:cNvPr id="41" name="text-217"/>
+          <p:cNvPr id="41" name="text-216"/>
           <p:cNvSpPr txBox="1"/>
           <p:nvPr/>
         </p:nvSpPr>
@@ -16454,7 +15303,7 @@
                   <a:schemeClr val="tx1"/>
                 </a:solidFill>
               </a:rPr>
-              <a:t>La campana pide GET /api/notificaciones y muestra el aviso</a:t>
+              <a:t>La campana consulta los avisos y muestra el nuevo</a:t>
             </a:r>
             <a:endParaRPr lang="en-US" sz="1400" dirty="0"/>
           </a:p>
@@ -16462,7 +15311,7 @@
       </p:sp>
       <p:sp>
         <p:nvSpPr>
-          <p:cNvPr id="42" name="box-218"/>
+          <p:cNvPr id="42" name="box-217"/>
           <p:cNvSpPr/>
           <p:nvPr/>
         </p:nvSpPr>
@@ -16484,7 +15333,7 @@
       </p:sp>
       <p:sp>
         <p:nvSpPr>
-          <p:cNvPr id="43" name="text-219"/>
+          <p:cNvPr id="43" name="text-218"/>
           <p:cNvSpPr txBox="1"/>
           <p:nvPr/>
         </p:nvSpPr>
@@ -16520,7 +15369,7 @@
       </p:sp>
       <p:sp>
         <p:nvSpPr>
-          <p:cNvPr id="44" name="legend-220"/>
+          <p:cNvPr id="44" name="legend-219"/>
           <p:cNvSpPr/>
           <p:nvPr/>
         </p:nvSpPr>
@@ -16540,7 +15389,7 @@
       </p:sp>
       <p:sp>
         <p:nvSpPr>
-          <p:cNvPr id="45" name="text-221"/>
+          <p:cNvPr id="45" name="text-220"/>
           <p:cNvSpPr txBox="1"/>
           <p:nvPr/>
         </p:nvSpPr>
@@ -16576,7 +15425,7 @@
       </p:sp>
       <p:sp>
         <p:nvSpPr>
-          <p:cNvPr id="46" name="legend-222"/>
+          <p:cNvPr id="46" name="legend-221"/>
           <p:cNvSpPr/>
           <p:nvPr/>
         </p:nvSpPr>
@@ -16596,7 +15445,7 @@
       </p:sp>
       <p:sp>
         <p:nvSpPr>
-          <p:cNvPr id="47" name="text-223"/>
+          <p:cNvPr id="47" name="text-222"/>
           <p:cNvSpPr txBox="1"/>
           <p:nvPr/>
         </p:nvSpPr>
@@ -16632,7 +15481,7 @@
       </p:sp>
       <p:sp>
         <p:nvSpPr>
-          <p:cNvPr id="48" name="legend-224"/>
+          <p:cNvPr id="48" name="legend-223"/>
           <p:cNvSpPr/>
           <p:nvPr/>
         </p:nvSpPr>
@@ -16652,7 +15501,7 @@
       </p:sp>
       <p:sp>
         <p:nvSpPr>
-          <p:cNvPr id="49" name="text-225"/>
+          <p:cNvPr id="49" name="text-224"/>
           <p:cNvSpPr txBox="1"/>
           <p:nvPr/>
         </p:nvSpPr>
@@ -16688,7 +15537,7 @@
       </p:sp>
       <p:sp>
         <p:nvSpPr>
-          <p:cNvPr id="50" name="legend-226"/>
+          <p:cNvPr id="50" name="legend-225"/>
           <p:cNvSpPr/>
           <p:nvPr/>
         </p:nvSpPr>
@@ -16708,7 +15557,7 @@
       </p:sp>
       <p:sp>
         <p:nvSpPr>
-          <p:cNvPr id="51" name="text-227"/>
+          <p:cNvPr id="51" name="text-226"/>
           <p:cNvSpPr txBox="1"/>
           <p:nvPr/>
         </p:nvSpPr>
@@ -16744,7 +15593,7 @@
       </p:sp>
       <p:sp>
         <p:nvSpPr>
-          <p:cNvPr id="52" name="text-228"/>
+          <p:cNvPr id="52" name="text-227"/>
           <p:cNvSpPr txBox="1"/>
           <p:nvPr/>
         </p:nvSpPr>
@@ -16772,7 +15621,7 @@
                   <a:schemeClr val="tx1"/>
                 </a:solidFill>
               </a:rPr>
-              <a:t>El 201 sale en el paso 4. Lo que pasa después no hace esperar al usuario: si un consumidor está caído, el mensaje espera en su cola.</a:t>
+              <a:t>El usuario ve su confirmación en el paso 4. Lo que pasa después no lo hace esperar: si un servicio está caído, el mensaje lo espera en su cola.</a:t>
             </a:r>
             <a:endParaRPr lang="en-US" sz="1400" dirty="0"/>
           </a:p>
